--- a/presentations/cmo-insightful-ai-access/CMO_Insightful_AI_Access_Recommendation.pptx
+++ b/presentations/cmo-insightful-ai-access/CMO_Insightful_AI_Access_Recommendation.pptx
@@ -20,6 +20,8 @@
     <p:sldId id="268" r:id="rId19"/>
     <p:sldId id="269" r:id="rId20"/>
     <p:sldId id="270" r:id="rId21"/>
+    <p:sldId id="271" r:id="rId22"/>
+    <p:sldId id="272" r:id="rId23"/>
   </p:sldIdLst>
   <p:sldSz cx="12191695" cy="6858000" type="screen4x3"/>
   <p:notesSz cx="6858000" cy="9144000"/>
@@ -3484,8 +3486,8 @@
         </p:nvSpPr>
         <p:spPr>
           <a:xfrm>
-            <a:off x="548640" y="274320"/>
-            <a:ext cx="10972800" cy="411480"/>
+            <a:off x="548640" y="365760"/>
+            <a:ext cx="10972800" cy="457200"/>
           </a:xfrm>
           <a:prstGeom prst="rect">
             <a:avLst/>
@@ -3500,62 +3502,27 @@
           <a:p>
             <a:pPr algn="l"/>
             <a:r>
-              <a:rPr sz="2400" b="1">
+              <a:rPr sz="2800" b="1">
                 <a:solidFill>
                   <a:srgbClr val="0C2577"/>
                 </a:solidFill>
                 <a:latin typeface="Arial"/>
               </a:rPr>
-              <a:t>Knowledge domain — where we are: golden questions</a:t>
-            </a:r>
-          </a:p>
-        </p:txBody>
-      </p:sp>
-      <p:sp>
-        <p:nvSpPr>
-          <p:cNvPr id="5" name="TextBox 4"/>
-          <p:cNvSpPr txBox="1"/>
-          <p:nvPr/>
-        </p:nvSpPr>
-        <p:spPr>
-          <a:xfrm>
-            <a:off x="548640" y="777240"/>
-            <a:ext cx="10972800" cy="365760"/>
-          </a:xfrm>
-          <a:prstGeom prst="rect">
-            <a:avLst/>
-          </a:prstGeom>
-          <a:noFill/>
-        </p:spPr>
-        <p:txBody>
-          <a:bodyPr wrap="square">
-            <a:spAutoFit/>
-          </a:bodyPr>
-          <a:lstStyle/>
-          <a:p>
-            <a:pPr algn="l"/>
-            <a:r>
-              <a:rPr sz="1500" b="0">
-                <a:solidFill>
-                  <a:srgbClr val="5A5A5A"/>
-                </a:solidFill>
-                <a:latin typeface="Arial"/>
-              </a:rPr>
-              <a:t>This is the quality gate before Ask AT&amp;T should be trusted with Insightful answers.</a:t>
-            </a:r>
-          </a:p>
-        </p:txBody>
-      </p:sp>
-      <p:sp>
-        <p:nvSpPr>
-          <p:cNvPr id="6" name="Rounded Rectangle 5"/>
+              <a:t>Recommendation</a:t>
+            </a:r>
+          </a:p>
+        </p:txBody>
+      </p:sp>
+      <p:sp>
+        <p:nvSpPr>
+          <p:cNvPr id="5" name="Rounded Rectangle 4"/>
           <p:cNvSpPr/>
           <p:nvPr/>
         </p:nvSpPr>
         <p:spPr>
           <a:xfrm>
-            <a:off x="548640" y="1280160"/>
-            <a:ext cx="3611880" cy="2057400"/>
+            <a:off x="548640" y="1051560"/>
+            <a:ext cx="11064240" cy="1463040"/>
           </a:xfrm>
           <a:prstGeom prst="roundRect">
             <a:avLst>
@@ -3563,7 +3530,7 @@
             </a:avLst>
           </a:prstGeom>
           <a:solidFill>
-            <a:srgbClr val="F2F4F7"/>
+            <a:srgbClr val="0C2577"/>
           </a:solidFill>
           <a:ln>
             <a:noFill/>
@@ -3593,35 +3560,106 @@
       </p:sp>
       <p:sp>
         <p:nvSpPr>
+          <p:cNvPr id="6" name="TextBox 5"/>
+          <p:cNvSpPr txBox="1"/>
+          <p:nvPr/>
+        </p:nvSpPr>
+        <p:spPr>
+          <a:xfrm>
+            <a:off x="868680" y="1280160"/>
+            <a:ext cx="10424160" cy="1005840"/>
+          </a:xfrm>
+          <a:prstGeom prst="rect">
+            <a:avLst/>
+          </a:prstGeom>
+          <a:noFill/>
+        </p:spPr>
+        <p:txBody>
+          <a:bodyPr wrap="square">
+            <a:spAutoFit/>
+          </a:bodyPr>
+          <a:lstStyle/>
+          <a:p>
+            <a:pPr algn="l"/>
+            <a:r>
+              <a:rPr sz="1800" b="0">
+                <a:solidFill>
+                  <a:srgbClr val="FFFFFF"/>
+                </a:solidFill>
+                <a:latin typeface="Arial"/>
+              </a:rPr>
+              <a:t>Sign on for MCP as the primary path for agent builders; enable API alongside it for custom AI tools. Advance the Ask AT&amp;T knowledge domain as a strategic side investment — not the near-term demand solution.</a:t>
+            </a:r>
+          </a:p>
+        </p:txBody>
+      </p:sp>
+      <p:sp>
+        <p:nvSpPr>
           <p:cNvPr id="7" name="TextBox 6"/>
           <p:cNvSpPr txBox="1"/>
           <p:nvPr/>
         </p:nvSpPr>
         <p:spPr>
           <a:xfrm>
-            <a:off x="731520" y="1508760"/>
-            <a:ext cx="3200400" cy="365760"/>
-          </a:xfrm>
-          <a:prstGeom prst="rect">
-            <a:avLst/>
-          </a:prstGeom>
-          <a:noFill/>
-        </p:spPr>
-        <p:txBody>
-          <a:bodyPr wrap="square">
-            <a:spAutoFit/>
-          </a:bodyPr>
-          <a:lstStyle/>
-          <a:p>
-            <a:pPr algn="l"/>
-            <a:r>
-              <a:rPr sz="1600" b="1">
-                <a:solidFill>
-                  <a:srgbClr val="067AB4"/>
-                </a:solidFill>
-                <a:latin typeface="Arial"/>
-              </a:rPr>
-              <a:t>1. Design the set</a:t>
+            <a:off x="548640" y="2834640"/>
+            <a:ext cx="10972800" cy="3200400"/>
+          </a:xfrm>
+          <a:prstGeom prst="rect">
+            <a:avLst/>
+          </a:prstGeom>
+          <a:noFill/>
+        </p:spPr>
+        <p:txBody>
+          <a:bodyPr wrap="square">
+            <a:spAutoFit/>
+          </a:bodyPr>
+          <a:lstStyle/>
+          <a:p>
+            <a:pPr>
+              <a:spcAft>
+                <a:spcPts val="1200"/>
+              </a:spcAft>
+            </a:pPr>
+            <a:r>
+              <a:rPr sz="1500" b="0">
+                <a:solidFill>
+                  <a:srgbClr val="5A5A5A"/>
+                </a:solidFill>
+                <a:latin typeface="Arial"/>
+              </a:rPr>
+              <a:t>Why MCP first for agents: it is the cleanest way for AI tools to call Insightful as a governed capability — search, retrieve, cite — without each team inventing a private pipeline.</a:t>
+            </a:r>
+          </a:p>
+          <a:p>
+            <a:pPr>
+              <a:spcAft>
+                <a:spcPts val="1200"/>
+              </a:spcAft>
+            </a:pPr>
+            <a:r>
+              <a:rPr sz="1500" b="0">
+                <a:solidFill>
+                  <a:srgbClr val="5A5A5A"/>
+                </a:solidFill>
+                <a:latin typeface="Arial"/>
+              </a:rPr>
+              <a:t>Why API with it: many AT&amp;T apps will not speak MCP yet; Search/Lookup covers those surfaces with the same live knowledge.</a:t>
+            </a:r>
+          </a:p>
+          <a:p>
+            <a:pPr>
+              <a:spcAft>
+                <a:spcPts val="1200"/>
+              </a:spcAft>
+            </a:pPr>
+            <a:r>
+              <a:rPr sz="1500" b="0">
+                <a:solidFill>
+                  <a:srgbClr val="5A5A5A"/>
+                </a:solidFill>
+                <a:latin typeface="Arial"/>
+              </a:rPr>
+              <a:t>Why domain stays strategic: security already drove a full copy into Ask Docs. That investment is real — and unfinished. Completing it requires golden questions, stewards, and operating cadence before it can rival Insightful’s curated experience.</a:t>
             </a:r>
           </a:p>
         </p:txBody>
@@ -3629,616 +3667,6 @@
       <p:sp>
         <p:nvSpPr>
           <p:cNvPr id="8" name="TextBox 7"/>
-          <p:cNvSpPr txBox="1"/>
-          <p:nvPr/>
-        </p:nvSpPr>
-        <p:spPr>
-          <a:xfrm>
-            <a:off x="731520" y="1965960"/>
-            <a:ext cx="3200400" cy="1188720"/>
-          </a:xfrm>
-          <a:prstGeom prst="rect">
-            <a:avLst/>
-          </a:prstGeom>
-          <a:noFill/>
-        </p:spPr>
-        <p:txBody>
-          <a:bodyPr wrap="square">
-            <a:spAutoFit/>
-          </a:bodyPr>
-          <a:lstStyle/>
-          <a:p>
-            <a:pPr algn="l"/>
-            <a:r>
-              <a:rPr sz="1300" b="0">
-                <a:solidFill>
-                  <a:srgbClr val="5A5A5A"/>
-                </a:solidFill>
-                <a:latin typeface="Arial"/>
-              </a:rPr>
-              <a:t>50–150 questions spanning priority brands, categories, regions, taxonomy terms, and hard negatives.</a:t>
-            </a:r>
-          </a:p>
-        </p:txBody>
-      </p:sp>
-      <p:sp>
-        <p:nvSpPr>
-          <p:cNvPr id="9" name="Rounded Rectangle 8"/>
-          <p:cNvSpPr/>
-          <p:nvPr/>
-        </p:nvSpPr>
-        <p:spPr>
-          <a:xfrm>
-            <a:off x="4343400" y="1280160"/>
-            <a:ext cx="3611880" cy="2057400"/>
-          </a:xfrm>
-          <a:prstGeom prst="roundRect">
-            <a:avLst>
-              <a:gd name="adj" fmla="val 5000"/>
-            </a:avLst>
-          </a:prstGeom>
-          <a:solidFill>
-            <a:srgbClr val="F2F4F7"/>
-          </a:solidFill>
-          <a:ln>
-            <a:noFill/>
-          </a:ln>
-        </p:spPr>
-        <p:style>
-          <a:lnRef idx="1">
-            <a:schemeClr val="accent1"/>
-          </a:lnRef>
-          <a:fillRef idx="3">
-            <a:schemeClr val="accent1"/>
-          </a:fillRef>
-          <a:effectRef idx="2">
-            <a:schemeClr val="accent1"/>
-          </a:effectRef>
-          <a:fontRef idx="minor">
-            <a:schemeClr val="lt1"/>
-          </a:fontRef>
-        </p:style>
-        <p:txBody>
-          <a:bodyPr rtlCol="0" anchor="ctr"/>
-          <a:lstStyle/>
-          <a:p>
-            <a:pPr algn="ctr"/>
-          </a:p>
-        </p:txBody>
-      </p:sp>
-      <p:sp>
-        <p:nvSpPr>
-          <p:cNvPr id="10" name="TextBox 9"/>
-          <p:cNvSpPr txBox="1"/>
-          <p:nvPr/>
-        </p:nvSpPr>
-        <p:spPr>
-          <a:xfrm>
-            <a:off x="4526280" y="1508760"/>
-            <a:ext cx="3200400" cy="365760"/>
-          </a:xfrm>
-          <a:prstGeom prst="rect">
-            <a:avLst/>
-          </a:prstGeom>
-          <a:noFill/>
-        </p:spPr>
-        <p:txBody>
-          <a:bodyPr wrap="square">
-            <a:spAutoFit/>
-          </a:bodyPr>
-          <a:lstStyle/>
-          <a:p>
-            <a:pPr algn="l"/>
-            <a:r>
-              <a:rPr sz="1600" b="1">
-                <a:solidFill>
-                  <a:srgbClr val="067AB4"/>
-                </a:solidFill>
-                <a:latin typeface="Arial"/>
-              </a:rPr>
-              <a:t>2. Write truth answers</a:t>
-            </a:r>
-          </a:p>
-        </p:txBody>
-      </p:sp>
-      <p:sp>
-        <p:nvSpPr>
-          <p:cNvPr id="11" name="TextBox 10"/>
-          <p:cNvSpPr txBox="1"/>
-          <p:nvPr/>
-        </p:nvSpPr>
-        <p:spPr>
-          <a:xfrm>
-            <a:off x="4526280" y="1965960"/>
-            <a:ext cx="3200400" cy="1188720"/>
-          </a:xfrm>
-          <a:prstGeom prst="rect">
-            <a:avLst/>
-          </a:prstGeom>
-          <a:noFill/>
-        </p:spPr>
-        <p:txBody>
-          <a:bodyPr wrap="square">
-            <a:spAutoFit/>
-          </a:bodyPr>
-          <a:lstStyle/>
-          <a:p>
-            <a:pPr algn="l"/>
-            <a:r>
-              <a:rPr sz="1300" b="0">
-                <a:solidFill>
-                  <a:srgbClr val="5A5A5A"/>
-                </a:solidFill>
-                <a:latin typeface="Arial"/>
-              </a:rPr>
-              <a:t>SME / steward authors expected answers with citations to source docs and metadata.</a:t>
-            </a:r>
-          </a:p>
-        </p:txBody>
-      </p:sp>
-      <p:sp>
-        <p:nvSpPr>
-          <p:cNvPr id="12" name="Rounded Rectangle 11"/>
-          <p:cNvSpPr/>
-          <p:nvPr/>
-        </p:nvSpPr>
-        <p:spPr>
-          <a:xfrm>
-            <a:off x="8138160" y="1280160"/>
-            <a:ext cx="3611880" cy="2057400"/>
-          </a:xfrm>
-          <a:prstGeom prst="roundRect">
-            <a:avLst>
-              <a:gd name="adj" fmla="val 5000"/>
-            </a:avLst>
-          </a:prstGeom>
-          <a:solidFill>
-            <a:srgbClr val="F2F4F7"/>
-          </a:solidFill>
-          <a:ln>
-            <a:noFill/>
-          </a:ln>
-        </p:spPr>
-        <p:style>
-          <a:lnRef idx="1">
-            <a:schemeClr val="accent1"/>
-          </a:lnRef>
-          <a:fillRef idx="3">
-            <a:schemeClr val="accent1"/>
-          </a:fillRef>
-          <a:effectRef idx="2">
-            <a:schemeClr val="accent1"/>
-          </a:effectRef>
-          <a:fontRef idx="minor">
-            <a:schemeClr val="lt1"/>
-          </a:fontRef>
-        </p:style>
-        <p:txBody>
-          <a:bodyPr rtlCol="0" anchor="ctr"/>
-          <a:lstStyle/>
-          <a:p>
-            <a:pPr algn="ctr"/>
-          </a:p>
-        </p:txBody>
-      </p:sp>
-      <p:sp>
-        <p:nvSpPr>
-          <p:cNvPr id="13" name="TextBox 12"/>
-          <p:cNvSpPr txBox="1"/>
-          <p:nvPr/>
-        </p:nvSpPr>
-        <p:spPr>
-          <a:xfrm>
-            <a:off x="8321040" y="1508760"/>
-            <a:ext cx="3200400" cy="365760"/>
-          </a:xfrm>
-          <a:prstGeom prst="rect">
-            <a:avLst/>
-          </a:prstGeom>
-          <a:noFill/>
-        </p:spPr>
-        <p:txBody>
-          <a:bodyPr wrap="square">
-            <a:spAutoFit/>
-          </a:bodyPr>
-          <a:lstStyle/>
-          <a:p>
-            <a:pPr algn="l"/>
-            <a:r>
-              <a:rPr sz="1600" b="1">
-                <a:solidFill>
-                  <a:srgbClr val="067AB4"/>
-                </a:solidFill>
-                <a:latin typeface="Arial"/>
-              </a:rPr>
-              <a:t>3. Run &amp; score</a:t>
-            </a:r>
-          </a:p>
-        </p:txBody>
-      </p:sp>
-      <p:sp>
-        <p:nvSpPr>
-          <p:cNvPr id="14" name="TextBox 13"/>
-          <p:cNvSpPr txBox="1"/>
-          <p:nvPr/>
-        </p:nvSpPr>
-        <p:spPr>
-          <a:xfrm>
-            <a:off x="8321040" y="1965960"/>
-            <a:ext cx="3200400" cy="1188720"/>
-          </a:xfrm>
-          <a:prstGeom prst="rect">
-            <a:avLst/>
-          </a:prstGeom>
-          <a:noFill/>
-        </p:spPr>
-        <p:txBody>
-          <a:bodyPr wrap="square">
-            <a:spAutoFit/>
-          </a:bodyPr>
-          <a:lstStyle/>
-          <a:p>
-            <a:pPr algn="l"/>
-            <a:r>
-              <a:rPr sz="1300" b="0">
-                <a:solidFill>
-                  <a:srgbClr val="5A5A5A"/>
-                </a:solidFill>
-                <a:latin typeface="Arial"/>
-              </a:rPr>
-              <a:t>Ask Docs answers each golden question; score correctness, completeness, citation quality, refusal behavior.</a:t>
-            </a:r>
-          </a:p>
-        </p:txBody>
-      </p:sp>
-      <p:sp>
-        <p:nvSpPr>
-          <p:cNvPr id="15" name="Rounded Rectangle 14"/>
-          <p:cNvSpPr/>
-          <p:nvPr/>
-        </p:nvSpPr>
-        <p:spPr>
-          <a:xfrm>
-            <a:off x="548640" y="3566160"/>
-            <a:ext cx="3611880" cy="2057400"/>
-          </a:xfrm>
-          <a:prstGeom prst="roundRect">
-            <a:avLst>
-              <a:gd name="adj" fmla="val 5000"/>
-            </a:avLst>
-          </a:prstGeom>
-          <a:solidFill>
-            <a:srgbClr val="F2F4F7"/>
-          </a:solidFill>
-          <a:ln>
-            <a:noFill/>
-          </a:ln>
-        </p:spPr>
-        <p:style>
-          <a:lnRef idx="1">
-            <a:schemeClr val="accent1"/>
-          </a:lnRef>
-          <a:fillRef idx="3">
-            <a:schemeClr val="accent1"/>
-          </a:fillRef>
-          <a:effectRef idx="2">
-            <a:schemeClr val="accent1"/>
-          </a:effectRef>
-          <a:fontRef idx="minor">
-            <a:schemeClr val="lt1"/>
-          </a:fontRef>
-        </p:style>
-        <p:txBody>
-          <a:bodyPr rtlCol="0" anchor="ctr"/>
-          <a:lstStyle/>
-          <a:p>
-            <a:pPr algn="ctr"/>
-          </a:p>
-        </p:txBody>
-      </p:sp>
-      <p:sp>
-        <p:nvSpPr>
-          <p:cNvPr id="16" name="TextBox 15"/>
-          <p:cNvSpPr txBox="1"/>
-          <p:nvPr/>
-        </p:nvSpPr>
-        <p:spPr>
-          <a:xfrm>
-            <a:off x="731520" y="3794760"/>
-            <a:ext cx="3200400" cy="365760"/>
-          </a:xfrm>
-          <a:prstGeom prst="rect">
-            <a:avLst/>
-          </a:prstGeom>
-          <a:noFill/>
-        </p:spPr>
-        <p:txBody>
-          <a:bodyPr wrap="square">
-            <a:spAutoFit/>
-          </a:bodyPr>
-          <a:lstStyle/>
-          <a:p>
-            <a:pPr algn="l"/>
-            <a:r>
-              <a:rPr sz="1600" b="1">
-                <a:solidFill>
-                  <a:srgbClr val="067AB4"/>
-                </a:solidFill>
-                <a:latin typeface="Arial"/>
-              </a:rPr>
-              <a:t>4. Tune &amp; retest</a:t>
-            </a:r>
-          </a:p>
-        </p:txBody>
-      </p:sp>
-      <p:sp>
-        <p:nvSpPr>
-          <p:cNvPr id="17" name="TextBox 16"/>
-          <p:cNvSpPr txBox="1"/>
-          <p:nvPr/>
-        </p:nvSpPr>
-        <p:spPr>
-          <a:xfrm>
-            <a:off x="731520" y="4251960"/>
-            <a:ext cx="3200400" cy="1188720"/>
-          </a:xfrm>
-          <a:prstGeom prst="rect">
-            <a:avLst/>
-          </a:prstGeom>
-          <a:noFill/>
-        </p:spPr>
-        <p:txBody>
-          <a:bodyPr wrap="square">
-            <a:spAutoFit/>
-          </a:bodyPr>
-          <a:lstStyle/>
-          <a:p>
-            <a:pPr algn="l"/>
-            <a:r>
-              <a:rPr sz="1300" b="0">
-                <a:solidFill>
-                  <a:srgbClr val="5A5A5A"/>
-                </a:solidFill>
-                <a:latin typeface="Arial"/>
-              </a:rPr>
-              <a:t>Fix retrieval, metadata, chunking, prompts; re-run until threshold met.</a:t>
-            </a:r>
-          </a:p>
-        </p:txBody>
-      </p:sp>
-      <p:sp>
-        <p:nvSpPr>
-          <p:cNvPr id="18" name="Rounded Rectangle 17"/>
-          <p:cNvSpPr/>
-          <p:nvPr/>
-        </p:nvSpPr>
-        <p:spPr>
-          <a:xfrm>
-            <a:off x="4343400" y="3566160"/>
-            <a:ext cx="3611880" cy="2057400"/>
-          </a:xfrm>
-          <a:prstGeom prst="roundRect">
-            <a:avLst>
-              <a:gd name="adj" fmla="val 5000"/>
-            </a:avLst>
-          </a:prstGeom>
-          <a:solidFill>
-            <a:srgbClr val="F2F4F7"/>
-          </a:solidFill>
-          <a:ln>
-            <a:noFill/>
-          </a:ln>
-        </p:spPr>
-        <p:style>
-          <a:lnRef idx="1">
-            <a:schemeClr val="accent1"/>
-          </a:lnRef>
-          <a:fillRef idx="3">
-            <a:schemeClr val="accent1"/>
-          </a:fillRef>
-          <a:effectRef idx="2">
-            <a:schemeClr val="accent1"/>
-          </a:effectRef>
-          <a:fontRef idx="minor">
-            <a:schemeClr val="lt1"/>
-          </a:fontRef>
-        </p:style>
-        <p:txBody>
-          <a:bodyPr rtlCol="0" anchor="ctr"/>
-          <a:lstStyle/>
-          <a:p>
-            <a:pPr algn="ctr"/>
-          </a:p>
-        </p:txBody>
-      </p:sp>
-      <p:sp>
-        <p:nvSpPr>
-          <p:cNvPr id="19" name="TextBox 18"/>
-          <p:cNvSpPr txBox="1"/>
-          <p:nvPr/>
-        </p:nvSpPr>
-        <p:spPr>
-          <a:xfrm>
-            <a:off x="4526280" y="3794760"/>
-            <a:ext cx="3200400" cy="365760"/>
-          </a:xfrm>
-          <a:prstGeom prst="rect">
-            <a:avLst/>
-          </a:prstGeom>
-          <a:noFill/>
-        </p:spPr>
-        <p:txBody>
-          <a:bodyPr wrap="square">
-            <a:spAutoFit/>
-          </a:bodyPr>
-          <a:lstStyle/>
-          <a:p>
-            <a:pPr algn="l"/>
-            <a:r>
-              <a:rPr sz="1600" b="1">
-                <a:solidFill>
-                  <a:srgbClr val="067AB4"/>
-                </a:solidFill>
-                <a:latin typeface="Arial"/>
-              </a:rPr>
-              <a:t>5. Gate go-live</a:t>
-            </a:r>
-          </a:p>
-        </p:txBody>
-      </p:sp>
-      <p:sp>
-        <p:nvSpPr>
-          <p:cNvPr id="20" name="TextBox 19"/>
-          <p:cNvSpPr txBox="1"/>
-          <p:nvPr/>
-        </p:nvSpPr>
-        <p:spPr>
-          <a:xfrm>
-            <a:off x="4526280" y="4251960"/>
-            <a:ext cx="3200400" cy="1188720"/>
-          </a:xfrm>
-          <a:prstGeom prst="rect">
-            <a:avLst/>
-          </a:prstGeom>
-          <a:noFill/>
-        </p:spPr>
-        <p:txBody>
-          <a:bodyPr wrap="square">
-            <a:spAutoFit/>
-          </a:bodyPr>
-          <a:lstStyle/>
-          <a:p>
-            <a:pPr algn="l"/>
-            <a:r>
-              <a:rPr sz="1300" b="0">
-                <a:solidFill>
-                  <a:srgbClr val="5A5A5A"/>
-                </a:solidFill>
-                <a:latin typeface="Arial"/>
-              </a:rPr>
-              <a:t>Publish only when quality bar + access policy + support model are signed.</a:t>
-            </a:r>
-          </a:p>
-        </p:txBody>
-      </p:sp>
-      <p:sp>
-        <p:nvSpPr>
-          <p:cNvPr id="21" name="Rounded Rectangle 20"/>
-          <p:cNvSpPr/>
-          <p:nvPr/>
-        </p:nvSpPr>
-        <p:spPr>
-          <a:xfrm>
-            <a:off x="8138160" y="3566160"/>
-            <a:ext cx="3611880" cy="2057400"/>
-          </a:xfrm>
-          <a:prstGeom prst="roundRect">
-            <a:avLst>
-              <a:gd name="adj" fmla="val 5000"/>
-            </a:avLst>
-          </a:prstGeom>
-          <a:solidFill>
-            <a:srgbClr val="F2F4F7"/>
-          </a:solidFill>
-          <a:ln>
-            <a:noFill/>
-          </a:ln>
-        </p:spPr>
-        <p:style>
-          <a:lnRef idx="1">
-            <a:schemeClr val="accent1"/>
-          </a:lnRef>
-          <a:fillRef idx="3">
-            <a:schemeClr val="accent1"/>
-          </a:fillRef>
-          <a:effectRef idx="2">
-            <a:schemeClr val="accent1"/>
-          </a:effectRef>
-          <a:fontRef idx="minor">
-            <a:schemeClr val="lt1"/>
-          </a:fontRef>
-        </p:style>
-        <p:txBody>
-          <a:bodyPr rtlCol="0" anchor="ctr"/>
-          <a:lstStyle/>
-          <a:p>
-            <a:pPr algn="ctr"/>
-          </a:p>
-        </p:txBody>
-      </p:sp>
-      <p:sp>
-        <p:nvSpPr>
-          <p:cNvPr id="22" name="TextBox 21"/>
-          <p:cNvSpPr txBox="1"/>
-          <p:nvPr/>
-        </p:nvSpPr>
-        <p:spPr>
-          <a:xfrm>
-            <a:off x="8321040" y="3794760"/>
-            <a:ext cx="3200400" cy="365760"/>
-          </a:xfrm>
-          <a:prstGeom prst="rect">
-            <a:avLst/>
-          </a:prstGeom>
-          <a:noFill/>
-        </p:spPr>
-        <p:txBody>
-          <a:bodyPr wrap="square">
-            <a:spAutoFit/>
-          </a:bodyPr>
-          <a:lstStyle/>
-          <a:p>
-            <a:pPr algn="l"/>
-            <a:r>
-              <a:rPr sz="1600" b="1">
-                <a:solidFill>
-                  <a:srgbClr val="067AB4"/>
-                </a:solidFill>
-                <a:latin typeface="Arial"/>
-              </a:rPr>
-              <a:t>6. Regression</a:t>
-            </a:r>
-          </a:p>
-        </p:txBody>
-      </p:sp>
-      <p:sp>
-        <p:nvSpPr>
-          <p:cNvPr id="23" name="TextBox 22"/>
-          <p:cNvSpPr txBox="1"/>
-          <p:nvPr/>
-        </p:nvSpPr>
-        <p:spPr>
-          <a:xfrm>
-            <a:off x="8321040" y="4251960"/>
-            <a:ext cx="3200400" cy="1188720"/>
-          </a:xfrm>
-          <a:prstGeom prst="rect">
-            <a:avLst/>
-          </a:prstGeom>
-          <a:noFill/>
-        </p:spPr>
-        <p:txBody>
-          <a:bodyPr wrap="square">
-            <a:spAutoFit/>
-          </a:bodyPr>
-          <a:lstStyle/>
-          <a:p>
-            <a:pPr algn="l"/>
-            <a:r>
-              <a:rPr sz="1300" b="0">
-                <a:solidFill>
-                  <a:srgbClr val="5A5A5A"/>
-                </a:solidFill>
-                <a:latin typeface="Arial"/>
-              </a:rPr>
-              <a:t>Re-run golden set when corpus syncs or models change.</a:t>
-            </a:r>
-          </a:p>
-        </p:txBody>
-      </p:sp>
-      <p:sp>
-        <p:nvSpPr>
-          <p:cNvPr id="24" name="TextBox 23"/>
           <p:cNvSpPr txBox="1"/>
           <p:nvPr/>
         </p:nvSpPr>
@@ -4273,7 +3701,7 @@
       </p:sp>
       <p:sp>
         <p:nvSpPr>
-          <p:cNvPr id="25" name="TextBox 24"/>
+          <p:cNvPr id="9" name="TextBox 8"/>
           <p:cNvSpPr txBox="1"/>
           <p:nvPr/>
         </p:nvSpPr>
@@ -4418,7 +3846,7 @@
         </p:nvSpPr>
         <p:spPr>
           <a:xfrm>
-            <a:off x="548640" y="320040"/>
+            <a:off x="548640" y="274320"/>
             <a:ext cx="10972800" cy="411480"/>
           </a:xfrm>
           <a:prstGeom prst="rect">
@@ -4440,21 +3868,56 @@
                 </a:solidFill>
                 <a:latin typeface="Arial"/>
               </a:rPr>
-              <a:t>Strategic investment: what the knowledge domain needs</a:t>
-            </a:r>
-          </a:p>
-        </p:txBody>
-      </p:sp>
-      <p:sp>
-        <p:nvSpPr>
-          <p:cNvPr id="5" name="Rounded Rectangle 4"/>
+              <a:t>Knowledge domain — where we are: golden questions</a:t>
+            </a:r>
+          </a:p>
+        </p:txBody>
+      </p:sp>
+      <p:sp>
+        <p:nvSpPr>
+          <p:cNvPr id="5" name="TextBox 4"/>
+          <p:cNvSpPr txBox="1"/>
+          <p:nvPr/>
+        </p:nvSpPr>
+        <p:spPr>
+          <a:xfrm>
+            <a:off x="548640" y="777240"/>
+            <a:ext cx="10972800" cy="365760"/>
+          </a:xfrm>
+          <a:prstGeom prst="rect">
+            <a:avLst/>
+          </a:prstGeom>
+          <a:noFill/>
+        </p:spPr>
+        <p:txBody>
+          <a:bodyPr wrap="square">
+            <a:spAutoFit/>
+          </a:bodyPr>
+          <a:lstStyle/>
+          <a:p>
+            <a:pPr algn="l"/>
+            <a:r>
+              <a:rPr sz="1500" b="0">
+                <a:solidFill>
+                  <a:srgbClr val="5A5A5A"/>
+                </a:solidFill>
+                <a:latin typeface="Arial"/>
+              </a:rPr>
+              <a:t>This is the quality gate before Ask AT&amp;T should be trusted with Insightful answers.</a:t>
+            </a:r>
+          </a:p>
+        </p:txBody>
+      </p:sp>
+      <p:sp>
+        <p:nvSpPr>
+          <p:cNvPr id="6" name="Rounded Rectangle 5"/>
           <p:cNvSpPr/>
           <p:nvPr/>
         </p:nvSpPr>
         <p:spPr>
           <a:xfrm>
-            <a:off x="457200" y="1005840"/>
-            <a:ext cx="2788920" cy="2377440"/>
+            <a:off x="548640" y="1280160"/>
+            <a:ext cx="3611880" cy="2057400"/>
           </a:xfrm>
           <a:prstGeom prst="roundRect">
             <a:avLst>
@@ -4492,14 +3955,14 @@
       </p:sp>
       <p:sp>
         <p:nvSpPr>
-          <p:cNvPr id="6" name="TextBox 5"/>
-          <p:cNvSpPr txBox="1"/>
-          <p:nvPr/>
-        </p:nvSpPr>
-        <p:spPr>
-          <a:xfrm>
-            <a:off x="594360" y="1188720"/>
-            <a:ext cx="2514600" cy="502920"/>
+          <p:cNvPr id="7" name="TextBox 6"/>
+          <p:cNvSpPr txBox="1"/>
+          <p:nvPr/>
+        </p:nvSpPr>
+        <p:spPr>
+          <a:xfrm>
+            <a:off x="731520" y="1508760"/>
+            <a:ext cx="3200400" cy="365760"/>
           </a:xfrm>
           <a:prstGeom prst="rect">
             <a:avLst/>
@@ -4514,27 +3977,27 @@
           <a:p>
             <a:pPr algn="l"/>
             <a:r>
-              <a:rPr sz="1400" b="1">
-                <a:solidFill>
-                  <a:srgbClr val="0C2577"/>
-                </a:solidFill>
-                <a:latin typeface="Arial"/>
-              </a:rPr>
-              <a:t>Golden Q&amp;A pack</a:t>
-            </a:r>
-          </a:p>
-        </p:txBody>
-      </p:sp>
-      <p:sp>
-        <p:nvSpPr>
-          <p:cNvPr id="7" name="TextBox 6"/>
-          <p:cNvSpPr txBox="1"/>
-          <p:nvPr/>
-        </p:nvSpPr>
-        <p:spPr>
-          <a:xfrm>
-            <a:off x="594360" y="1783080"/>
-            <a:ext cx="2514600" cy="1371600"/>
+              <a:rPr sz="1600" b="1">
+                <a:solidFill>
+                  <a:srgbClr val="067AB4"/>
+                </a:solidFill>
+                <a:latin typeface="Arial"/>
+              </a:rPr>
+              <a:t>1. Design the set</a:t>
+            </a:r>
+          </a:p>
+        </p:txBody>
+      </p:sp>
+      <p:sp>
+        <p:nvSpPr>
+          <p:cNvPr id="8" name="TextBox 7"/>
+          <p:cNvSpPr txBox="1"/>
+          <p:nvPr/>
+        </p:nvSpPr>
+        <p:spPr>
+          <a:xfrm>
+            <a:off x="731520" y="1965960"/>
+            <a:ext cx="3200400" cy="1188720"/>
           </a:xfrm>
           <a:prstGeom prst="rect">
             <a:avLst/>
@@ -4549,27 +4012,27 @@
           <a:p>
             <a:pPr algn="l"/>
             <a:r>
-              <a:rPr sz="1200" b="0">
+              <a:rPr sz="1300" b="0">
                 <a:solidFill>
                   <a:srgbClr val="5A5A5A"/>
                 </a:solidFill>
                 <a:latin typeface="Arial"/>
               </a:rPr>
-              <a:t>Question bank + truth answers owned by insights SMEs; versioned like a product artifact.</a:t>
-            </a:r>
-          </a:p>
-        </p:txBody>
-      </p:sp>
-      <p:sp>
-        <p:nvSpPr>
-          <p:cNvPr id="8" name="Rounded Rectangle 7"/>
+              <a:t>50–150 questions spanning priority brands, categories, regions, taxonomy terms, and hard negatives.</a:t>
+            </a:r>
+          </a:p>
+        </p:txBody>
+      </p:sp>
+      <p:sp>
+        <p:nvSpPr>
+          <p:cNvPr id="9" name="Rounded Rectangle 8"/>
           <p:cNvSpPr/>
           <p:nvPr/>
         </p:nvSpPr>
         <p:spPr>
           <a:xfrm>
-            <a:off x="3383280" y="1005840"/>
-            <a:ext cx="2788920" cy="2377440"/>
+            <a:off x="4343400" y="1280160"/>
+            <a:ext cx="3611880" cy="2057400"/>
           </a:xfrm>
           <a:prstGeom prst="roundRect">
             <a:avLst>
@@ -4607,14 +4070,14 @@
       </p:sp>
       <p:sp>
         <p:nvSpPr>
-          <p:cNvPr id="9" name="TextBox 8"/>
-          <p:cNvSpPr txBox="1"/>
-          <p:nvPr/>
-        </p:nvSpPr>
-        <p:spPr>
-          <a:xfrm>
-            <a:off x="3520440" y="1188720"/>
-            <a:ext cx="2514600" cy="502920"/>
+          <p:cNvPr id="10" name="TextBox 9"/>
+          <p:cNvSpPr txBox="1"/>
+          <p:nvPr/>
+        </p:nvSpPr>
+        <p:spPr>
+          <a:xfrm>
+            <a:off x="4526280" y="1508760"/>
+            <a:ext cx="3200400" cy="365760"/>
           </a:xfrm>
           <a:prstGeom prst="rect">
             <a:avLst/>
@@ -4629,27 +4092,27 @@
           <a:p>
             <a:pPr algn="l"/>
             <a:r>
-              <a:rPr sz="1400" b="1">
-                <a:solidFill>
-                  <a:srgbClr val="0C2577"/>
-                </a:solidFill>
-                <a:latin typeface="Arial"/>
-              </a:rPr>
-              <a:t>Governance &amp; access</a:t>
-            </a:r>
-          </a:p>
-        </p:txBody>
-      </p:sp>
-      <p:sp>
-        <p:nvSpPr>
-          <p:cNvPr id="10" name="TextBox 9"/>
-          <p:cNvSpPr txBox="1"/>
-          <p:nvPr/>
-        </p:nvSpPr>
-        <p:spPr>
-          <a:xfrm>
-            <a:off x="3520440" y="1783080"/>
-            <a:ext cx="2514600" cy="1371600"/>
+              <a:rPr sz="1600" b="1">
+                <a:solidFill>
+                  <a:srgbClr val="067AB4"/>
+                </a:solidFill>
+                <a:latin typeface="Arial"/>
+              </a:rPr>
+              <a:t>2. Write truth answers</a:t>
+            </a:r>
+          </a:p>
+        </p:txBody>
+      </p:sp>
+      <p:sp>
+        <p:nvSpPr>
+          <p:cNvPr id="11" name="TextBox 10"/>
+          <p:cNvSpPr txBox="1"/>
+          <p:nvPr/>
+        </p:nvSpPr>
+        <p:spPr>
+          <a:xfrm>
+            <a:off x="4526280" y="1965960"/>
+            <a:ext cx="3200400" cy="1188720"/>
           </a:xfrm>
           <a:prstGeom prst="rect">
             <a:avLst/>
@@ -4664,27 +4127,27 @@
           <a:p>
             <a:pPr algn="l"/>
             <a:r>
-              <a:rPr sz="1200" b="0">
+              <a:rPr sz="1300" b="0">
                 <a:solidFill>
                   <a:srgbClr val="5A5A5A"/>
                 </a:solidFill>
                 <a:latin typeface="Arial"/>
               </a:rPr>
-              <a:t>Who may query, who may publish, DLP/classification, audit of Ask AT&amp;T usage.</a:t>
-            </a:r>
-          </a:p>
-        </p:txBody>
-      </p:sp>
-      <p:sp>
-        <p:nvSpPr>
-          <p:cNvPr id="11" name="Rounded Rectangle 10"/>
+              <a:t>SME / steward authors expected answers with citations to source docs and metadata.</a:t>
+            </a:r>
+          </a:p>
+        </p:txBody>
+      </p:sp>
+      <p:sp>
+        <p:nvSpPr>
+          <p:cNvPr id="12" name="Rounded Rectangle 11"/>
           <p:cNvSpPr/>
           <p:nvPr/>
         </p:nvSpPr>
         <p:spPr>
           <a:xfrm>
-            <a:off x="6309360" y="1005840"/>
-            <a:ext cx="2788920" cy="2377440"/>
+            <a:off x="8138160" y="1280160"/>
+            <a:ext cx="3611880" cy="2057400"/>
           </a:xfrm>
           <a:prstGeom prst="roundRect">
             <a:avLst>
@@ -4722,14 +4185,14 @@
       </p:sp>
       <p:sp>
         <p:nvSpPr>
-          <p:cNvPr id="12" name="TextBox 11"/>
-          <p:cNvSpPr txBox="1"/>
-          <p:nvPr/>
-        </p:nvSpPr>
-        <p:spPr>
-          <a:xfrm>
-            <a:off x="6446520" y="1188720"/>
-            <a:ext cx="2514600" cy="502920"/>
+          <p:cNvPr id="13" name="TextBox 12"/>
+          <p:cNvSpPr txBox="1"/>
+          <p:nvPr/>
+        </p:nvSpPr>
+        <p:spPr>
+          <a:xfrm>
+            <a:off x="8321040" y="1508760"/>
+            <a:ext cx="3200400" cy="365760"/>
           </a:xfrm>
           <a:prstGeom prst="rect">
             <a:avLst/>
@@ -4744,27 +4207,27 @@
           <a:p>
             <a:pPr algn="l"/>
             <a:r>
-              <a:rPr sz="1400" b="1">
-                <a:solidFill>
-                  <a:srgbClr val="0C2577"/>
-                </a:solidFill>
-                <a:latin typeface="Arial"/>
-              </a:rPr>
-              <a:t>Knowledge steward role</a:t>
-            </a:r>
-          </a:p>
-        </p:txBody>
-      </p:sp>
-      <p:sp>
-        <p:nvSpPr>
-          <p:cNvPr id="13" name="TextBox 12"/>
-          <p:cNvSpPr txBox="1"/>
-          <p:nvPr/>
-        </p:nvSpPr>
-        <p:spPr>
-          <a:xfrm>
-            <a:off x="6446520" y="1783080"/>
-            <a:ext cx="2514600" cy="1371600"/>
+              <a:rPr sz="1600" b="1">
+                <a:solidFill>
+                  <a:srgbClr val="067AB4"/>
+                </a:solidFill>
+                <a:latin typeface="Arial"/>
+              </a:rPr>
+              <a:t>3. Run &amp; score</a:t>
+            </a:r>
+          </a:p>
+        </p:txBody>
+      </p:sp>
+      <p:sp>
+        <p:nvSpPr>
+          <p:cNvPr id="14" name="TextBox 13"/>
+          <p:cNvSpPr txBox="1"/>
+          <p:nvPr/>
+        </p:nvSpPr>
+        <p:spPr>
+          <a:xfrm>
+            <a:off x="8321040" y="1965960"/>
+            <a:ext cx="3200400" cy="1188720"/>
           </a:xfrm>
           <a:prstGeom prst="rect">
             <a:avLst/>
@@ -4779,27 +4242,27 @@
           <a:p>
             <a:pPr algn="l"/>
             <a:r>
-              <a:rPr sz="1200" b="0">
+              <a:rPr sz="1300" b="0">
                 <a:solidFill>
                   <a:srgbClr val="5A5A5A"/>
                 </a:solidFill>
                 <a:latin typeface="Arial"/>
               </a:rPr>
-              <a:t>Named owner for corpus health, sync exceptions, answer quality, and escalation.</a:t>
-            </a:r>
-          </a:p>
-        </p:txBody>
-      </p:sp>
-      <p:sp>
-        <p:nvSpPr>
-          <p:cNvPr id="14" name="Rounded Rectangle 13"/>
+              <a:t>Ask Docs answers each golden question; score correctness, completeness, citation quality, refusal behavior.</a:t>
+            </a:r>
+          </a:p>
+        </p:txBody>
+      </p:sp>
+      <p:sp>
+        <p:nvSpPr>
+          <p:cNvPr id="15" name="Rounded Rectangle 14"/>
           <p:cNvSpPr/>
           <p:nvPr/>
         </p:nvSpPr>
         <p:spPr>
           <a:xfrm>
-            <a:off x="9235440" y="1005840"/>
-            <a:ext cx="2788920" cy="2377440"/>
+            <a:off x="548640" y="3566160"/>
+            <a:ext cx="3611880" cy="2057400"/>
           </a:xfrm>
           <a:prstGeom prst="roundRect">
             <a:avLst>
@@ -4837,14 +4300,14 @@
       </p:sp>
       <p:sp>
         <p:nvSpPr>
-          <p:cNvPr id="15" name="TextBox 14"/>
-          <p:cNvSpPr txBox="1"/>
-          <p:nvPr/>
-        </p:nvSpPr>
-        <p:spPr>
-          <a:xfrm>
-            <a:off x="9372600" y="1188720"/>
-            <a:ext cx="2514600" cy="502920"/>
+          <p:cNvPr id="16" name="TextBox 15"/>
+          <p:cNvSpPr txBox="1"/>
+          <p:nvPr/>
+        </p:nvSpPr>
+        <p:spPr>
+          <a:xfrm>
+            <a:off x="731520" y="3794760"/>
+            <a:ext cx="3200400" cy="365760"/>
           </a:xfrm>
           <a:prstGeom prst="rect">
             <a:avLst/>
@@ -4859,27 +4322,27 @@
           <a:p>
             <a:pPr algn="l"/>
             <a:r>
-              <a:rPr sz="1400" b="1">
-                <a:solidFill>
-                  <a:srgbClr val="0C2577"/>
-                </a:solidFill>
-                <a:latin typeface="Arial"/>
-              </a:rPr>
-              <a:t>Sync &amp; freshness</a:t>
-            </a:r>
-          </a:p>
-        </p:txBody>
-      </p:sp>
-      <p:sp>
-        <p:nvSpPr>
-          <p:cNvPr id="16" name="TextBox 15"/>
-          <p:cNvSpPr txBox="1"/>
-          <p:nvPr/>
-        </p:nvSpPr>
-        <p:spPr>
-          <a:xfrm>
-            <a:off x="9372600" y="1783080"/>
-            <a:ext cx="2514600" cy="1371600"/>
+              <a:rPr sz="1600" b="1">
+                <a:solidFill>
+                  <a:srgbClr val="067AB4"/>
+                </a:solidFill>
+                <a:latin typeface="Arial"/>
+              </a:rPr>
+              <a:t>4. Tune &amp; retest</a:t>
+            </a:r>
+          </a:p>
+        </p:txBody>
+      </p:sp>
+      <p:sp>
+        <p:nvSpPr>
+          <p:cNvPr id="17" name="TextBox 16"/>
+          <p:cNvSpPr txBox="1"/>
+          <p:nvPr/>
+        </p:nvSpPr>
+        <p:spPr>
+          <a:xfrm>
+            <a:off x="731520" y="4251960"/>
+            <a:ext cx="3200400" cy="1188720"/>
           </a:xfrm>
           <a:prstGeom prst="rect">
             <a:avLst/>
@@ -4894,27 +4357,27 @@
           <a:p>
             <a:pPr algn="l"/>
             <a:r>
-              <a:rPr sz="1200" b="0">
+              <a:rPr sz="1300" b="0">
                 <a:solidFill>
                   <a:srgbClr val="5A5A5A"/>
                 </a:solidFill>
                 <a:latin typeface="Arial"/>
               </a:rPr>
-              <a:t>Cadence from Insightful → domain copy; metadata parity; stale-content playbook.</a:t>
-            </a:r>
-          </a:p>
-        </p:txBody>
-      </p:sp>
-      <p:sp>
-        <p:nvSpPr>
-          <p:cNvPr id="17" name="Rounded Rectangle 16"/>
+              <a:t>Fix retrieval, metadata, chunking, prompts; re-run until threshold met.</a:t>
+            </a:r>
+          </a:p>
+        </p:txBody>
+      </p:sp>
+      <p:sp>
+        <p:nvSpPr>
+          <p:cNvPr id="18" name="Rounded Rectangle 17"/>
           <p:cNvSpPr/>
           <p:nvPr/>
         </p:nvSpPr>
         <p:spPr>
           <a:xfrm>
-            <a:off x="457200" y="3611880"/>
-            <a:ext cx="2788920" cy="2377440"/>
+            <a:off x="4343400" y="3566160"/>
+            <a:ext cx="3611880" cy="2057400"/>
           </a:xfrm>
           <a:prstGeom prst="roundRect">
             <a:avLst>
@@ -4952,14 +4415,14 @@
       </p:sp>
       <p:sp>
         <p:nvSpPr>
-          <p:cNvPr id="18" name="TextBox 17"/>
-          <p:cNvSpPr txBox="1"/>
-          <p:nvPr/>
-        </p:nvSpPr>
-        <p:spPr>
-          <a:xfrm>
-            <a:off x="594360" y="3794760"/>
-            <a:ext cx="2514600" cy="502920"/>
+          <p:cNvPr id="19" name="TextBox 18"/>
+          <p:cNvSpPr txBox="1"/>
+          <p:nvPr/>
+        </p:nvSpPr>
+        <p:spPr>
+          <a:xfrm>
+            <a:off x="4526280" y="3794760"/>
+            <a:ext cx="3200400" cy="365760"/>
           </a:xfrm>
           <a:prstGeom prst="rect">
             <a:avLst/>
@@ -4974,27 +4437,27 @@
           <a:p>
             <a:pPr algn="l"/>
             <a:r>
-              <a:rPr sz="1400" b="1">
-                <a:solidFill>
-                  <a:srgbClr val="0C2577"/>
-                </a:solidFill>
-                <a:latin typeface="Arial"/>
-              </a:rPr>
-              <a:t>Testing &amp; release</a:t>
-            </a:r>
-          </a:p>
-        </p:txBody>
-      </p:sp>
-      <p:sp>
-        <p:nvSpPr>
-          <p:cNvPr id="19" name="TextBox 18"/>
-          <p:cNvSpPr txBox="1"/>
-          <p:nvPr/>
-        </p:nvSpPr>
-        <p:spPr>
-          <a:xfrm>
-            <a:off x="594360" y="4389120"/>
-            <a:ext cx="2514600" cy="1371600"/>
+              <a:rPr sz="1600" b="1">
+                <a:solidFill>
+                  <a:srgbClr val="067AB4"/>
+                </a:solidFill>
+                <a:latin typeface="Arial"/>
+              </a:rPr>
+              <a:t>5. Gate go-live</a:t>
+            </a:r>
+          </a:p>
+        </p:txBody>
+      </p:sp>
+      <p:sp>
+        <p:nvSpPr>
+          <p:cNvPr id="20" name="TextBox 19"/>
+          <p:cNvSpPr txBox="1"/>
+          <p:nvPr/>
+        </p:nvSpPr>
+        <p:spPr>
+          <a:xfrm>
+            <a:off x="4526280" y="4251960"/>
+            <a:ext cx="3200400" cy="1188720"/>
           </a:xfrm>
           <a:prstGeom prst="rect">
             <a:avLst/>
@@ -5009,27 +4472,27 @@
           <a:p>
             <a:pPr algn="l"/>
             <a:r>
-              <a:rPr sz="1200" b="0">
+              <a:rPr sz="1300" b="0">
                 <a:solidFill>
                   <a:srgbClr val="5A5A5A"/>
                 </a:solidFill>
                 <a:latin typeface="Arial"/>
               </a:rPr>
-              <a:t>Pre-release golden-set scorecard; change management when models or chunking change.</a:t>
-            </a:r>
-          </a:p>
-        </p:txBody>
-      </p:sp>
-      <p:sp>
-        <p:nvSpPr>
-          <p:cNvPr id="20" name="Rounded Rectangle 19"/>
+              <a:t>Publish only when quality bar + access policy + support model are signed.</a:t>
+            </a:r>
+          </a:p>
+        </p:txBody>
+      </p:sp>
+      <p:sp>
+        <p:nvSpPr>
+          <p:cNvPr id="21" name="Rounded Rectangle 20"/>
           <p:cNvSpPr/>
           <p:nvPr/>
         </p:nvSpPr>
         <p:spPr>
           <a:xfrm>
-            <a:off x="3383280" y="3611880"/>
-            <a:ext cx="2788920" cy="2377440"/>
+            <a:off x="8138160" y="3566160"/>
+            <a:ext cx="3611880" cy="2057400"/>
           </a:xfrm>
           <a:prstGeom prst="roundRect">
             <a:avLst>
@@ -5067,14 +4530,14 @@
       </p:sp>
       <p:sp>
         <p:nvSpPr>
-          <p:cNvPr id="21" name="TextBox 20"/>
-          <p:cNvSpPr txBox="1"/>
-          <p:nvPr/>
-        </p:nvSpPr>
-        <p:spPr>
-          <a:xfrm>
-            <a:off x="3520440" y="3794760"/>
-            <a:ext cx="2514600" cy="502920"/>
+          <p:cNvPr id="22" name="TextBox 21"/>
+          <p:cNvSpPr txBox="1"/>
+          <p:nvPr/>
+        </p:nvSpPr>
+        <p:spPr>
+          <a:xfrm>
+            <a:off x="8321040" y="3794760"/>
+            <a:ext cx="3200400" cy="365760"/>
           </a:xfrm>
           <a:prstGeom prst="rect">
             <a:avLst/>
@@ -5089,27 +4552,27 @@
           <a:p>
             <a:pPr algn="l"/>
             <a:r>
-              <a:rPr sz="1400" b="1">
-                <a:solidFill>
-                  <a:srgbClr val="0C2577"/>
-                </a:solidFill>
-                <a:latin typeface="Arial"/>
-              </a:rPr>
-              <a:t>Ongoing support</a:t>
-            </a:r>
-          </a:p>
-        </p:txBody>
-      </p:sp>
-      <p:sp>
-        <p:nvSpPr>
-          <p:cNvPr id="22" name="TextBox 21"/>
-          <p:cNvSpPr txBox="1"/>
-          <p:nvPr/>
-        </p:nvSpPr>
-        <p:spPr>
-          <a:xfrm>
-            <a:off x="3520440" y="4389120"/>
-            <a:ext cx="2514600" cy="1371600"/>
+              <a:rPr sz="1600" b="1">
+                <a:solidFill>
+                  <a:srgbClr val="067AB4"/>
+                </a:solidFill>
+                <a:latin typeface="Arial"/>
+              </a:rPr>
+              <a:t>6. Regression</a:t>
+            </a:r>
+          </a:p>
+        </p:txBody>
+      </p:sp>
+      <p:sp>
+        <p:nvSpPr>
+          <p:cNvPr id="23" name="TextBox 22"/>
+          <p:cNvSpPr txBox="1"/>
+          <p:nvPr/>
+        </p:nvSpPr>
+        <p:spPr>
+          <a:xfrm>
+            <a:off x="8321040" y="4251960"/>
+            <a:ext cx="3200400" cy="1188720"/>
           </a:xfrm>
           <a:prstGeom prst="rect">
             <a:avLst/>
@@ -5124,250 +4587,20 @@
           <a:p>
             <a:pPr algn="l"/>
             <a:r>
-              <a:rPr sz="1200" b="0">
+              <a:rPr sz="1300" b="0">
                 <a:solidFill>
                   <a:srgbClr val="5A5A5A"/>
                 </a:solidFill>
                 <a:latin typeface="Arial"/>
               </a:rPr>
-              <a:t>Tier-1 user help, steward office hours, feedback loop into collections and tagging.</a:t>
-            </a:r>
-          </a:p>
-        </p:txBody>
-      </p:sp>
-      <p:sp>
-        <p:nvSpPr>
-          <p:cNvPr id="23" name="Rounded Rectangle 22"/>
-          <p:cNvSpPr/>
-          <p:nvPr/>
-        </p:nvSpPr>
-        <p:spPr>
-          <a:xfrm>
-            <a:off x="6309360" y="3611880"/>
-            <a:ext cx="2788920" cy="2377440"/>
-          </a:xfrm>
-          <a:prstGeom prst="roundRect">
-            <a:avLst>
-              <a:gd name="adj" fmla="val 5000"/>
-            </a:avLst>
-          </a:prstGeom>
-          <a:solidFill>
-            <a:srgbClr val="F2F4F7"/>
-          </a:solidFill>
-          <a:ln>
-            <a:noFill/>
-          </a:ln>
-        </p:spPr>
-        <p:style>
-          <a:lnRef idx="1">
-            <a:schemeClr val="accent1"/>
-          </a:lnRef>
-          <a:fillRef idx="3">
-            <a:schemeClr val="accent1"/>
-          </a:fillRef>
-          <a:effectRef idx="2">
-            <a:schemeClr val="accent1"/>
-          </a:effectRef>
-          <a:fontRef idx="minor">
-            <a:schemeClr val="lt1"/>
-          </a:fontRef>
-        </p:style>
-        <p:txBody>
-          <a:bodyPr rtlCol="0" anchor="ctr"/>
-          <a:lstStyle/>
-          <a:p>
-            <a:pPr algn="ctr"/>
+              <a:t>Re-run golden set when corpus syncs or models change.</a:t>
+            </a:r>
           </a:p>
         </p:txBody>
       </p:sp>
       <p:sp>
         <p:nvSpPr>
           <p:cNvPr id="24" name="TextBox 23"/>
-          <p:cNvSpPr txBox="1"/>
-          <p:nvPr/>
-        </p:nvSpPr>
-        <p:spPr>
-          <a:xfrm>
-            <a:off x="6446520" y="3794760"/>
-            <a:ext cx="2514600" cy="502920"/>
-          </a:xfrm>
-          <a:prstGeom prst="rect">
-            <a:avLst/>
-          </a:prstGeom>
-          <a:noFill/>
-        </p:spPr>
-        <p:txBody>
-          <a:bodyPr wrap="square">
-            <a:spAutoFit/>
-          </a:bodyPr>
-          <a:lstStyle/>
-          <a:p>
-            <a:pPr algn="l"/>
-            <a:r>
-              <a:rPr sz="1400" b="1">
-                <a:solidFill>
-                  <a:srgbClr val="0C2577"/>
-                </a:solidFill>
-                <a:latin typeface="Arial"/>
-              </a:rPr>
-              <a:t>Success metrics</a:t>
-            </a:r>
-          </a:p>
-        </p:txBody>
-      </p:sp>
-      <p:sp>
-        <p:nvSpPr>
-          <p:cNvPr id="25" name="TextBox 24"/>
-          <p:cNvSpPr txBox="1"/>
-          <p:nvPr/>
-        </p:nvSpPr>
-        <p:spPr>
-          <a:xfrm>
-            <a:off x="6446520" y="4389120"/>
-            <a:ext cx="2514600" cy="1371600"/>
-          </a:xfrm>
-          <a:prstGeom prst="rect">
-            <a:avLst/>
-          </a:prstGeom>
-          <a:noFill/>
-        </p:spPr>
-        <p:txBody>
-          <a:bodyPr wrap="square">
-            <a:spAutoFit/>
-          </a:bodyPr>
-          <a:lstStyle/>
-          <a:p>
-            <a:pPr algn="l"/>
-            <a:r>
-              <a:rPr sz="1200" b="0">
-                <a:solidFill>
-                  <a:srgbClr val="5A5A5A"/>
-                </a:solidFill>
-                <a:latin typeface="Arial"/>
-              </a:rPr>
-              <a:t>Answer quality %, citation hit rate, time-to-insight, deflection from workarounds.</a:t>
-            </a:r>
-          </a:p>
-        </p:txBody>
-      </p:sp>
-      <p:sp>
-        <p:nvSpPr>
-          <p:cNvPr id="26" name="Rounded Rectangle 25"/>
-          <p:cNvSpPr/>
-          <p:nvPr/>
-        </p:nvSpPr>
-        <p:spPr>
-          <a:xfrm>
-            <a:off x="9235440" y="3611880"/>
-            <a:ext cx="2788920" cy="2377440"/>
-          </a:xfrm>
-          <a:prstGeom prst="roundRect">
-            <a:avLst>
-              <a:gd name="adj" fmla="val 5000"/>
-            </a:avLst>
-          </a:prstGeom>
-          <a:solidFill>
-            <a:srgbClr val="F2F4F7"/>
-          </a:solidFill>
-          <a:ln>
-            <a:noFill/>
-          </a:ln>
-        </p:spPr>
-        <p:style>
-          <a:lnRef idx="1">
-            <a:schemeClr val="accent1"/>
-          </a:lnRef>
-          <a:fillRef idx="3">
-            <a:schemeClr val="accent1"/>
-          </a:fillRef>
-          <a:effectRef idx="2">
-            <a:schemeClr val="accent1"/>
-          </a:effectRef>
-          <a:fontRef idx="minor">
-            <a:schemeClr val="lt1"/>
-          </a:fontRef>
-        </p:style>
-        <p:txBody>
-          <a:bodyPr rtlCol="0" anchor="ctr"/>
-          <a:lstStyle/>
-          <a:p>
-            <a:pPr algn="ctr"/>
-          </a:p>
-        </p:txBody>
-      </p:sp>
-      <p:sp>
-        <p:nvSpPr>
-          <p:cNvPr id="27" name="TextBox 26"/>
-          <p:cNvSpPr txBox="1"/>
-          <p:nvPr/>
-        </p:nvSpPr>
-        <p:spPr>
-          <a:xfrm>
-            <a:off x="9372600" y="3794760"/>
-            <a:ext cx="2514600" cy="502920"/>
-          </a:xfrm>
-          <a:prstGeom prst="rect">
-            <a:avLst/>
-          </a:prstGeom>
-          <a:noFill/>
-        </p:spPr>
-        <p:txBody>
-          <a:bodyPr wrap="square">
-            <a:spAutoFit/>
-          </a:bodyPr>
-          <a:lstStyle/>
-          <a:p>
-            <a:pPr algn="l"/>
-            <a:r>
-              <a:rPr sz="1400" b="1">
-                <a:solidFill>
-                  <a:srgbClr val="0C2577"/>
-                </a:solidFill>
-                <a:latin typeface="Arial"/>
-              </a:rPr>
-              <a:t>Risk controls</a:t>
-            </a:r>
-          </a:p>
-        </p:txBody>
-      </p:sp>
-      <p:sp>
-        <p:nvSpPr>
-          <p:cNvPr id="28" name="TextBox 27"/>
-          <p:cNvSpPr txBox="1"/>
-          <p:nvPr/>
-        </p:nvSpPr>
-        <p:spPr>
-          <a:xfrm>
-            <a:off x="9372600" y="4389120"/>
-            <a:ext cx="2514600" cy="1371600"/>
-          </a:xfrm>
-          <a:prstGeom prst="rect">
-            <a:avLst/>
-          </a:prstGeom>
-          <a:noFill/>
-        </p:spPr>
-        <p:txBody>
-          <a:bodyPr wrap="square">
-            <a:spAutoFit/>
-          </a:bodyPr>
-          <a:lstStyle/>
-          <a:p>
-            <a:pPr algn="l"/>
-            <a:r>
-              <a:rPr sz="1200" b="0">
-                <a:solidFill>
-                  <a:srgbClr val="5A5A5A"/>
-                </a:solidFill>
-                <a:latin typeface="Arial"/>
-              </a:rPr>
-              <a:t>Wrong-answer escalation, “I don’t know” policy, sensitive-topic handling.</a:t>
-            </a:r>
-          </a:p>
-        </p:txBody>
-      </p:sp>
-      <p:sp>
-        <p:nvSpPr>
-          <p:cNvPr id="29" name="TextBox 28"/>
           <p:cNvSpPr txBox="1"/>
           <p:nvPr/>
         </p:nvSpPr>
@@ -5402,7 +4635,7 @@
       </p:sp>
       <p:sp>
         <p:nvSpPr>
-          <p:cNvPr id="30" name="TextBox 29"/>
+          <p:cNvPr id="25" name="TextBox 24"/>
           <p:cNvSpPr txBox="1"/>
           <p:nvPr/>
         </p:nvSpPr>
@@ -5547,8 +4780,8 @@
         </p:nvSpPr>
         <p:spPr>
           <a:xfrm>
-            <a:off x="548640" y="320040"/>
-            <a:ext cx="10972800" cy="411480"/>
+            <a:off x="457200" y="256032"/>
+            <a:ext cx="10972800" cy="365760"/>
           </a:xfrm>
           <a:prstGeom prst="rect">
             <a:avLst/>
@@ -5563,13 +4796,13 @@
           <a:p>
             <a:pPr algn="l"/>
             <a:r>
-              <a:rPr sz="2600" b="1">
+              <a:rPr sz="2200" b="1">
                 <a:solidFill>
                   <a:srgbClr val="0C2577"/>
                 </a:solidFill>
                 <a:latin typeface="Arial"/>
               </a:rPr>
-              <a:t>Human impact — roles, hours, support</a:t>
+              <a:t>Knowledge domain journey — Q&amp;A quality path and timeframe</a:t>
             </a:r>
           </a:p>
         </p:txBody>
@@ -5582,8 +4815,8 @@
         </p:nvSpPr>
         <p:spPr>
           <a:xfrm>
-            <a:off x="548640" y="822960"/>
-            <a:ext cx="10972800" cy="320040"/>
+            <a:off x="457200" y="640080"/>
+            <a:ext cx="11247120" cy="274320"/>
           </a:xfrm>
           <a:prstGeom prst="rect">
             <a:avLst/>
@@ -5598,170 +4831,635 @@
           <a:p>
             <a:pPr algn="l"/>
             <a:r>
-              <a:rPr sz="1300" b="0">
+              <a:rPr sz="1200" b="0">
                 <a:solidFill>
                   <a:srgbClr val="5A5A5A"/>
                 </a:solidFill>
                 <a:latin typeface="Arial"/>
               </a:rPr>
-              <a:t>Indicative planning ranges for CMO discussion (calibrate with HR / insights capacity).</a:t>
-            </a:r>
-          </a:p>
-        </p:txBody>
-      </p:sp>
-      <p:sp>
-        <p:nvSpPr>
-          <p:cNvPr id="6" name="TextBox 5"/>
-          <p:cNvSpPr txBox="1"/>
-          <p:nvPr/>
-        </p:nvSpPr>
-        <p:spPr>
-          <a:xfrm>
-            <a:off x="548640" y="1234440"/>
-            <a:ext cx="2468880" cy="320040"/>
-          </a:xfrm>
-          <a:prstGeom prst="rect">
-            <a:avLst/>
-          </a:prstGeom>
-          <a:noFill/>
-        </p:spPr>
-        <p:txBody>
-          <a:bodyPr wrap="square">
-            <a:spAutoFit/>
-          </a:bodyPr>
-          <a:lstStyle/>
-          <a:p>
-            <a:pPr algn="l"/>
-            <a:r>
-              <a:rPr sz="1200" b="1">
+              <a:t>Indicative ~8–10 week stand-up to gated pilot, then ongoing steward operations. Calibrate to SME capacity.</a:t>
+            </a:r>
+          </a:p>
+        </p:txBody>
+      </p:sp>
+      <p:sp>
+        <p:nvSpPr>
+          <p:cNvPr id="6" name="Rectangle 5"/>
+          <p:cNvSpPr/>
+          <p:nvPr/>
+        </p:nvSpPr>
+        <p:spPr>
+          <a:xfrm>
+            <a:off x="640080" y="1417320"/>
+            <a:ext cx="10881360" cy="31750"/>
+          </a:xfrm>
+          <a:prstGeom prst="rect">
+            <a:avLst/>
+          </a:prstGeom>
+          <a:solidFill>
+            <a:srgbClr val="BCC9D6"/>
+          </a:solidFill>
+          <a:ln>
+            <a:noFill/>
+          </a:ln>
+        </p:spPr>
+        <p:style>
+          <a:lnRef idx="1">
+            <a:schemeClr val="accent1"/>
+          </a:lnRef>
+          <a:fillRef idx="3">
+            <a:schemeClr val="accent1"/>
+          </a:fillRef>
+          <a:effectRef idx="2">
+            <a:schemeClr val="accent1"/>
+          </a:effectRef>
+          <a:fontRef idx="minor">
+            <a:schemeClr val="lt1"/>
+          </a:fontRef>
+        </p:style>
+        <p:txBody>
+          <a:bodyPr rtlCol="0" anchor="ctr"/>
+          <a:lstStyle/>
+          <a:p>
+            <a:pPr algn="ctr"/>
+          </a:p>
+        </p:txBody>
+      </p:sp>
+      <p:sp>
+        <p:nvSpPr>
+          <p:cNvPr id="7" name="Oval 6"/>
+          <p:cNvSpPr/>
+          <p:nvPr/>
+        </p:nvSpPr>
+        <p:spPr>
+          <a:xfrm>
+            <a:off x="685800" y="1298448"/>
+            <a:ext cx="256032" cy="256032"/>
+          </a:xfrm>
+          <a:prstGeom prst="ellipse">
+            <a:avLst/>
+          </a:prstGeom>
+          <a:solidFill>
+            <a:srgbClr val="067AB4"/>
+          </a:solidFill>
+          <a:ln>
+            <a:noFill/>
+          </a:ln>
+        </p:spPr>
+        <p:style>
+          <a:lnRef idx="1">
+            <a:schemeClr val="accent1"/>
+          </a:lnRef>
+          <a:fillRef idx="3">
+            <a:schemeClr val="accent1"/>
+          </a:fillRef>
+          <a:effectRef idx="2">
+            <a:schemeClr val="accent1"/>
+          </a:effectRef>
+          <a:fontRef idx="minor">
+            <a:schemeClr val="lt1"/>
+          </a:fontRef>
+        </p:style>
+        <p:txBody>
+          <a:bodyPr rtlCol="0" anchor="ctr"/>
+          <a:lstStyle/>
+          <a:p>
+            <a:pPr algn="ctr"/>
+          </a:p>
+        </p:txBody>
+      </p:sp>
+      <p:sp>
+        <p:nvSpPr>
+          <p:cNvPr id="8" name="Rectangle 7"/>
+          <p:cNvSpPr/>
+          <p:nvPr/>
+        </p:nvSpPr>
+        <p:spPr>
+          <a:xfrm>
+            <a:off x="795528" y="1554480"/>
+            <a:ext cx="31750" cy="228600"/>
+          </a:xfrm>
+          <a:prstGeom prst="rect">
+            <a:avLst/>
+          </a:prstGeom>
+          <a:solidFill>
+            <a:srgbClr val="067AB4"/>
+          </a:solidFill>
+          <a:ln>
+            <a:noFill/>
+          </a:ln>
+        </p:spPr>
+        <p:style>
+          <a:lnRef idx="1">
+            <a:schemeClr val="accent1"/>
+          </a:lnRef>
+          <a:fillRef idx="3">
+            <a:schemeClr val="accent1"/>
+          </a:fillRef>
+          <a:effectRef idx="2">
+            <a:schemeClr val="accent1"/>
+          </a:effectRef>
+          <a:fontRef idx="minor">
+            <a:schemeClr val="lt1"/>
+          </a:fontRef>
+        </p:style>
+        <p:txBody>
+          <a:bodyPr rtlCol="0" anchor="ctr"/>
+          <a:lstStyle/>
+          <a:p>
+            <a:pPr algn="ctr"/>
+          </a:p>
+        </p:txBody>
+      </p:sp>
+      <p:sp>
+        <p:nvSpPr>
+          <p:cNvPr id="9" name="Rounded Rectangle 8"/>
+          <p:cNvSpPr/>
+          <p:nvPr/>
+        </p:nvSpPr>
+        <p:spPr>
+          <a:xfrm>
+            <a:off x="64007" y="1828800"/>
+            <a:ext cx="1508760" cy="2148840"/>
+          </a:xfrm>
+          <a:prstGeom prst="roundRect">
+            <a:avLst>
+              <a:gd name="adj" fmla="val 5000"/>
+            </a:avLst>
+          </a:prstGeom>
+          <a:solidFill>
+            <a:srgbClr val="E8F1F8"/>
+          </a:solidFill>
+          <a:ln>
+            <a:noFill/>
+          </a:ln>
+        </p:spPr>
+        <p:style>
+          <a:lnRef idx="1">
+            <a:schemeClr val="accent1"/>
+          </a:lnRef>
+          <a:fillRef idx="3">
+            <a:schemeClr val="accent1"/>
+          </a:fillRef>
+          <a:effectRef idx="2">
+            <a:schemeClr val="accent1"/>
+          </a:effectRef>
+          <a:fontRef idx="minor">
+            <a:schemeClr val="lt1"/>
+          </a:fontRef>
+        </p:style>
+        <p:txBody>
+          <a:bodyPr rtlCol="0" anchor="ctr"/>
+          <a:lstStyle/>
+          <a:p>
+            <a:pPr algn="ctr"/>
+          </a:p>
+        </p:txBody>
+      </p:sp>
+      <p:sp>
+        <p:nvSpPr>
+          <p:cNvPr id="10" name="TextBox 9"/>
+          <p:cNvSpPr txBox="1"/>
+          <p:nvPr/>
+        </p:nvSpPr>
+        <p:spPr>
+          <a:xfrm>
+            <a:off x="137159" y="1938528"/>
+            <a:ext cx="1362456" cy="256032"/>
+          </a:xfrm>
+          <a:prstGeom prst="rect">
+            <a:avLst/>
+          </a:prstGeom>
+          <a:noFill/>
+        </p:spPr>
+        <p:txBody>
+          <a:bodyPr wrap="square">
+            <a:spAutoFit/>
+          </a:bodyPr>
+          <a:lstStyle/>
+          <a:p>
+            <a:pPr algn="ctr"/>
+            <a:r>
+              <a:rPr sz="1000" b="1">
                 <a:solidFill>
                   <a:srgbClr val="067AB4"/>
                 </a:solidFill>
                 <a:latin typeface="Arial"/>
               </a:rPr>
-              <a:t>Role</a:t>
-            </a:r>
-          </a:p>
-        </p:txBody>
-      </p:sp>
-      <p:sp>
-        <p:nvSpPr>
-          <p:cNvPr id="7" name="TextBox 6"/>
-          <p:cNvSpPr txBox="1"/>
-          <p:nvPr/>
-        </p:nvSpPr>
-        <p:spPr>
-          <a:xfrm>
-            <a:off x="3108960" y="1234440"/>
-            <a:ext cx="1645920" cy="320040"/>
-          </a:xfrm>
-          <a:prstGeom prst="rect">
-            <a:avLst/>
-          </a:prstGeom>
-          <a:noFill/>
-        </p:spPr>
-        <p:txBody>
-          <a:bodyPr wrap="square">
-            <a:spAutoFit/>
-          </a:bodyPr>
-          <a:lstStyle/>
-          <a:p>
-            <a:pPr algn="l"/>
-            <a:r>
-              <a:rPr sz="1200" b="1">
-                <a:solidFill>
-                  <a:srgbClr val="067AB4"/>
-                </a:solidFill>
-                <a:latin typeface="Arial"/>
-              </a:rPr>
-              <a:t>Mode</a:t>
-            </a:r>
-          </a:p>
-        </p:txBody>
-      </p:sp>
-      <p:sp>
-        <p:nvSpPr>
-          <p:cNvPr id="8" name="TextBox 7"/>
-          <p:cNvSpPr txBox="1"/>
-          <p:nvPr/>
-        </p:nvSpPr>
-        <p:spPr>
-          <a:xfrm>
-            <a:off x="4846320" y="1234440"/>
-            <a:ext cx="2377440" cy="320040"/>
-          </a:xfrm>
-          <a:prstGeom prst="rect">
-            <a:avLst/>
-          </a:prstGeom>
-          <a:noFill/>
-        </p:spPr>
-        <p:txBody>
-          <a:bodyPr wrap="square">
-            <a:spAutoFit/>
-          </a:bodyPr>
-          <a:lstStyle/>
-          <a:p>
-            <a:pPr algn="l"/>
-            <a:r>
-              <a:rPr sz="1200" b="1">
-                <a:solidFill>
-                  <a:srgbClr val="067AB4"/>
-                </a:solidFill>
-                <a:latin typeface="Arial"/>
-              </a:rPr>
-              <a:t>Effort</a:t>
-            </a:r>
-          </a:p>
-        </p:txBody>
-      </p:sp>
-      <p:sp>
-        <p:nvSpPr>
-          <p:cNvPr id="9" name="TextBox 8"/>
-          <p:cNvSpPr txBox="1"/>
-          <p:nvPr/>
-        </p:nvSpPr>
-        <p:spPr>
-          <a:xfrm>
-            <a:off x="7315200" y="1234440"/>
-            <a:ext cx="4206240" cy="320040"/>
-          </a:xfrm>
-          <a:prstGeom prst="rect">
-            <a:avLst/>
-          </a:prstGeom>
-          <a:noFill/>
-        </p:spPr>
-        <p:txBody>
-          <a:bodyPr wrap="square">
-            <a:spAutoFit/>
-          </a:bodyPr>
-          <a:lstStyle/>
-          <a:p>
-            <a:pPr algn="l"/>
-            <a:r>
-              <a:rPr sz="1200" b="1">
-                <a:solidFill>
-                  <a:srgbClr val="067AB4"/>
-                </a:solidFill>
-                <a:latin typeface="Arial"/>
-              </a:rPr>
-              <a:t>Responsibility</a:t>
-            </a:r>
-          </a:p>
-        </p:txBody>
-      </p:sp>
-      <p:sp>
-        <p:nvSpPr>
-          <p:cNvPr id="10" name="Rectangle 9"/>
+              <a:t>DONE</a:t>
+            </a:r>
+          </a:p>
+        </p:txBody>
+      </p:sp>
+      <p:sp>
+        <p:nvSpPr>
+          <p:cNvPr id="11" name="TextBox 10"/>
+          <p:cNvSpPr txBox="1"/>
+          <p:nvPr/>
+        </p:nvSpPr>
+        <p:spPr>
+          <a:xfrm>
+            <a:off x="137159" y="2212848"/>
+            <a:ext cx="1362456" cy="502920"/>
+          </a:xfrm>
+          <a:prstGeom prst="rect">
+            <a:avLst/>
+          </a:prstGeom>
+          <a:noFill/>
+        </p:spPr>
+        <p:txBody>
+          <a:bodyPr wrap="square">
+            <a:spAutoFit/>
+          </a:bodyPr>
+          <a:lstStyle/>
+          <a:p>
+            <a:pPr algn="ctr"/>
+            <a:r>
+              <a:rPr sz="1100" b="1">
+                <a:solidFill>
+                  <a:srgbClr val="0C2577"/>
+                </a:solidFill>
+                <a:latin typeface="Arial"/>
+              </a:rPr>
+              <a:t>Corpus ready</a:t>
+            </a:r>
+          </a:p>
+        </p:txBody>
+      </p:sp>
+      <p:sp>
+        <p:nvSpPr>
+          <p:cNvPr id="12" name="TextBox 11"/>
+          <p:cNvSpPr txBox="1"/>
+          <p:nvPr/>
+        </p:nvSpPr>
+        <p:spPr>
+          <a:xfrm>
+            <a:off x="137159" y="2788920"/>
+            <a:ext cx="1362456" cy="1005840"/>
+          </a:xfrm>
+          <a:prstGeom prst="rect">
+            <a:avLst/>
+          </a:prstGeom>
+          <a:noFill/>
+        </p:spPr>
+        <p:txBody>
+          <a:bodyPr wrap="square">
+            <a:spAutoFit/>
+          </a:bodyPr>
+          <a:lstStyle/>
+          <a:p>
+            <a:pPr algn="ctr"/>
+            <a:r>
+              <a:rPr sz="1000" b="0">
+                <a:solidFill>
+                  <a:srgbClr val="5A5A5A"/>
+                </a:solidFill>
+                <a:latin typeface="Arial"/>
+              </a:rPr>
+              <a:t>Content + metadata
+copied into Ask Docs</a:t>
+            </a:r>
+          </a:p>
+        </p:txBody>
+      </p:sp>
+      <p:sp>
+        <p:nvSpPr>
+          <p:cNvPr id="13" name="Oval 12"/>
           <p:cNvSpPr/>
           <p:nvPr/>
         </p:nvSpPr>
         <p:spPr>
           <a:xfrm>
-            <a:off x="457200" y="1554480"/>
-            <a:ext cx="11247120" cy="777240"/>
-          </a:xfrm>
-          <a:prstGeom prst="rect">
-            <a:avLst/>
+            <a:off x="2453640" y="1298448"/>
+            <a:ext cx="256032" cy="256032"/>
+          </a:xfrm>
+          <a:prstGeom prst="ellipse">
+            <a:avLst/>
+          </a:prstGeom>
+          <a:solidFill>
+            <a:srgbClr val="FF7200"/>
+          </a:solidFill>
+          <a:ln>
+            <a:noFill/>
+          </a:ln>
+        </p:spPr>
+        <p:style>
+          <a:lnRef idx="1">
+            <a:schemeClr val="accent1"/>
+          </a:lnRef>
+          <a:fillRef idx="3">
+            <a:schemeClr val="accent1"/>
+          </a:fillRef>
+          <a:effectRef idx="2">
+            <a:schemeClr val="accent1"/>
+          </a:effectRef>
+          <a:fontRef idx="minor">
+            <a:schemeClr val="lt1"/>
+          </a:fontRef>
+        </p:style>
+        <p:txBody>
+          <a:bodyPr rtlCol="0" anchor="ctr"/>
+          <a:lstStyle/>
+          <a:p>
+            <a:pPr algn="ctr"/>
+          </a:p>
+        </p:txBody>
+      </p:sp>
+      <p:sp>
+        <p:nvSpPr>
+          <p:cNvPr id="14" name="Rectangle 13"/>
+          <p:cNvSpPr/>
+          <p:nvPr/>
+        </p:nvSpPr>
+        <p:spPr>
+          <a:xfrm>
+            <a:off x="2563368" y="1554480"/>
+            <a:ext cx="31750" cy="228600"/>
+          </a:xfrm>
+          <a:prstGeom prst="rect">
+            <a:avLst/>
+          </a:prstGeom>
+          <a:solidFill>
+            <a:srgbClr val="FF7200"/>
+          </a:solidFill>
+          <a:ln>
+            <a:noFill/>
+          </a:ln>
+        </p:spPr>
+        <p:style>
+          <a:lnRef idx="1">
+            <a:schemeClr val="accent1"/>
+          </a:lnRef>
+          <a:fillRef idx="3">
+            <a:schemeClr val="accent1"/>
+          </a:fillRef>
+          <a:effectRef idx="2">
+            <a:schemeClr val="accent1"/>
+          </a:effectRef>
+          <a:fontRef idx="minor">
+            <a:schemeClr val="lt1"/>
+          </a:fontRef>
+        </p:style>
+        <p:txBody>
+          <a:bodyPr rtlCol="0" anchor="ctr"/>
+          <a:lstStyle/>
+          <a:p>
+            <a:pPr algn="ctr"/>
+          </a:p>
+        </p:txBody>
+      </p:sp>
+      <p:sp>
+        <p:nvSpPr>
+          <p:cNvPr id="15" name="Rounded Rectangle 14"/>
+          <p:cNvSpPr/>
+          <p:nvPr/>
+        </p:nvSpPr>
+        <p:spPr>
+          <a:xfrm>
+            <a:off x="1831848" y="1828800"/>
+            <a:ext cx="1508760" cy="2148840"/>
+          </a:xfrm>
+          <a:prstGeom prst="roundRect">
+            <a:avLst>
+              <a:gd name="adj" fmla="val 5000"/>
+            </a:avLst>
+          </a:prstGeom>
+          <a:solidFill>
+            <a:srgbClr val="FFF3E0"/>
+          </a:solidFill>
+          <a:ln>
+            <a:noFill/>
+          </a:ln>
+        </p:spPr>
+        <p:style>
+          <a:lnRef idx="1">
+            <a:schemeClr val="accent1"/>
+          </a:lnRef>
+          <a:fillRef idx="3">
+            <a:schemeClr val="accent1"/>
+          </a:fillRef>
+          <a:effectRef idx="2">
+            <a:schemeClr val="accent1"/>
+          </a:effectRef>
+          <a:fontRef idx="minor">
+            <a:schemeClr val="lt1"/>
+          </a:fontRef>
+        </p:style>
+        <p:txBody>
+          <a:bodyPr rtlCol="0" anchor="ctr"/>
+          <a:lstStyle/>
+          <a:p>
+            <a:pPr algn="ctr"/>
+          </a:p>
+        </p:txBody>
+      </p:sp>
+      <p:sp>
+        <p:nvSpPr>
+          <p:cNvPr id="16" name="TextBox 15"/>
+          <p:cNvSpPr txBox="1"/>
+          <p:nvPr/>
+        </p:nvSpPr>
+        <p:spPr>
+          <a:xfrm>
+            <a:off x="1905000" y="1938528"/>
+            <a:ext cx="1362456" cy="256032"/>
+          </a:xfrm>
+          <a:prstGeom prst="rect">
+            <a:avLst/>
+          </a:prstGeom>
+          <a:noFill/>
+        </p:spPr>
+        <p:txBody>
+          <a:bodyPr wrap="square">
+            <a:spAutoFit/>
+          </a:bodyPr>
+          <a:lstStyle/>
+          <a:p>
+            <a:pPr algn="ctr"/>
+            <a:r>
+              <a:rPr sz="1000" b="1">
+                <a:solidFill>
+                  <a:srgbClr val="FF7200"/>
+                </a:solidFill>
+                <a:latin typeface="Arial"/>
+              </a:rPr>
+              <a:t>Wks 1–2</a:t>
+            </a:r>
+          </a:p>
+        </p:txBody>
+      </p:sp>
+      <p:sp>
+        <p:nvSpPr>
+          <p:cNvPr id="17" name="TextBox 16"/>
+          <p:cNvSpPr txBox="1"/>
+          <p:nvPr/>
+        </p:nvSpPr>
+        <p:spPr>
+          <a:xfrm>
+            <a:off x="1905000" y="2212848"/>
+            <a:ext cx="1362456" cy="502920"/>
+          </a:xfrm>
+          <a:prstGeom prst="rect">
+            <a:avLst/>
+          </a:prstGeom>
+          <a:noFill/>
+        </p:spPr>
+        <p:txBody>
+          <a:bodyPr wrap="square">
+            <a:spAutoFit/>
+          </a:bodyPr>
+          <a:lstStyle/>
+          <a:p>
+            <a:pPr algn="ctr"/>
+            <a:r>
+              <a:rPr sz="1100" b="1">
+                <a:solidFill>
+                  <a:srgbClr val="0C2577"/>
+                </a:solidFill>
+                <a:latin typeface="Arial"/>
+              </a:rPr>
+              <a:t>Design golden set</a:t>
+            </a:r>
+          </a:p>
+        </p:txBody>
+      </p:sp>
+      <p:sp>
+        <p:nvSpPr>
+          <p:cNvPr id="18" name="TextBox 17"/>
+          <p:cNvSpPr txBox="1"/>
+          <p:nvPr/>
+        </p:nvSpPr>
+        <p:spPr>
+          <a:xfrm>
+            <a:off x="1905000" y="2788920"/>
+            <a:ext cx="1362456" cy="1005840"/>
+          </a:xfrm>
+          <a:prstGeom prst="rect">
+            <a:avLst/>
+          </a:prstGeom>
+          <a:noFill/>
+        </p:spPr>
+        <p:txBody>
+          <a:bodyPr wrap="square">
+            <a:spAutoFit/>
+          </a:bodyPr>
+          <a:lstStyle/>
+          <a:p>
+            <a:pPr algn="ctr"/>
+            <a:r>
+              <a:rPr sz="1000" b="0">
+                <a:solidFill>
+                  <a:srgbClr val="5A5A5A"/>
+                </a:solidFill>
+                <a:latin typeface="Arial"/>
+              </a:rPr>
+              <a:t>50–150 Qs across
+taxonomy &amp; edge cases</a:t>
+            </a:r>
+          </a:p>
+        </p:txBody>
+      </p:sp>
+      <p:sp>
+        <p:nvSpPr>
+          <p:cNvPr id="19" name="Oval 18"/>
+          <p:cNvSpPr/>
+          <p:nvPr/>
+        </p:nvSpPr>
+        <p:spPr>
+          <a:xfrm>
+            <a:off x="4221480" y="1298448"/>
+            <a:ext cx="256032" cy="256032"/>
+          </a:xfrm>
+          <a:prstGeom prst="ellipse">
+            <a:avLst/>
+          </a:prstGeom>
+          <a:solidFill>
+            <a:srgbClr val="0C2577"/>
+          </a:solidFill>
+          <a:ln>
+            <a:noFill/>
+          </a:ln>
+        </p:spPr>
+        <p:style>
+          <a:lnRef idx="1">
+            <a:schemeClr val="accent1"/>
+          </a:lnRef>
+          <a:fillRef idx="3">
+            <a:schemeClr val="accent1"/>
+          </a:fillRef>
+          <a:effectRef idx="2">
+            <a:schemeClr val="accent1"/>
+          </a:effectRef>
+          <a:fontRef idx="minor">
+            <a:schemeClr val="lt1"/>
+          </a:fontRef>
+        </p:style>
+        <p:txBody>
+          <a:bodyPr rtlCol="0" anchor="ctr"/>
+          <a:lstStyle/>
+          <a:p>
+            <a:pPr algn="ctr"/>
+          </a:p>
+        </p:txBody>
+      </p:sp>
+      <p:sp>
+        <p:nvSpPr>
+          <p:cNvPr id="20" name="Rectangle 19"/>
+          <p:cNvSpPr/>
+          <p:nvPr/>
+        </p:nvSpPr>
+        <p:spPr>
+          <a:xfrm>
+            <a:off x="4331208" y="1554480"/>
+            <a:ext cx="31750" cy="228600"/>
+          </a:xfrm>
+          <a:prstGeom prst="rect">
+            <a:avLst/>
+          </a:prstGeom>
+          <a:solidFill>
+            <a:srgbClr val="0C2577"/>
+          </a:solidFill>
+          <a:ln>
+            <a:noFill/>
+          </a:ln>
+        </p:spPr>
+        <p:style>
+          <a:lnRef idx="1">
+            <a:schemeClr val="accent1"/>
+          </a:lnRef>
+          <a:fillRef idx="3">
+            <a:schemeClr val="accent1"/>
+          </a:fillRef>
+          <a:effectRef idx="2">
+            <a:schemeClr val="accent1"/>
+          </a:effectRef>
+          <a:fontRef idx="minor">
+            <a:schemeClr val="lt1"/>
+          </a:fontRef>
+        </p:style>
+        <p:txBody>
+          <a:bodyPr rtlCol="0" anchor="ctr"/>
+          <a:lstStyle/>
+          <a:p>
+            <a:pPr algn="ctr"/>
+          </a:p>
+        </p:txBody>
+      </p:sp>
+      <p:sp>
+        <p:nvSpPr>
+          <p:cNvPr id="21" name="Rounded Rectangle 20"/>
+          <p:cNvSpPr/>
+          <p:nvPr/>
+        </p:nvSpPr>
+        <p:spPr>
+          <a:xfrm>
+            <a:off x="3599688" y="1828800"/>
+            <a:ext cx="1508760" cy="2148840"/>
+          </a:xfrm>
+          <a:prstGeom prst="roundRect">
+            <a:avLst>
+              <a:gd name="adj" fmla="val 5000"/>
+            </a:avLst>
           </a:prstGeom>
           <a:solidFill>
             <a:srgbClr val="F2F4F7"/>
@@ -5794,297 +5492,211 @@
       </p:sp>
       <p:sp>
         <p:nvSpPr>
-          <p:cNvPr id="11" name="TextBox 10"/>
-          <p:cNvSpPr txBox="1"/>
-          <p:nvPr/>
-        </p:nvSpPr>
-        <p:spPr>
-          <a:xfrm>
-            <a:off x="548640" y="1645920"/>
-            <a:ext cx="2468880" cy="640080"/>
-          </a:xfrm>
-          <a:prstGeom prst="rect">
-            <a:avLst/>
-          </a:prstGeom>
-          <a:noFill/>
-        </p:spPr>
-        <p:txBody>
-          <a:bodyPr wrap="square">
-            <a:spAutoFit/>
-          </a:bodyPr>
-          <a:lstStyle/>
-          <a:p>
-            <a:pPr algn="l"/>
-            <a:r>
-              <a:rPr sz="1200" b="1">
-                <a:solidFill>
-                  <a:srgbClr val="000000"/>
-                </a:solidFill>
-                <a:latin typeface="Arial"/>
-              </a:rPr>
-              <a:t>Knowledge Steward (lead)</a:t>
-            </a:r>
-          </a:p>
-        </p:txBody>
-      </p:sp>
-      <p:sp>
-        <p:nvSpPr>
-          <p:cNvPr id="12" name="TextBox 11"/>
-          <p:cNvSpPr txBox="1"/>
-          <p:nvPr/>
-        </p:nvSpPr>
-        <p:spPr>
-          <a:xfrm>
-            <a:off x="3108960" y="1645920"/>
-            <a:ext cx="1645920" cy="640080"/>
-          </a:xfrm>
-          <a:prstGeom prst="rect">
-            <a:avLst/>
-          </a:prstGeom>
-          <a:noFill/>
-        </p:spPr>
-        <p:txBody>
-          <a:bodyPr wrap="square">
-            <a:spAutoFit/>
-          </a:bodyPr>
-          <a:lstStyle/>
-          <a:p>
-            <a:pPr algn="l"/>
-            <a:r>
-              <a:rPr sz="1200" b="0">
-                <a:solidFill>
-                  <a:srgbClr val="000000"/>
-                </a:solidFill>
-                <a:latin typeface="Arial"/>
-              </a:rPr>
-              <a:t>Standing role</a:t>
-            </a:r>
-          </a:p>
-        </p:txBody>
-      </p:sp>
-      <p:sp>
-        <p:nvSpPr>
-          <p:cNvPr id="13" name="TextBox 12"/>
-          <p:cNvSpPr txBox="1"/>
-          <p:nvPr/>
-        </p:nvSpPr>
-        <p:spPr>
-          <a:xfrm>
-            <a:off x="4846320" y="1645920"/>
-            <a:ext cx="2377440" cy="640080"/>
-          </a:xfrm>
-          <a:prstGeom prst="rect">
-            <a:avLst/>
-          </a:prstGeom>
-          <a:noFill/>
-        </p:spPr>
-        <p:txBody>
-          <a:bodyPr wrap="square">
-            <a:spAutoFit/>
-          </a:bodyPr>
-          <a:lstStyle/>
-          <a:p>
-            <a:pPr algn="l"/>
-            <a:r>
-              <a:rPr sz="1200" b="0">
-                <a:solidFill>
-                  <a:srgbClr val="000000"/>
-                </a:solidFill>
-                <a:latin typeface="Arial"/>
-              </a:rPr>
-              <a:t>0.4–0.6 FTE ongoing</a:t>
-            </a:r>
-          </a:p>
-        </p:txBody>
-      </p:sp>
-      <p:sp>
-        <p:nvSpPr>
-          <p:cNvPr id="14" name="TextBox 13"/>
-          <p:cNvSpPr txBox="1"/>
-          <p:nvPr/>
-        </p:nvSpPr>
-        <p:spPr>
-          <a:xfrm>
-            <a:off x="7315200" y="1645920"/>
-            <a:ext cx="4206240" cy="640080"/>
-          </a:xfrm>
-          <a:prstGeom prst="rect">
-            <a:avLst/>
-          </a:prstGeom>
-          <a:noFill/>
-        </p:spPr>
-        <p:txBody>
-          <a:bodyPr wrap="square">
-            <a:spAutoFit/>
-          </a:bodyPr>
-          <a:lstStyle/>
-          <a:p>
-            <a:pPr algn="l"/>
-            <a:r>
-              <a:rPr sz="1200" b="0">
-                <a:solidFill>
-                  <a:srgbClr val="000000"/>
-                </a:solidFill>
-                <a:latin typeface="Arial"/>
-              </a:rPr>
-              <a:t>Corpus quality, golden set, access requests, sync exceptions, SME coordination</a:t>
-            </a:r>
-          </a:p>
-        </p:txBody>
-      </p:sp>
-      <p:sp>
-        <p:nvSpPr>
-          <p:cNvPr id="15" name="TextBox 14"/>
-          <p:cNvSpPr txBox="1"/>
-          <p:nvPr/>
-        </p:nvSpPr>
-        <p:spPr>
-          <a:xfrm>
-            <a:off x="548640" y="2468880"/>
-            <a:ext cx="2468880" cy="640080"/>
-          </a:xfrm>
-          <a:prstGeom prst="rect">
-            <a:avLst/>
-          </a:prstGeom>
-          <a:noFill/>
-        </p:spPr>
-        <p:txBody>
-          <a:bodyPr wrap="square">
-            <a:spAutoFit/>
-          </a:bodyPr>
-          <a:lstStyle/>
-          <a:p>
-            <a:pPr algn="l"/>
-            <a:r>
-              <a:rPr sz="1200" b="1">
-                <a:solidFill>
-                  <a:srgbClr val="000000"/>
-                </a:solidFill>
-                <a:latin typeface="Arial"/>
-              </a:rPr>
-              <a:t>Insights SMEs (panel)</a:t>
-            </a:r>
-          </a:p>
-        </p:txBody>
-      </p:sp>
-      <p:sp>
-        <p:nvSpPr>
-          <p:cNvPr id="16" name="TextBox 15"/>
-          <p:cNvSpPr txBox="1"/>
-          <p:nvPr/>
-        </p:nvSpPr>
-        <p:spPr>
-          <a:xfrm>
-            <a:off x="3108960" y="2468880"/>
-            <a:ext cx="1645920" cy="640080"/>
-          </a:xfrm>
-          <a:prstGeom prst="rect">
-            <a:avLst/>
-          </a:prstGeom>
-          <a:noFill/>
-        </p:spPr>
-        <p:txBody>
-          <a:bodyPr wrap="square">
-            <a:spAutoFit/>
-          </a:bodyPr>
-          <a:lstStyle/>
-          <a:p>
-            <a:pPr algn="l"/>
-            <a:r>
-              <a:rPr sz="1200" b="0">
-                <a:solidFill>
-                  <a:srgbClr val="000000"/>
-                </a:solidFill>
-                <a:latin typeface="Arial"/>
-              </a:rPr>
-              <a:t>Rotating</a:t>
-            </a:r>
-          </a:p>
-        </p:txBody>
-      </p:sp>
-      <p:sp>
-        <p:nvSpPr>
-          <p:cNvPr id="17" name="TextBox 16"/>
-          <p:cNvSpPr txBox="1"/>
-          <p:nvPr/>
-        </p:nvSpPr>
-        <p:spPr>
-          <a:xfrm>
-            <a:off x="4846320" y="2468880"/>
-            <a:ext cx="2377440" cy="640080"/>
-          </a:xfrm>
-          <a:prstGeom prst="rect">
-            <a:avLst/>
-          </a:prstGeom>
-          <a:noFill/>
-        </p:spPr>
-        <p:txBody>
-          <a:bodyPr wrap="square">
-            <a:spAutoFit/>
-          </a:bodyPr>
-          <a:lstStyle/>
-          <a:p>
-            <a:pPr algn="l"/>
-            <a:r>
-              <a:rPr sz="1200" b="0">
-                <a:solidFill>
-                  <a:srgbClr val="000000"/>
-                </a:solidFill>
-                <a:latin typeface="Arial"/>
-              </a:rPr>
-              <a:t>~40–80 hrs stand-up; 4–8 hrs/mo</a:t>
-            </a:r>
-          </a:p>
-        </p:txBody>
-      </p:sp>
-      <p:sp>
-        <p:nvSpPr>
-          <p:cNvPr id="18" name="TextBox 17"/>
-          <p:cNvSpPr txBox="1"/>
-          <p:nvPr/>
-        </p:nvSpPr>
-        <p:spPr>
-          <a:xfrm>
-            <a:off x="7315200" y="2468880"/>
-            <a:ext cx="4206240" cy="640080"/>
-          </a:xfrm>
-          <a:prstGeom prst="rect">
-            <a:avLst/>
-          </a:prstGeom>
-          <a:noFill/>
-        </p:spPr>
-        <p:txBody>
-          <a:bodyPr wrap="square">
-            <a:spAutoFit/>
-          </a:bodyPr>
-          <a:lstStyle/>
-          <a:p>
-            <a:pPr algn="l"/>
-            <a:r>
-              <a:rPr sz="1200" b="0">
-                <a:solidFill>
-                  <a:srgbClr val="000000"/>
-                </a:solidFill>
-                <a:latin typeface="Arial"/>
-              </a:rPr>
-              <a:t>Truth answers, taxonomy edge cases, approve go-live scorecard</a:t>
-            </a:r>
-          </a:p>
-        </p:txBody>
-      </p:sp>
-      <p:sp>
-        <p:nvSpPr>
-          <p:cNvPr id="19" name="Rectangle 18"/>
+          <p:cNvPr id="22" name="TextBox 21"/>
+          <p:cNvSpPr txBox="1"/>
+          <p:nvPr/>
+        </p:nvSpPr>
+        <p:spPr>
+          <a:xfrm>
+            <a:off x="3672840" y="1938528"/>
+            <a:ext cx="1362456" cy="256032"/>
+          </a:xfrm>
+          <a:prstGeom prst="rect">
+            <a:avLst/>
+          </a:prstGeom>
+          <a:noFill/>
+        </p:spPr>
+        <p:txBody>
+          <a:bodyPr wrap="square">
+            <a:spAutoFit/>
+          </a:bodyPr>
+          <a:lstStyle/>
+          <a:p>
+            <a:pPr algn="ctr"/>
+            <a:r>
+              <a:rPr sz="1000" b="1">
+                <a:solidFill>
+                  <a:srgbClr val="0C2577"/>
+                </a:solidFill>
+                <a:latin typeface="Arial"/>
+              </a:rPr>
+              <a:t>Wks 2–4</a:t>
+            </a:r>
+          </a:p>
+        </p:txBody>
+      </p:sp>
+      <p:sp>
+        <p:nvSpPr>
+          <p:cNvPr id="23" name="TextBox 22"/>
+          <p:cNvSpPr txBox="1"/>
+          <p:nvPr/>
+        </p:nvSpPr>
+        <p:spPr>
+          <a:xfrm>
+            <a:off x="3672840" y="2212848"/>
+            <a:ext cx="1362456" cy="502920"/>
+          </a:xfrm>
+          <a:prstGeom prst="rect">
+            <a:avLst/>
+          </a:prstGeom>
+          <a:noFill/>
+        </p:spPr>
+        <p:txBody>
+          <a:bodyPr wrap="square">
+            <a:spAutoFit/>
+          </a:bodyPr>
+          <a:lstStyle/>
+          <a:p>
+            <a:pPr algn="ctr"/>
+            <a:r>
+              <a:rPr sz="1100" b="1">
+                <a:solidFill>
+                  <a:srgbClr val="0C2577"/>
+                </a:solidFill>
+                <a:latin typeface="Arial"/>
+              </a:rPr>
+              <a:t>Truth answers</a:t>
+            </a:r>
+          </a:p>
+        </p:txBody>
+      </p:sp>
+      <p:sp>
+        <p:nvSpPr>
+          <p:cNvPr id="24" name="TextBox 23"/>
+          <p:cNvSpPr txBox="1"/>
+          <p:nvPr/>
+        </p:nvSpPr>
+        <p:spPr>
+          <a:xfrm>
+            <a:off x="3672840" y="2788920"/>
+            <a:ext cx="1362456" cy="1005840"/>
+          </a:xfrm>
+          <a:prstGeom prst="rect">
+            <a:avLst/>
+          </a:prstGeom>
+          <a:noFill/>
+        </p:spPr>
+        <p:txBody>
+          <a:bodyPr wrap="square">
+            <a:spAutoFit/>
+          </a:bodyPr>
+          <a:lstStyle/>
+          <a:p>
+            <a:pPr algn="ctr"/>
+            <a:r>
+              <a:rPr sz="1000" b="0">
+                <a:solidFill>
+                  <a:srgbClr val="5A5A5A"/>
+                </a:solidFill>
+                <a:latin typeface="Arial"/>
+              </a:rPr>
+              <a:t>SME / steward writes
+expected answers + cites</a:t>
+            </a:r>
+          </a:p>
+        </p:txBody>
+      </p:sp>
+      <p:sp>
+        <p:nvSpPr>
+          <p:cNvPr id="25" name="Oval 24"/>
           <p:cNvSpPr/>
           <p:nvPr/>
         </p:nvSpPr>
         <p:spPr>
           <a:xfrm>
-            <a:off x="457200" y="3200400"/>
-            <a:ext cx="11247120" cy="777240"/>
-          </a:xfrm>
-          <a:prstGeom prst="rect">
-            <a:avLst/>
+            <a:off x="5989320" y="1298448"/>
+            <a:ext cx="256032" cy="256032"/>
+          </a:xfrm>
+          <a:prstGeom prst="ellipse">
+            <a:avLst/>
+          </a:prstGeom>
+          <a:solidFill>
+            <a:srgbClr val="0C2577"/>
+          </a:solidFill>
+          <a:ln>
+            <a:noFill/>
+          </a:ln>
+        </p:spPr>
+        <p:style>
+          <a:lnRef idx="1">
+            <a:schemeClr val="accent1"/>
+          </a:lnRef>
+          <a:fillRef idx="3">
+            <a:schemeClr val="accent1"/>
+          </a:fillRef>
+          <a:effectRef idx="2">
+            <a:schemeClr val="accent1"/>
+          </a:effectRef>
+          <a:fontRef idx="minor">
+            <a:schemeClr val="lt1"/>
+          </a:fontRef>
+        </p:style>
+        <p:txBody>
+          <a:bodyPr rtlCol="0" anchor="ctr"/>
+          <a:lstStyle/>
+          <a:p>
+            <a:pPr algn="ctr"/>
+          </a:p>
+        </p:txBody>
+      </p:sp>
+      <p:sp>
+        <p:nvSpPr>
+          <p:cNvPr id="26" name="Rectangle 25"/>
+          <p:cNvSpPr/>
+          <p:nvPr/>
+        </p:nvSpPr>
+        <p:spPr>
+          <a:xfrm>
+            <a:off x="6099048" y="1554480"/>
+            <a:ext cx="31750" cy="228600"/>
+          </a:xfrm>
+          <a:prstGeom prst="rect">
+            <a:avLst/>
+          </a:prstGeom>
+          <a:solidFill>
+            <a:srgbClr val="0C2577"/>
+          </a:solidFill>
+          <a:ln>
+            <a:noFill/>
+          </a:ln>
+        </p:spPr>
+        <p:style>
+          <a:lnRef idx="1">
+            <a:schemeClr val="accent1"/>
+          </a:lnRef>
+          <a:fillRef idx="3">
+            <a:schemeClr val="accent1"/>
+          </a:fillRef>
+          <a:effectRef idx="2">
+            <a:schemeClr val="accent1"/>
+          </a:effectRef>
+          <a:fontRef idx="minor">
+            <a:schemeClr val="lt1"/>
+          </a:fontRef>
+        </p:style>
+        <p:txBody>
+          <a:bodyPr rtlCol="0" anchor="ctr"/>
+          <a:lstStyle/>
+          <a:p>
+            <a:pPr algn="ctr"/>
+          </a:p>
+        </p:txBody>
+      </p:sp>
+      <p:sp>
+        <p:nvSpPr>
+          <p:cNvPr id="27" name="Rounded Rectangle 26"/>
+          <p:cNvSpPr/>
+          <p:nvPr/>
+        </p:nvSpPr>
+        <p:spPr>
+          <a:xfrm>
+            <a:off x="5367528" y="1828800"/>
+            <a:ext cx="1508760" cy="2148840"/>
+          </a:xfrm>
+          <a:prstGeom prst="roundRect">
+            <a:avLst>
+              <a:gd name="adj" fmla="val 5000"/>
+            </a:avLst>
           </a:prstGeom>
           <a:solidFill>
             <a:srgbClr val="F2F4F7"/>
@@ -6117,297 +5729,211 @@
       </p:sp>
       <p:sp>
         <p:nvSpPr>
-          <p:cNvPr id="20" name="TextBox 19"/>
-          <p:cNvSpPr txBox="1"/>
-          <p:nvPr/>
-        </p:nvSpPr>
-        <p:spPr>
-          <a:xfrm>
-            <a:off x="548640" y="3291840"/>
-            <a:ext cx="2468880" cy="640080"/>
-          </a:xfrm>
-          <a:prstGeom prst="rect">
-            <a:avLst/>
-          </a:prstGeom>
-          <a:noFill/>
-        </p:spPr>
-        <p:txBody>
-          <a:bodyPr wrap="square">
-            <a:spAutoFit/>
-          </a:bodyPr>
-          <a:lstStyle/>
-          <a:p>
-            <a:pPr algn="l"/>
-            <a:r>
-              <a:rPr sz="1200" b="1">
-                <a:solidFill>
-                  <a:srgbClr val="000000"/>
-                </a:solidFill>
-                <a:latin typeface="Arial"/>
-              </a:rPr>
-              <a:t>KM / platform ops</a:t>
-            </a:r>
-          </a:p>
-        </p:txBody>
-      </p:sp>
-      <p:sp>
-        <p:nvSpPr>
-          <p:cNvPr id="21" name="TextBox 20"/>
-          <p:cNvSpPr txBox="1"/>
-          <p:nvPr/>
-        </p:nvSpPr>
-        <p:spPr>
-          <a:xfrm>
-            <a:off x="3108960" y="3291840"/>
-            <a:ext cx="1645920" cy="640080"/>
-          </a:xfrm>
-          <a:prstGeom prst="rect">
-            <a:avLst/>
-          </a:prstGeom>
-          <a:noFill/>
-        </p:spPr>
-        <p:txBody>
-          <a:bodyPr wrap="square">
-            <a:spAutoFit/>
-          </a:bodyPr>
-          <a:lstStyle/>
-          <a:p>
-            <a:pPr algn="l"/>
-            <a:r>
-              <a:rPr sz="1200" b="0">
-                <a:solidFill>
-                  <a:srgbClr val="000000"/>
-                </a:solidFill>
-                <a:latin typeface="Arial"/>
-              </a:rPr>
-              <a:t>Shared</a:t>
-            </a:r>
-          </a:p>
-        </p:txBody>
-      </p:sp>
-      <p:sp>
-        <p:nvSpPr>
-          <p:cNvPr id="22" name="TextBox 21"/>
-          <p:cNvSpPr txBox="1"/>
-          <p:nvPr/>
-        </p:nvSpPr>
-        <p:spPr>
-          <a:xfrm>
-            <a:off x="4846320" y="3291840"/>
-            <a:ext cx="2377440" cy="640080"/>
-          </a:xfrm>
-          <a:prstGeom prst="rect">
-            <a:avLst/>
-          </a:prstGeom>
-          <a:noFill/>
-        </p:spPr>
-        <p:txBody>
-          <a:bodyPr wrap="square">
-            <a:spAutoFit/>
-          </a:bodyPr>
-          <a:lstStyle/>
-          <a:p>
-            <a:pPr algn="l"/>
-            <a:r>
-              <a:rPr sz="1200" b="0">
-                <a:solidFill>
-                  <a:srgbClr val="000000"/>
-                </a:solidFill>
-                <a:latin typeface="Arial"/>
-              </a:rPr>
-              <a:t>~20–40 hrs stand-up; 2–4 hrs/wk</a:t>
-            </a:r>
-          </a:p>
-        </p:txBody>
-      </p:sp>
-      <p:sp>
-        <p:nvSpPr>
-          <p:cNvPr id="23" name="TextBox 22"/>
-          <p:cNvSpPr txBox="1"/>
-          <p:nvPr/>
-        </p:nvSpPr>
-        <p:spPr>
-          <a:xfrm>
-            <a:off x="7315200" y="3291840"/>
-            <a:ext cx="4206240" cy="640080"/>
-          </a:xfrm>
-          <a:prstGeom prst="rect">
-            <a:avLst/>
-          </a:prstGeom>
-          <a:noFill/>
-        </p:spPr>
-        <p:txBody>
-          <a:bodyPr wrap="square">
-            <a:spAutoFit/>
-          </a:bodyPr>
-          <a:lstStyle/>
-          <a:p>
-            <a:pPr algn="l"/>
-            <a:r>
-              <a:rPr sz="1200" b="0">
-                <a:solidFill>
-                  <a:srgbClr val="000000"/>
-                </a:solidFill>
-                <a:latin typeface="Arial"/>
-              </a:rPr>
-              <a:t>Sync jobs, metadata, Ask AT&amp;T config, release testing</a:t>
-            </a:r>
-          </a:p>
-        </p:txBody>
-      </p:sp>
-      <p:sp>
-        <p:nvSpPr>
-          <p:cNvPr id="24" name="TextBox 23"/>
-          <p:cNvSpPr txBox="1"/>
-          <p:nvPr/>
-        </p:nvSpPr>
-        <p:spPr>
-          <a:xfrm>
-            <a:off x="548640" y="4114800"/>
-            <a:ext cx="2468880" cy="640080"/>
-          </a:xfrm>
-          <a:prstGeom prst="rect">
-            <a:avLst/>
-          </a:prstGeom>
-          <a:noFill/>
-        </p:spPr>
-        <p:txBody>
-          <a:bodyPr wrap="square">
-            <a:spAutoFit/>
-          </a:bodyPr>
-          <a:lstStyle/>
-          <a:p>
-            <a:pPr algn="l"/>
-            <a:r>
-              <a:rPr sz="1200" b="1">
-                <a:solidFill>
-                  <a:srgbClr val="000000"/>
-                </a:solidFill>
-                <a:latin typeface="Arial"/>
-              </a:rPr>
-              <a:t>Security / compliance</a:t>
-            </a:r>
-          </a:p>
-        </p:txBody>
-      </p:sp>
-      <p:sp>
-        <p:nvSpPr>
-          <p:cNvPr id="25" name="TextBox 24"/>
-          <p:cNvSpPr txBox="1"/>
-          <p:nvPr/>
-        </p:nvSpPr>
-        <p:spPr>
-          <a:xfrm>
-            <a:off x="3108960" y="4114800"/>
-            <a:ext cx="1645920" cy="640080"/>
-          </a:xfrm>
-          <a:prstGeom prst="rect">
-            <a:avLst/>
-          </a:prstGeom>
-          <a:noFill/>
-        </p:spPr>
-        <p:txBody>
-          <a:bodyPr wrap="square">
-            <a:spAutoFit/>
-          </a:bodyPr>
-          <a:lstStyle/>
-          <a:p>
-            <a:pPr algn="l"/>
-            <a:r>
-              <a:rPr sz="1200" b="0">
-                <a:solidFill>
-                  <a:srgbClr val="000000"/>
-                </a:solidFill>
-                <a:latin typeface="Arial"/>
-              </a:rPr>
-              <a:t>Checkpoint</a:t>
-            </a:r>
-          </a:p>
-        </p:txBody>
-      </p:sp>
-      <p:sp>
-        <p:nvSpPr>
-          <p:cNvPr id="26" name="TextBox 25"/>
-          <p:cNvSpPr txBox="1"/>
-          <p:nvPr/>
-        </p:nvSpPr>
-        <p:spPr>
-          <a:xfrm>
-            <a:off x="4846320" y="4114800"/>
-            <a:ext cx="2377440" cy="640080"/>
-          </a:xfrm>
-          <a:prstGeom prst="rect">
-            <a:avLst/>
-          </a:prstGeom>
-          <a:noFill/>
-        </p:spPr>
-        <p:txBody>
-          <a:bodyPr wrap="square">
-            <a:spAutoFit/>
-          </a:bodyPr>
-          <a:lstStyle/>
-          <a:p>
-            <a:pPr algn="l"/>
-            <a:r>
-              <a:rPr sz="1200" b="0">
-                <a:solidFill>
-                  <a:srgbClr val="000000"/>
-                </a:solidFill>
-                <a:latin typeface="Arial"/>
-              </a:rPr>
-              <a:t>~15–25 hrs initial</a:t>
-            </a:r>
-          </a:p>
-        </p:txBody>
-      </p:sp>
-      <p:sp>
-        <p:nvSpPr>
-          <p:cNvPr id="27" name="TextBox 26"/>
-          <p:cNvSpPr txBox="1"/>
-          <p:nvPr/>
-        </p:nvSpPr>
-        <p:spPr>
-          <a:xfrm>
-            <a:off x="7315200" y="4114800"/>
-            <a:ext cx="4206240" cy="640080"/>
-          </a:xfrm>
-          <a:prstGeom prst="rect">
-            <a:avLst/>
-          </a:prstGeom>
-          <a:noFill/>
-        </p:spPr>
-        <p:txBody>
-          <a:bodyPr wrap="square">
-            <a:spAutoFit/>
-          </a:bodyPr>
-          <a:lstStyle/>
-          <a:p>
-            <a:pPr algn="l"/>
-            <a:r>
-              <a:rPr sz="1200" b="0">
-                <a:solidFill>
-                  <a:srgbClr val="000000"/>
-                </a:solidFill>
-                <a:latin typeface="Arial"/>
-              </a:rPr>
-              <a:t>Access model, audit, data-class controls, exception review</a:t>
-            </a:r>
-          </a:p>
-        </p:txBody>
-      </p:sp>
-      <p:sp>
-        <p:nvSpPr>
-          <p:cNvPr id="28" name="Rectangle 27"/>
+          <p:cNvPr id="28" name="TextBox 27"/>
+          <p:cNvSpPr txBox="1"/>
+          <p:nvPr/>
+        </p:nvSpPr>
+        <p:spPr>
+          <a:xfrm>
+            <a:off x="5440680" y="1938528"/>
+            <a:ext cx="1362456" cy="256032"/>
+          </a:xfrm>
+          <a:prstGeom prst="rect">
+            <a:avLst/>
+          </a:prstGeom>
+          <a:noFill/>
+        </p:spPr>
+        <p:txBody>
+          <a:bodyPr wrap="square">
+            <a:spAutoFit/>
+          </a:bodyPr>
+          <a:lstStyle/>
+          <a:p>
+            <a:pPr algn="ctr"/>
+            <a:r>
+              <a:rPr sz="1000" b="1">
+                <a:solidFill>
+                  <a:srgbClr val="0C2577"/>
+                </a:solidFill>
+                <a:latin typeface="Arial"/>
+              </a:rPr>
+              <a:t>Wks 4–5</a:t>
+            </a:r>
+          </a:p>
+        </p:txBody>
+      </p:sp>
+      <p:sp>
+        <p:nvSpPr>
+          <p:cNvPr id="29" name="TextBox 28"/>
+          <p:cNvSpPr txBox="1"/>
+          <p:nvPr/>
+        </p:nvSpPr>
+        <p:spPr>
+          <a:xfrm>
+            <a:off x="5440680" y="2212848"/>
+            <a:ext cx="1362456" cy="502920"/>
+          </a:xfrm>
+          <a:prstGeom prst="rect">
+            <a:avLst/>
+          </a:prstGeom>
+          <a:noFill/>
+        </p:spPr>
+        <p:txBody>
+          <a:bodyPr wrap="square">
+            <a:spAutoFit/>
+          </a:bodyPr>
+          <a:lstStyle/>
+          <a:p>
+            <a:pPr algn="ctr"/>
+            <a:r>
+              <a:rPr sz="1100" b="1">
+                <a:solidFill>
+                  <a:srgbClr val="0C2577"/>
+                </a:solidFill>
+                <a:latin typeface="Arial"/>
+              </a:rPr>
+              <a:t>Blind run &amp; score</a:t>
+            </a:r>
+          </a:p>
+        </p:txBody>
+      </p:sp>
+      <p:sp>
+        <p:nvSpPr>
+          <p:cNvPr id="30" name="TextBox 29"/>
+          <p:cNvSpPr txBox="1"/>
+          <p:nvPr/>
+        </p:nvSpPr>
+        <p:spPr>
+          <a:xfrm>
+            <a:off x="5440680" y="2788920"/>
+            <a:ext cx="1362456" cy="1005840"/>
+          </a:xfrm>
+          <a:prstGeom prst="rect">
+            <a:avLst/>
+          </a:prstGeom>
+          <a:noFill/>
+        </p:spPr>
+        <p:txBody>
+          <a:bodyPr wrap="square">
+            <a:spAutoFit/>
+          </a:bodyPr>
+          <a:lstStyle/>
+          <a:p>
+            <a:pPr algn="ctr"/>
+            <a:r>
+              <a:rPr sz="1000" b="0">
+                <a:solidFill>
+                  <a:srgbClr val="5A5A5A"/>
+                </a:solidFill>
+                <a:latin typeface="Arial"/>
+              </a:rPr>
+              <a:t>Ask Docs answers;
+scorecard vs truth</a:t>
+            </a:r>
+          </a:p>
+        </p:txBody>
+      </p:sp>
+      <p:sp>
+        <p:nvSpPr>
+          <p:cNvPr id="31" name="Oval 30"/>
           <p:cNvSpPr/>
           <p:nvPr/>
         </p:nvSpPr>
         <p:spPr>
           <a:xfrm>
-            <a:off x="457200" y="4846320"/>
-            <a:ext cx="11247120" cy="777240"/>
-          </a:xfrm>
-          <a:prstGeom prst="rect">
-            <a:avLst/>
+            <a:off x="7757160" y="1298448"/>
+            <a:ext cx="256032" cy="256032"/>
+          </a:xfrm>
+          <a:prstGeom prst="ellipse">
+            <a:avLst/>
+          </a:prstGeom>
+          <a:solidFill>
+            <a:srgbClr val="0C2577"/>
+          </a:solidFill>
+          <a:ln>
+            <a:noFill/>
+          </a:ln>
+        </p:spPr>
+        <p:style>
+          <a:lnRef idx="1">
+            <a:schemeClr val="accent1"/>
+          </a:lnRef>
+          <a:fillRef idx="3">
+            <a:schemeClr val="accent1"/>
+          </a:fillRef>
+          <a:effectRef idx="2">
+            <a:schemeClr val="accent1"/>
+          </a:effectRef>
+          <a:fontRef idx="minor">
+            <a:schemeClr val="lt1"/>
+          </a:fontRef>
+        </p:style>
+        <p:txBody>
+          <a:bodyPr rtlCol="0" anchor="ctr"/>
+          <a:lstStyle/>
+          <a:p>
+            <a:pPr algn="ctr"/>
+          </a:p>
+        </p:txBody>
+      </p:sp>
+      <p:sp>
+        <p:nvSpPr>
+          <p:cNvPr id="32" name="Rectangle 31"/>
+          <p:cNvSpPr/>
+          <p:nvPr/>
+        </p:nvSpPr>
+        <p:spPr>
+          <a:xfrm>
+            <a:off x="7866888" y="1554480"/>
+            <a:ext cx="31750" cy="228600"/>
+          </a:xfrm>
+          <a:prstGeom prst="rect">
+            <a:avLst/>
+          </a:prstGeom>
+          <a:solidFill>
+            <a:srgbClr val="0C2577"/>
+          </a:solidFill>
+          <a:ln>
+            <a:noFill/>
+          </a:ln>
+        </p:spPr>
+        <p:style>
+          <a:lnRef idx="1">
+            <a:schemeClr val="accent1"/>
+          </a:lnRef>
+          <a:fillRef idx="3">
+            <a:schemeClr val="accent1"/>
+          </a:fillRef>
+          <a:effectRef idx="2">
+            <a:schemeClr val="accent1"/>
+          </a:effectRef>
+          <a:fontRef idx="minor">
+            <a:schemeClr val="lt1"/>
+          </a:fontRef>
+        </p:style>
+        <p:txBody>
+          <a:bodyPr rtlCol="0" anchor="ctr"/>
+          <a:lstStyle/>
+          <a:p>
+            <a:pPr algn="ctr"/>
+          </a:p>
+        </p:txBody>
+      </p:sp>
+      <p:sp>
+        <p:nvSpPr>
+          <p:cNvPr id="33" name="Rounded Rectangle 32"/>
+          <p:cNvSpPr/>
+          <p:nvPr/>
+        </p:nvSpPr>
+        <p:spPr>
+          <a:xfrm>
+            <a:off x="7135368" y="1828800"/>
+            <a:ext cx="1508760" cy="2148840"/>
+          </a:xfrm>
+          <a:prstGeom prst="roundRect">
+            <a:avLst>
+              <a:gd name="adj" fmla="val 5000"/>
+            </a:avLst>
           </a:prstGeom>
           <a:solidFill>
             <a:srgbClr val="F2F4F7"/>
@@ -6440,14 +5966,637 @@
       </p:sp>
       <p:sp>
         <p:nvSpPr>
-          <p:cNvPr id="29" name="TextBox 28"/>
-          <p:cNvSpPr txBox="1"/>
-          <p:nvPr/>
-        </p:nvSpPr>
-        <p:spPr>
-          <a:xfrm>
-            <a:off x="548640" y="4937760"/>
-            <a:ext cx="2468880" cy="640080"/>
+          <p:cNvPr id="34" name="TextBox 33"/>
+          <p:cNvSpPr txBox="1"/>
+          <p:nvPr/>
+        </p:nvSpPr>
+        <p:spPr>
+          <a:xfrm>
+            <a:off x="7208520" y="1938528"/>
+            <a:ext cx="1362456" cy="256032"/>
+          </a:xfrm>
+          <a:prstGeom prst="rect">
+            <a:avLst/>
+          </a:prstGeom>
+          <a:noFill/>
+        </p:spPr>
+        <p:txBody>
+          <a:bodyPr wrap="square">
+            <a:spAutoFit/>
+          </a:bodyPr>
+          <a:lstStyle/>
+          <a:p>
+            <a:pPr algn="ctr"/>
+            <a:r>
+              <a:rPr sz="1000" b="1">
+                <a:solidFill>
+                  <a:srgbClr val="0C2577"/>
+                </a:solidFill>
+                <a:latin typeface="Arial"/>
+              </a:rPr>
+              <a:t>Wks 5–8</a:t>
+            </a:r>
+          </a:p>
+        </p:txBody>
+      </p:sp>
+      <p:sp>
+        <p:nvSpPr>
+          <p:cNvPr id="35" name="TextBox 34"/>
+          <p:cNvSpPr txBox="1"/>
+          <p:nvPr/>
+        </p:nvSpPr>
+        <p:spPr>
+          <a:xfrm>
+            <a:off x="7208520" y="2212848"/>
+            <a:ext cx="1362456" cy="502920"/>
+          </a:xfrm>
+          <a:prstGeom prst="rect">
+            <a:avLst/>
+          </a:prstGeom>
+          <a:noFill/>
+        </p:spPr>
+        <p:txBody>
+          <a:bodyPr wrap="square">
+            <a:spAutoFit/>
+          </a:bodyPr>
+          <a:lstStyle/>
+          <a:p>
+            <a:pPr algn="ctr"/>
+            <a:r>
+              <a:rPr sz="1100" b="1">
+                <a:solidFill>
+                  <a:srgbClr val="0C2577"/>
+                </a:solidFill>
+                <a:latin typeface="Arial"/>
+              </a:rPr>
+              <a:t>Tune &amp; retest</a:t>
+            </a:r>
+          </a:p>
+        </p:txBody>
+      </p:sp>
+      <p:sp>
+        <p:nvSpPr>
+          <p:cNvPr id="36" name="TextBox 35"/>
+          <p:cNvSpPr txBox="1"/>
+          <p:nvPr/>
+        </p:nvSpPr>
+        <p:spPr>
+          <a:xfrm>
+            <a:off x="7208520" y="2788920"/>
+            <a:ext cx="1362456" cy="1005840"/>
+          </a:xfrm>
+          <a:prstGeom prst="rect">
+            <a:avLst/>
+          </a:prstGeom>
+          <a:noFill/>
+        </p:spPr>
+        <p:txBody>
+          <a:bodyPr wrap="square">
+            <a:spAutoFit/>
+          </a:bodyPr>
+          <a:lstStyle/>
+          <a:p>
+            <a:pPr algn="ctr"/>
+            <a:r>
+              <a:rPr sz="1000" b="0">
+                <a:solidFill>
+                  <a:srgbClr val="5A5A5A"/>
+                </a:solidFill>
+                <a:latin typeface="Arial"/>
+              </a:rPr>
+              <a:t>Fix retrieval / metadata;
+re-run to threshold</a:t>
+            </a:r>
+          </a:p>
+        </p:txBody>
+      </p:sp>
+      <p:sp>
+        <p:nvSpPr>
+          <p:cNvPr id="37" name="Oval 36"/>
+          <p:cNvSpPr/>
+          <p:nvPr/>
+        </p:nvSpPr>
+        <p:spPr>
+          <a:xfrm>
+            <a:off x="9525000" y="1298448"/>
+            <a:ext cx="256032" cy="256032"/>
+          </a:xfrm>
+          <a:prstGeom prst="ellipse">
+            <a:avLst/>
+          </a:prstGeom>
+          <a:solidFill>
+            <a:srgbClr val="0C2577"/>
+          </a:solidFill>
+          <a:ln>
+            <a:noFill/>
+          </a:ln>
+        </p:spPr>
+        <p:style>
+          <a:lnRef idx="1">
+            <a:schemeClr val="accent1"/>
+          </a:lnRef>
+          <a:fillRef idx="3">
+            <a:schemeClr val="accent1"/>
+          </a:fillRef>
+          <a:effectRef idx="2">
+            <a:schemeClr val="accent1"/>
+          </a:effectRef>
+          <a:fontRef idx="minor">
+            <a:schemeClr val="lt1"/>
+          </a:fontRef>
+        </p:style>
+        <p:txBody>
+          <a:bodyPr rtlCol="0" anchor="ctr"/>
+          <a:lstStyle/>
+          <a:p>
+            <a:pPr algn="ctr"/>
+          </a:p>
+        </p:txBody>
+      </p:sp>
+      <p:sp>
+        <p:nvSpPr>
+          <p:cNvPr id="38" name="Rectangle 37"/>
+          <p:cNvSpPr/>
+          <p:nvPr/>
+        </p:nvSpPr>
+        <p:spPr>
+          <a:xfrm>
+            <a:off x="9634727" y="1554480"/>
+            <a:ext cx="31750" cy="228600"/>
+          </a:xfrm>
+          <a:prstGeom prst="rect">
+            <a:avLst/>
+          </a:prstGeom>
+          <a:solidFill>
+            <a:srgbClr val="0C2577"/>
+          </a:solidFill>
+          <a:ln>
+            <a:noFill/>
+          </a:ln>
+        </p:spPr>
+        <p:style>
+          <a:lnRef idx="1">
+            <a:schemeClr val="accent1"/>
+          </a:lnRef>
+          <a:fillRef idx="3">
+            <a:schemeClr val="accent1"/>
+          </a:fillRef>
+          <a:effectRef idx="2">
+            <a:schemeClr val="accent1"/>
+          </a:effectRef>
+          <a:fontRef idx="minor">
+            <a:schemeClr val="lt1"/>
+          </a:fontRef>
+        </p:style>
+        <p:txBody>
+          <a:bodyPr rtlCol="0" anchor="ctr"/>
+          <a:lstStyle/>
+          <a:p>
+            <a:pPr algn="ctr"/>
+          </a:p>
+        </p:txBody>
+      </p:sp>
+      <p:sp>
+        <p:nvSpPr>
+          <p:cNvPr id="39" name="Rounded Rectangle 38"/>
+          <p:cNvSpPr/>
+          <p:nvPr/>
+        </p:nvSpPr>
+        <p:spPr>
+          <a:xfrm>
+            <a:off x="8903208" y="1828800"/>
+            <a:ext cx="1508760" cy="2148840"/>
+          </a:xfrm>
+          <a:prstGeom prst="roundRect">
+            <a:avLst>
+              <a:gd name="adj" fmla="val 5000"/>
+            </a:avLst>
+          </a:prstGeom>
+          <a:solidFill>
+            <a:srgbClr val="F2F4F7"/>
+          </a:solidFill>
+          <a:ln>
+            <a:noFill/>
+          </a:ln>
+        </p:spPr>
+        <p:style>
+          <a:lnRef idx="1">
+            <a:schemeClr val="accent1"/>
+          </a:lnRef>
+          <a:fillRef idx="3">
+            <a:schemeClr val="accent1"/>
+          </a:fillRef>
+          <a:effectRef idx="2">
+            <a:schemeClr val="accent1"/>
+          </a:effectRef>
+          <a:fontRef idx="minor">
+            <a:schemeClr val="lt1"/>
+          </a:fontRef>
+        </p:style>
+        <p:txBody>
+          <a:bodyPr rtlCol="0" anchor="ctr"/>
+          <a:lstStyle/>
+          <a:p>
+            <a:pPr algn="ctr"/>
+          </a:p>
+        </p:txBody>
+      </p:sp>
+      <p:sp>
+        <p:nvSpPr>
+          <p:cNvPr id="40" name="TextBox 39"/>
+          <p:cNvSpPr txBox="1"/>
+          <p:nvPr/>
+        </p:nvSpPr>
+        <p:spPr>
+          <a:xfrm>
+            <a:off x="8976360" y="1938528"/>
+            <a:ext cx="1362456" cy="256032"/>
+          </a:xfrm>
+          <a:prstGeom prst="rect">
+            <a:avLst/>
+          </a:prstGeom>
+          <a:noFill/>
+        </p:spPr>
+        <p:txBody>
+          <a:bodyPr wrap="square">
+            <a:spAutoFit/>
+          </a:bodyPr>
+          <a:lstStyle/>
+          <a:p>
+            <a:pPr algn="ctr"/>
+            <a:r>
+              <a:rPr sz="1000" b="1">
+                <a:solidFill>
+                  <a:srgbClr val="0C2577"/>
+                </a:solidFill>
+                <a:latin typeface="Arial"/>
+              </a:rPr>
+              <a:t>Wk 8–9</a:t>
+            </a:r>
+          </a:p>
+        </p:txBody>
+      </p:sp>
+      <p:sp>
+        <p:nvSpPr>
+          <p:cNvPr id="41" name="TextBox 40"/>
+          <p:cNvSpPr txBox="1"/>
+          <p:nvPr/>
+        </p:nvSpPr>
+        <p:spPr>
+          <a:xfrm>
+            <a:off x="8976360" y="2212848"/>
+            <a:ext cx="1362456" cy="502920"/>
+          </a:xfrm>
+          <a:prstGeom prst="rect">
+            <a:avLst/>
+          </a:prstGeom>
+          <a:noFill/>
+        </p:spPr>
+        <p:txBody>
+          <a:bodyPr wrap="square">
+            <a:spAutoFit/>
+          </a:bodyPr>
+          <a:lstStyle/>
+          <a:p>
+            <a:pPr algn="ctr"/>
+            <a:r>
+              <a:rPr sz="1100" b="1">
+                <a:solidFill>
+                  <a:srgbClr val="0C2577"/>
+                </a:solidFill>
+                <a:latin typeface="Arial"/>
+              </a:rPr>
+              <a:t>Gate go-live</a:t>
+            </a:r>
+          </a:p>
+        </p:txBody>
+      </p:sp>
+      <p:sp>
+        <p:nvSpPr>
+          <p:cNvPr id="42" name="TextBox 41"/>
+          <p:cNvSpPr txBox="1"/>
+          <p:nvPr/>
+        </p:nvSpPr>
+        <p:spPr>
+          <a:xfrm>
+            <a:off x="8976360" y="2788920"/>
+            <a:ext cx="1362456" cy="1005840"/>
+          </a:xfrm>
+          <a:prstGeom prst="rect">
+            <a:avLst/>
+          </a:prstGeom>
+          <a:noFill/>
+        </p:spPr>
+        <p:txBody>
+          <a:bodyPr wrap="square">
+            <a:spAutoFit/>
+          </a:bodyPr>
+          <a:lstStyle/>
+          <a:p>
+            <a:pPr algn="ctr"/>
+            <a:r>
+              <a:rPr sz="1000" b="0">
+                <a:solidFill>
+                  <a:srgbClr val="5A5A5A"/>
+                </a:solidFill>
+                <a:latin typeface="Arial"/>
+              </a:rPr>
+              <a:t>Policy + support +
+quality bar signed</a:t>
+            </a:r>
+          </a:p>
+        </p:txBody>
+      </p:sp>
+      <p:sp>
+        <p:nvSpPr>
+          <p:cNvPr id="43" name="Oval 42"/>
+          <p:cNvSpPr/>
+          <p:nvPr/>
+        </p:nvSpPr>
+        <p:spPr>
+          <a:xfrm>
+            <a:off x="11292840" y="1298448"/>
+            <a:ext cx="256032" cy="256032"/>
+          </a:xfrm>
+          <a:prstGeom prst="ellipse">
+            <a:avLst/>
+          </a:prstGeom>
+          <a:solidFill>
+            <a:srgbClr val="6EBB1F"/>
+          </a:solidFill>
+          <a:ln>
+            <a:noFill/>
+          </a:ln>
+        </p:spPr>
+        <p:style>
+          <a:lnRef idx="1">
+            <a:schemeClr val="accent1"/>
+          </a:lnRef>
+          <a:fillRef idx="3">
+            <a:schemeClr val="accent1"/>
+          </a:fillRef>
+          <a:effectRef idx="2">
+            <a:schemeClr val="accent1"/>
+          </a:effectRef>
+          <a:fontRef idx="minor">
+            <a:schemeClr val="lt1"/>
+          </a:fontRef>
+        </p:style>
+        <p:txBody>
+          <a:bodyPr rtlCol="0" anchor="ctr"/>
+          <a:lstStyle/>
+          <a:p>
+            <a:pPr algn="ctr"/>
+          </a:p>
+        </p:txBody>
+      </p:sp>
+      <p:sp>
+        <p:nvSpPr>
+          <p:cNvPr id="44" name="Rectangle 43"/>
+          <p:cNvSpPr/>
+          <p:nvPr/>
+        </p:nvSpPr>
+        <p:spPr>
+          <a:xfrm>
+            <a:off x="11402567" y="1554480"/>
+            <a:ext cx="31750" cy="228600"/>
+          </a:xfrm>
+          <a:prstGeom prst="rect">
+            <a:avLst/>
+          </a:prstGeom>
+          <a:solidFill>
+            <a:srgbClr val="6EBB1F"/>
+          </a:solidFill>
+          <a:ln>
+            <a:noFill/>
+          </a:ln>
+        </p:spPr>
+        <p:style>
+          <a:lnRef idx="1">
+            <a:schemeClr val="accent1"/>
+          </a:lnRef>
+          <a:fillRef idx="3">
+            <a:schemeClr val="accent1"/>
+          </a:fillRef>
+          <a:effectRef idx="2">
+            <a:schemeClr val="accent1"/>
+          </a:effectRef>
+          <a:fontRef idx="minor">
+            <a:schemeClr val="lt1"/>
+          </a:fontRef>
+        </p:style>
+        <p:txBody>
+          <a:bodyPr rtlCol="0" anchor="ctr"/>
+          <a:lstStyle/>
+          <a:p>
+            <a:pPr algn="ctr"/>
+          </a:p>
+        </p:txBody>
+      </p:sp>
+      <p:sp>
+        <p:nvSpPr>
+          <p:cNvPr id="45" name="Rounded Rectangle 44"/>
+          <p:cNvSpPr/>
+          <p:nvPr/>
+        </p:nvSpPr>
+        <p:spPr>
+          <a:xfrm>
+            <a:off x="10671048" y="1828800"/>
+            <a:ext cx="1508760" cy="2148840"/>
+          </a:xfrm>
+          <a:prstGeom prst="roundRect">
+            <a:avLst>
+              <a:gd name="adj" fmla="val 5000"/>
+            </a:avLst>
+          </a:prstGeom>
+          <a:solidFill>
+            <a:srgbClr val="E8F5E9"/>
+          </a:solidFill>
+          <a:ln>
+            <a:noFill/>
+          </a:ln>
+        </p:spPr>
+        <p:style>
+          <a:lnRef idx="1">
+            <a:schemeClr val="accent1"/>
+          </a:lnRef>
+          <a:fillRef idx="3">
+            <a:schemeClr val="accent1"/>
+          </a:fillRef>
+          <a:effectRef idx="2">
+            <a:schemeClr val="accent1"/>
+          </a:effectRef>
+          <a:fontRef idx="minor">
+            <a:schemeClr val="lt1"/>
+          </a:fontRef>
+        </p:style>
+        <p:txBody>
+          <a:bodyPr rtlCol="0" anchor="ctr"/>
+          <a:lstStyle/>
+          <a:p>
+            <a:pPr algn="ctr"/>
+          </a:p>
+        </p:txBody>
+      </p:sp>
+      <p:sp>
+        <p:nvSpPr>
+          <p:cNvPr id="46" name="TextBox 45"/>
+          <p:cNvSpPr txBox="1"/>
+          <p:nvPr/>
+        </p:nvSpPr>
+        <p:spPr>
+          <a:xfrm>
+            <a:off x="10744200" y="1938528"/>
+            <a:ext cx="1362456" cy="256032"/>
+          </a:xfrm>
+          <a:prstGeom prst="rect">
+            <a:avLst/>
+          </a:prstGeom>
+          <a:noFill/>
+        </p:spPr>
+        <p:txBody>
+          <a:bodyPr wrap="square">
+            <a:spAutoFit/>
+          </a:bodyPr>
+          <a:lstStyle/>
+          <a:p>
+            <a:pPr algn="ctr"/>
+            <a:r>
+              <a:rPr sz="1000" b="1">
+                <a:solidFill>
+                  <a:srgbClr val="6EBB1F"/>
+                </a:solidFill>
+                <a:latin typeface="Arial"/>
+              </a:rPr>
+              <a:t>Ongoing</a:t>
+            </a:r>
+          </a:p>
+        </p:txBody>
+      </p:sp>
+      <p:sp>
+        <p:nvSpPr>
+          <p:cNvPr id="47" name="TextBox 46"/>
+          <p:cNvSpPr txBox="1"/>
+          <p:nvPr/>
+        </p:nvSpPr>
+        <p:spPr>
+          <a:xfrm>
+            <a:off x="10744200" y="2212848"/>
+            <a:ext cx="1362456" cy="502920"/>
+          </a:xfrm>
+          <a:prstGeom prst="rect">
+            <a:avLst/>
+          </a:prstGeom>
+          <a:noFill/>
+        </p:spPr>
+        <p:txBody>
+          <a:bodyPr wrap="square">
+            <a:spAutoFit/>
+          </a:bodyPr>
+          <a:lstStyle/>
+          <a:p>
+            <a:pPr algn="ctr"/>
+            <a:r>
+              <a:rPr sz="1100" b="1">
+                <a:solidFill>
+                  <a:srgbClr val="0C2577"/>
+                </a:solidFill>
+                <a:latin typeface="Arial"/>
+              </a:rPr>
+              <a:t>Regression ops</a:t>
+            </a:r>
+          </a:p>
+        </p:txBody>
+      </p:sp>
+      <p:sp>
+        <p:nvSpPr>
+          <p:cNvPr id="48" name="TextBox 47"/>
+          <p:cNvSpPr txBox="1"/>
+          <p:nvPr/>
+        </p:nvSpPr>
+        <p:spPr>
+          <a:xfrm>
+            <a:off x="10744200" y="2788920"/>
+            <a:ext cx="1362456" cy="1005840"/>
+          </a:xfrm>
+          <a:prstGeom prst="rect">
+            <a:avLst/>
+          </a:prstGeom>
+          <a:noFill/>
+        </p:spPr>
+        <p:txBody>
+          <a:bodyPr wrap="square">
+            <a:spAutoFit/>
+          </a:bodyPr>
+          <a:lstStyle/>
+          <a:p>
+            <a:pPr algn="ctr"/>
+            <a:r>
+              <a:rPr sz="1000" b="0">
+                <a:solidFill>
+                  <a:srgbClr val="5A5A5A"/>
+                </a:solidFill>
+                <a:latin typeface="Arial"/>
+              </a:rPr>
+              <a:t>Re-test on sync /
+model change; steward</a:t>
+            </a:r>
+          </a:p>
+        </p:txBody>
+      </p:sp>
+      <p:sp>
+        <p:nvSpPr>
+          <p:cNvPr id="49" name="Rectangle 48"/>
+          <p:cNvSpPr/>
+          <p:nvPr/>
+        </p:nvSpPr>
+        <p:spPr>
+          <a:xfrm>
+            <a:off x="457200" y="4160520"/>
+            <a:ext cx="11247120" cy="914400"/>
+          </a:xfrm>
+          <a:prstGeom prst="rect">
+            <a:avLst/>
+          </a:prstGeom>
+          <a:solidFill>
+            <a:srgbClr val="FFF3E0"/>
+          </a:solidFill>
+          <a:ln>
+            <a:noFill/>
+          </a:ln>
+        </p:spPr>
+        <p:style>
+          <a:lnRef idx="1">
+            <a:schemeClr val="accent1"/>
+          </a:lnRef>
+          <a:fillRef idx="3">
+            <a:schemeClr val="accent1"/>
+          </a:fillRef>
+          <a:effectRef idx="2">
+            <a:schemeClr val="accent1"/>
+          </a:effectRef>
+          <a:fontRef idx="minor">
+            <a:schemeClr val="lt1"/>
+          </a:fontRef>
+        </p:style>
+        <p:txBody>
+          <a:bodyPr rtlCol="0" anchor="ctr"/>
+          <a:lstStyle/>
+          <a:p>
+            <a:pPr algn="ctr"/>
+          </a:p>
+        </p:txBody>
+      </p:sp>
+      <p:sp>
+        <p:nvSpPr>
+          <p:cNvPr id="50" name="TextBox 49"/>
+          <p:cNvSpPr txBox="1"/>
+          <p:nvPr/>
+        </p:nvSpPr>
+        <p:spPr>
+          <a:xfrm>
+            <a:off x="640080" y="4251960"/>
+            <a:ext cx="2926080" cy="320040"/>
           </a:xfrm>
           <a:prstGeom prst="rect">
             <a:avLst/>
@@ -6464,25 +6613,60 @@
             <a:r>
               <a:rPr sz="1200" b="1">
                 <a:solidFill>
+                  <a:srgbClr val="FF7200"/>
+                </a:solidFill>
+                <a:latin typeface="Arial"/>
+              </a:rPr>
+              <a:t>YOU ARE HERE</a:t>
+            </a:r>
+          </a:p>
+        </p:txBody>
+      </p:sp>
+      <p:sp>
+        <p:nvSpPr>
+          <p:cNvPr id="51" name="TextBox 50"/>
+          <p:cNvSpPr txBox="1"/>
+          <p:nvPr/>
+        </p:nvSpPr>
+        <p:spPr>
+          <a:xfrm>
+            <a:off x="640080" y="4572000"/>
+            <a:ext cx="10789920" cy="411480"/>
+          </a:xfrm>
+          <a:prstGeom prst="rect">
+            <a:avLst/>
+          </a:prstGeom>
+          <a:noFill/>
+        </p:spPr>
+        <p:txBody>
+          <a:bodyPr wrap="square">
+            <a:spAutoFit/>
+          </a:bodyPr>
+          <a:lstStyle/>
+          <a:p>
+            <a:pPr algn="l"/>
+            <a:r>
+              <a:rPr sz="1300" b="0">
+                <a:solidFill>
                   <a:srgbClr val="000000"/>
                 </a:solidFill>
                 <a:latin typeface="Arial"/>
               </a:rPr>
-              <a:t>MCP / API program owner</a:t>
-            </a:r>
-          </a:p>
-        </p:txBody>
-      </p:sp>
-      <p:sp>
-        <p:nvSpPr>
-          <p:cNvPr id="30" name="TextBox 29"/>
-          <p:cNvSpPr txBox="1"/>
-          <p:nvPr/>
-        </p:nvSpPr>
-        <p:spPr>
-          <a:xfrm>
-            <a:off x="3108960" y="4937760"/>
-            <a:ext cx="1645920" cy="640080"/>
+              <a:t>Upload complete. Next critical path = design golden questions + truth answers with SME panel, then score Ask Docs before any broad access.</a:t>
+            </a:r>
+          </a:p>
+        </p:txBody>
+      </p:sp>
+      <p:sp>
+        <p:nvSpPr>
+          <p:cNvPr id="52" name="TextBox 51"/>
+          <p:cNvSpPr txBox="1"/>
+          <p:nvPr/>
+        </p:nvSpPr>
+        <p:spPr>
+          <a:xfrm>
+            <a:off x="457200" y="5303520"/>
+            <a:ext cx="11247120" cy="822960"/>
           </a:xfrm>
           <a:prstGeom prst="rect">
             <a:avLst/>
@@ -6499,88 +6683,18 @@
             <a:r>
               <a:rPr sz="1200" b="0">
                 <a:solidFill>
-                  <a:srgbClr val="000000"/>
-                </a:solidFill>
-                <a:latin typeface="Arial"/>
-              </a:rPr>
-              <a:t>Standing</a:t>
-            </a:r>
-          </a:p>
-        </p:txBody>
-      </p:sp>
-      <p:sp>
-        <p:nvSpPr>
-          <p:cNvPr id="31" name="TextBox 30"/>
-          <p:cNvSpPr txBox="1"/>
-          <p:nvPr/>
-        </p:nvSpPr>
-        <p:spPr>
-          <a:xfrm>
-            <a:off x="4846320" y="4937760"/>
-            <a:ext cx="2377440" cy="640080"/>
-          </a:xfrm>
-          <a:prstGeom prst="rect">
-            <a:avLst/>
-          </a:prstGeom>
-          <a:noFill/>
-        </p:spPr>
-        <p:txBody>
-          <a:bodyPr wrap="square">
-            <a:spAutoFit/>
-          </a:bodyPr>
-          <a:lstStyle/>
-          <a:p>
-            <a:pPr algn="l"/>
-            <a:r>
-              <a:rPr sz="1200" b="0">
-                <a:solidFill>
-                  <a:srgbClr val="000000"/>
-                </a:solidFill>
-                <a:latin typeface="Arial"/>
-              </a:rPr>
-              <a:t>0.25–0.4 FTE</a:t>
-            </a:r>
-          </a:p>
-        </p:txBody>
-      </p:sp>
-      <p:sp>
-        <p:nvSpPr>
-          <p:cNvPr id="32" name="TextBox 31"/>
-          <p:cNvSpPr txBox="1"/>
-          <p:nvPr/>
-        </p:nvSpPr>
-        <p:spPr>
-          <a:xfrm>
-            <a:off x="7315200" y="4937760"/>
-            <a:ext cx="4206240" cy="640080"/>
-          </a:xfrm>
-          <a:prstGeom prst="rect">
-            <a:avLst/>
-          </a:prstGeom>
-          <a:noFill/>
-        </p:spPr>
-        <p:txBody>
-          <a:bodyPr wrap="square">
-            <a:spAutoFit/>
-          </a:bodyPr>
-          <a:lstStyle/>
-          <a:p>
-            <a:pPr algn="l"/>
-            <a:r>
-              <a:rPr sz="1200" b="0">
-                <a:solidFill>
-                  <a:srgbClr val="000000"/>
-                </a:solidFill>
-                <a:latin typeface="Arial"/>
-              </a:rPr>
-              <a:t>Vendor enablement, client onboarding, guardrails, usage reporting</a:t>
-            </a:r>
-          </a:p>
-        </p:txBody>
-      </p:sp>
-      <p:sp>
-        <p:nvSpPr>
-          <p:cNvPr id="33" name="TextBox 32"/>
+                  <a:srgbClr val="5A5A5A"/>
+                </a:solidFill>
+                <a:latin typeface="Arial"/>
+              </a:rPr>
+              <a:t>Parallel track (not on this timeline): MCP + API vendor enablement and security review can proceed immediately to serve agent demand — domain go-live is not a blocker.</a:t>
+            </a:r>
+          </a:p>
+        </p:txBody>
+      </p:sp>
+      <p:sp>
+        <p:nvSpPr>
+          <p:cNvPr id="53" name="TextBox 52"/>
           <p:cNvSpPr txBox="1"/>
           <p:nvPr/>
         </p:nvSpPr>
@@ -6615,7 +6729,7 @@
       </p:sp>
       <p:sp>
         <p:nvSpPr>
-          <p:cNvPr id="34" name="TextBox 33"/>
+          <p:cNvPr id="54" name="TextBox 53"/>
           <p:cNvSpPr txBox="1"/>
           <p:nvPr/>
         </p:nvSpPr>
@@ -6776,33 +6890,35 @@
           <a:p>
             <a:pPr algn="l"/>
             <a:r>
-              <a:rPr sz="2600" b="1">
+              <a:rPr sz="2400" b="1">
                 <a:solidFill>
                   <a:srgbClr val="0C2577"/>
                 </a:solidFill>
                 <a:latin typeface="Arial"/>
               </a:rPr>
-              <a:t>Knowledge Steward — proposed accountability</a:t>
-            </a:r>
-          </a:p>
-        </p:txBody>
-      </p:sp>
-      <p:sp>
-        <p:nvSpPr>
-          <p:cNvPr id="5" name="Oval 4"/>
+              <a:t>Strategic investment: what the knowledge domain needs</a:t>
+            </a:r>
+          </a:p>
+        </p:txBody>
+      </p:sp>
+      <p:sp>
+        <p:nvSpPr>
+          <p:cNvPr id="5" name="Rounded Rectangle 4"/>
           <p:cNvSpPr/>
           <p:nvPr/>
         </p:nvSpPr>
         <p:spPr>
           <a:xfrm>
-            <a:off x="640080" y="1051560"/>
-            <a:ext cx="411480" cy="411480"/>
-          </a:xfrm>
-          <a:prstGeom prst="ellipse">
-            <a:avLst/>
+            <a:off x="457200" y="1005840"/>
+            <a:ext cx="2788920" cy="2377440"/>
+          </a:xfrm>
+          <a:prstGeom prst="roundRect">
+            <a:avLst>
+              <a:gd name="adj" fmla="val 5000"/>
+            </a:avLst>
           </a:prstGeom>
           <a:solidFill>
-            <a:srgbClr val="067AB4"/>
+            <a:srgbClr val="F2F4F7"/>
           </a:solidFill>
           <a:ln>
             <a:noFill/>
@@ -6838,29 +6954,29 @@
         </p:nvSpPr>
         <p:spPr>
           <a:xfrm>
-            <a:off x="713232" y="1097280"/>
-            <a:ext cx="320040" cy="320040"/>
-          </a:xfrm>
-          <a:prstGeom prst="rect">
-            <a:avLst/>
-          </a:prstGeom>
-          <a:noFill/>
-        </p:spPr>
-        <p:txBody>
-          <a:bodyPr wrap="square">
-            <a:spAutoFit/>
-          </a:bodyPr>
-          <a:lstStyle/>
-          <a:p>
-            <a:pPr algn="ctr"/>
+            <a:off x="594360" y="1188720"/>
+            <a:ext cx="2514600" cy="502920"/>
+          </a:xfrm>
+          <a:prstGeom prst="rect">
+            <a:avLst/>
+          </a:prstGeom>
+          <a:noFill/>
+        </p:spPr>
+        <p:txBody>
+          <a:bodyPr wrap="square">
+            <a:spAutoFit/>
+          </a:bodyPr>
+          <a:lstStyle/>
+          <a:p>
+            <a:pPr algn="l"/>
             <a:r>
               <a:rPr sz="1400" b="1">
                 <a:solidFill>
-                  <a:srgbClr val="FFFFFF"/>
-                </a:solidFill>
-                <a:latin typeface="Arial"/>
-              </a:rPr>
-              <a:t>1</a:t>
+                  <a:srgbClr val="0C2577"/>
+                </a:solidFill>
+                <a:latin typeface="Arial"/>
+              </a:rPr>
+              <a:t>Golden Q&amp;A pack</a:t>
             </a:r>
           </a:p>
         </p:txBody>
@@ -6873,8 +6989,8 @@
         </p:nvSpPr>
         <p:spPr>
           <a:xfrm>
-            <a:off x="1280160" y="1097280"/>
-            <a:ext cx="10058400" cy="548640"/>
+            <a:off x="594360" y="1783080"/>
+            <a:ext cx="2514600" cy="1371600"/>
           </a:xfrm>
           <a:prstGeom prst="rect">
             <a:avLst/>
@@ -6889,33 +7005,35 @@
           <a:p>
             <a:pPr algn="l"/>
             <a:r>
-              <a:rPr sz="1600" b="0">
-                <a:solidFill>
-                  <a:srgbClr val="000000"/>
-                </a:solidFill>
-                <a:latin typeface="Arial"/>
-              </a:rPr>
-              <a:t>Own the golden-question bank and truth-answer currency with SME panel.</a:t>
-            </a:r>
-          </a:p>
-        </p:txBody>
-      </p:sp>
-      <p:sp>
-        <p:nvSpPr>
-          <p:cNvPr id="8" name="Oval 7"/>
+              <a:rPr sz="1200" b="0">
+                <a:solidFill>
+                  <a:srgbClr val="5A5A5A"/>
+                </a:solidFill>
+                <a:latin typeface="Arial"/>
+              </a:rPr>
+              <a:t>Question bank + truth answers owned by insights SMEs; versioned like a product artifact.</a:t>
+            </a:r>
+          </a:p>
+        </p:txBody>
+      </p:sp>
+      <p:sp>
+        <p:nvSpPr>
+          <p:cNvPr id="8" name="Rounded Rectangle 7"/>
           <p:cNvSpPr/>
           <p:nvPr/>
         </p:nvSpPr>
         <p:spPr>
           <a:xfrm>
-            <a:off x="640080" y="1828800"/>
-            <a:ext cx="411480" cy="411480"/>
-          </a:xfrm>
-          <a:prstGeom prst="ellipse">
-            <a:avLst/>
+            <a:off x="3383280" y="1005840"/>
+            <a:ext cx="2788920" cy="2377440"/>
+          </a:xfrm>
+          <a:prstGeom prst="roundRect">
+            <a:avLst>
+              <a:gd name="adj" fmla="val 5000"/>
+            </a:avLst>
           </a:prstGeom>
           <a:solidFill>
-            <a:srgbClr val="067AB4"/>
+            <a:srgbClr val="F2F4F7"/>
           </a:solidFill>
           <a:ln>
             <a:noFill/>
@@ -6951,29 +7069,29 @@
         </p:nvSpPr>
         <p:spPr>
           <a:xfrm>
-            <a:off x="713232" y="1874520"/>
-            <a:ext cx="320040" cy="320040"/>
-          </a:xfrm>
-          <a:prstGeom prst="rect">
-            <a:avLst/>
-          </a:prstGeom>
-          <a:noFill/>
-        </p:spPr>
-        <p:txBody>
-          <a:bodyPr wrap="square">
-            <a:spAutoFit/>
-          </a:bodyPr>
-          <a:lstStyle/>
-          <a:p>
-            <a:pPr algn="ctr"/>
+            <a:off x="3520440" y="1188720"/>
+            <a:ext cx="2514600" cy="502920"/>
+          </a:xfrm>
+          <a:prstGeom prst="rect">
+            <a:avLst/>
+          </a:prstGeom>
+          <a:noFill/>
+        </p:spPr>
+        <p:txBody>
+          <a:bodyPr wrap="square">
+            <a:spAutoFit/>
+          </a:bodyPr>
+          <a:lstStyle/>
+          <a:p>
+            <a:pPr algn="l"/>
             <a:r>
               <a:rPr sz="1400" b="1">
                 <a:solidFill>
-                  <a:srgbClr val="FFFFFF"/>
-                </a:solidFill>
-                <a:latin typeface="Arial"/>
-              </a:rPr>
-              <a:t>2</a:t>
+                  <a:srgbClr val="0C2577"/>
+                </a:solidFill>
+                <a:latin typeface="Arial"/>
+              </a:rPr>
+              <a:t>Governance &amp; access</a:t>
             </a:r>
           </a:p>
         </p:txBody>
@@ -6986,8 +7104,8 @@
         </p:nvSpPr>
         <p:spPr>
           <a:xfrm>
-            <a:off x="1280160" y="1874520"/>
-            <a:ext cx="10058400" cy="548640"/>
+            <a:off x="3520440" y="1783080"/>
+            <a:ext cx="2514600" cy="1371600"/>
           </a:xfrm>
           <a:prstGeom prst="rect">
             <a:avLst/>
@@ -7002,33 +7120,35 @@
           <a:p>
             <a:pPr algn="l"/>
             <a:r>
-              <a:rPr sz="1600" b="0">
-                <a:solidFill>
-                  <a:srgbClr val="000000"/>
-                </a:solidFill>
-                <a:latin typeface="Arial"/>
-              </a:rPr>
-              <a:t>Approve / deny domain access requests against CMO-endorsed policy.</a:t>
-            </a:r>
-          </a:p>
-        </p:txBody>
-      </p:sp>
-      <p:sp>
-        <p:nvSpPr>
-          <p:cNvPr id="11" name="Oval 10"/>
+              <a:rPr sz="1200" b="0">
+                <a:solidFill>
+                  <a:srgbClr val="5A5A5A"/>
+                </a:solidFill>
+                <a:latin typeface="Arial"/>
+              </a:rPr>
+              <a:t>Who may query, who may publish, DLP/classification, audit of Ask AT&amp;T usage.</a:t>
+            </a:r>
+          </a:p>
+        </p:txBody>
+      </p:sp>
+      <p:sp>
+        <p:nvSpPr>
+          <p:cNvPr id="11" name="Rounded Rectangle 10"/>
           <p:cNvSpPr/>
           <p:nvPr/>
         </p:nvSpPr>
         <p:spPr>
           <a:xfrm>
-            <a:off x="640080" y="2606039"/>
-            <a:ext cx="411480" cy="411480"/>
-          </a:xfrm>
-          <a:prstGeom prst="ellipse">
-            <a:avLst/>
+            <a:off x="6309360" y="1005840"/>
+            <a:ext cx="2788920" cy="2377440"/>
+          </a:xfrm>
+          <a:prstGeom prst="roundRect">
+            <a:avLst>
+              <a:gd name="adj" fmla="val 5000"/>
+            </a:avLst>
           </a:prstGeom>
           <a:solidFill>
-            <a:srgbClr val="067AB4"/>
+            <a:srgbClr val="F2F4F7"/>
           </a:solidFill>
           <a:ln>
             <a:noFill/>
@@ -7064,29 +7184,29 @@
         </p:nvSpPr>
         <p:spPr>
           <a:xfrm>
-            <a:off x="713232" y="2651759"/>
-            <a:ext cx="320040" cy="320040"/>
-          </a:xfrm>
-          <a:prstGeom prst="rect">
-            <a:avLst/>
-          </a:prstGeom>
-          <a:noFill/>
-        </p:spPr>
-        <p:txBody>
-          <a:bodyPr wrap="square">
-            <a:spAutoFit/>
-          </a:bodyPr>
-          <a:lstStyle/>
-          <a:p>
-            <a:pPr algn="ctr"/>
+            <a:off x="6446520" y="1188720"/>
+            <a:ext cx="2514600" cy="502920"/>
+          </a:xfrm>
+          <a:prstGeom prst="rect">
+            <a:avLst/>
+          </a:prstGeom>
+          <a:noFill/>
+        </p:spPr>
+        <p:txBody>
+          <a:bodyPr wrap="square">
+            <a:spAutoFit/>
+          </a:bodyPr>
+          <a:lstStyle/>
+          <a:p>
+            <a:pPr algn="l"/>
             <a:r>
               <a:rPr sz="1400" b="1">
                 <a:solidFill>
-                  <a:srgbClr val="FFFFFF"/>
-                </a:solidFill>
-                <a:latin typeface="Arial"/>
-              </a:rPr>
-              <a:t>3</a:t>
+                  <a:srgbClr val="0C2577"/>
+                </a:solidFill>
+                <a:latin typeface="Arial"/>
+              </a:rPr>
+              <a:t>Knowledge steward role</a:t>
             </a:r>
           </a:p>
         </p:txBody>
@@ -7099,8 +7219,8 @@
         </p:nvSpPr>
         <p:spPr>
           <a:xfrm>
-            <a:off x="1280160" y="2651759"/>
-            <a:ext cx="10058400" cy="548640"/>
+            <a:off x="6446520" y="1783080"/>
+            <a:ext cx="2514600" cy="1371600"/>
           </a:xfrm>
           <a:prstGeom prst="rect">
             <a:avLst/>
@@ -7115,33 +7235,35 @@
           <a:p>
             <a:pPr algn="l"/>
             <a:r>
-              <a:rPr sz="1600" b="0">
-                <a:solidFill>
-                  <a:srgbClr val="000000"/>
-                </a:solidFill>
-                <a:latin typeface="Arial"/>
-              </a:rPr>
-              <a:t>Monitor answer quality metrics and escalate wrong-answer incidents.</a:t>
-            </a:r>
-          </a:p>
-        </p:txBody>
-      </p:sp>
-      <p:sp>
-        <p:nvSpPr>
-          <p:cNvPr id="14" name="Oval 13"/>
+              <a:rPr sz="1200" b="0">
+                <a:solidFill>
+                  <a:srgbClr val="5A5A5A"/>
+                </a:solidFill>
+                <a:latin typeface="Arial"/>
+              </a:rPr>
+              <a:t>Named owner for corpus health, sync exceptions, answer quality, and escalation.</a:t>
+            </a:r>
+          </a:p>
+        </p:txBody>
+      </p:sp>
+      <p:sp>
+        <p:nvSpPr>
+          <p:cNvPr id="14" name="Rounded Rectangle 13"/>
           <p:cNvSpPr/>
           <p:nvPr/>
         </p:nvSpPr>
         <p:spPr>
           <a:xfrm>
-            <a:off x="640080" y="3383279"/>
-            <a:ext cx="411480" cy="411480"/>
-          </a:xfrm>
-          <a:prstGeom prst="ellipse">
-            <a:avLst/>
+            <a:off x="9235440" y="1005840"/>
+            <a:ext cx="2788920" cy="2377440"/>
+          </a:xfrm>
+          <a:prstGeom prst="roundRect">
+            <a:avLst>
+              <a:gd name="adj" fmla="val 5000"/>
+            </a:avLst>
           </a:prstGeom>
           <a:solidFill>
-            <a:srgbClr val="067AB4"/>
+            <a:srgbClr val="F2F4F7"/>
           </a:solidFill>
           <a:ln>
             <a:noFill/>
@@ -7177,29 +7299,29 @@
         </p:nvSpPr>
         <p:spPr>
           <a:xfrm>
-            <a:off x="713232" y="3428999"/>
-            <a:ext cx="320040" cy="320040"/>
-          </a:xfrm>
-          <a:prstGeom prst="rect">
-            <a:avLst/>
-          </a:prstGeom>
-          <a:noFill/>
-        </p:spPr>
-        <p:txBody>
-          <a:bodyPr wrap="square">
-            <a:spAutoFit/>
-          </a:bodyPr>
-          <a:lstStyle/>
-          <a:p>
-            <a:pPr algn="ctr"/>
+            <a:off x="9372600" y="1188720"/>
+            <a:ext cx="2514600" cy="502920"/>
+          </a:xfrm>
+          <a:prstGeom prst="rect">
+            <a:avLst/>
+          </a:prstGeom>
+          <a:noFill/>
+        </p:spPr>
+        <p:txBody>
+          <a:bodyPr wrap="square">
+            <a:spAutoFit/>
+          </a:bodyPr>
+          <a:lstStyle/>
+          <a:p>
+            <a:pPr algn="l"/>
             <a:r>
               <a:rPr sz="1400" b="1">
                 <a:solidFill>
-                  <a:srgbClr val="FFFFFF"/>
-                </a:solidFill>
-                <a:latin typeface="Arial"/>
-              </a:rPr>
-              <a:t>4</a:t>
+                  <a:srgbClr val="0C2577"/>
+                </a:solidFill>
+                <a:latin typeface="Arial"/>
+              </a:rPr>
+              <a:t>Sync &amp; freshness</a:t>
             </a:r>
           </a:p>
         </p:txBody>
@@ -7212,8 +7334,8 @@
         </p:nvSpPr>
         <p:spPr>
           <a:xfrm>
-            <a:off x="1280160" y="3428999"/>
-            <a:ext cx="10058400" cy="548640"/>
+            <a:off x="9372600" y="1783080"/>
+            <a:ext cx="2514600" cy="1371600"/>
           </a:xfrm>
           <a:prstGeom prst="rect">
             <a:avLst/>
@@ -7228,33 +7350,35 @@
           <a:p>
             <a:pPr algn="l"/>
             <a:r>
-              <a:rPr sz="1600" b="0">
-                <a:solidFill>
-                  <a:srgbClr val="000000"/>
-                </a:solidFill>
-                <a:latin typeface="Arial"/>
-              </a:rPr>
-              <a:t>Coordinate Insightful → Ask Docs sync issues and metadata gaps.</a:t>
-            </a:r>
-          </a:p>
-        </p:txBody>
-      </p:sp>
-      <p:sp>
-        <p:nvSpPr>
-          <p:cNvPr id="17" name="Oval 16"/>
+              <a:rPr sz="1200" b="0">
+                <a:solidFill>
+                  <a:srgbClr val="5A5A5A"/>
+                </a:solidFill>
+                <a:latin typeface="Arial"/>
+              </a:rPr>
+              <a:t>Cadence from Insightful → domain copy; metadata parity; stale-content playbook.</a:t>
+            </a:r>
+          </a:p>
+        </p:txBody>
+      </p:sp>
+      <p:sp>
+        <p:nvSpPr>
+          <p:cNvPr id="17" name="Rounded Rectangle 16"/>
           <p:cNvSpPr/>
           <p:nvPr/>
         </p:nvSpPr>
         <p:spPr>
           <a:xfrm>
-            <a:off x="640080" y="4160520"/>
-            <a:ext cx="411480" cy="411480"/>
-          </a:xfrm>
-          <a:prstGeom prst="ellipse">
-            <a:avLst/>
+            <a:off x="457200" y="3611880"/>
+            <a:ext cx="2788920" cy="2377440"/>
+          </a:xfrm>
+          <a:prstGeom prst="roundRect">
+            <a:avLst>
+              <a:gd name="adj" fmla="val 5000"/>
+            </a:avLst>
           </a:prstGeom>
           <a:solidFill>
-            <a:srgbClr val="067AB4"/>
+            <a:srgbClr val="F2F4F7"/>
           </a:solidFill>
           <a:ln>
             <a:noFill/>
@@ -7290,29 +7414,29 @@
         </p:nvSpPr>
         <p:spPr>
           <a:xfrm>
-            <a:off x="713232" y="4206240"/>
-            <a:ext cx="320040" cy="320040"/>
-          </a:xfrm>
-          <a:prstGeom prst="rect">
-            <a:avLst/>
-          </a:prstGeom>
-          <a:noFill/>
-        </p:spPr>
-        <p:txBody>
-          <a:bodyPr wrap="square">
-            <a:spAutoFit/>
-          </a:bodyPr>
-          <a:lstStyle/>
-          <a:p>
-            <a:pPr algn="ctr"/>
+            <a:off x="594360" y="3794760"/>
+            <a:ext cx="2514600" cy="502920"/>
+          </a:xfrm>
+          <a:prstGeom prst="rect">
+            <a:avLst/>
+          </a:prstGeom>
+          <a:noFill/>
+        </p:spPr>
+        <p:txBody>
+          <a:bodyPr wrap="square">
+            <a:spAutoFit/>
+          </a:bodyPr>
+          <a:lstStyle/>
+          <a:p>
+            <a:pPr algn="l"/>
             <a:r>
               <a:rPr sz="1400" b="1">
                 <a:solidFill>
-                  <a:srgbClr val="FFFFFF"/>
-                </a:solidFill>
-                <a:latin typeface="Arial"/>
-              </a:rPr>
-              <a:t>5</a:t>
+                  <a:srgbClr val="0C2577"/>
+                </a:solidFill>
+                <a:latin typeface="Arial"/>
+              </a:rPr>
+              <a:t>Testing &amp; release</a:t>
             </a:r>
           </a:p>
         </p:txBody>
@@ -7325,8 +7449,8 @@
         </p:nvSpPr>
         <p:spPr>
           <a:xfrm>
-            <a:off x="1280160" y="4206240"/>
-            <a:ext cx="10058400" cy="548640"/>
+            <a:off x="594360" y="4389120"/>
+            <a:ext cx="2514600" cy="1371600"/>
           </a:xfrm>
           <a:prstGeom prst="rect">
             <a:avLst/>
@@ -7341,33 +7465,35 @@
           <a:p>
             <a:pPr algn="l"/>
             <a:r>
-              <a:rPr sz="1600" b="0">
-                <a:solidFill>
-                  <a:srgbClr val="000000"/>
-                </a:solidFill>
-                <a:latin typeface="Arial"/>
-              </a:rPr>
-              <a:t>Partner with MCP/API owner so agent experiences cite the same sources of truth.</a:t>
-            </a:r>
-          </a:p>
-        </p:txBody>
-      </p:sp>
-      <p:sp>
-        <p:nvSpPr>
-          <p:cNvPr id="20" name="Oval 19"/>
+              <a:rPr sz="1200" b="0">
+                <a:solidFill>
+                  <a:srgbClr val="5A5A5A"/>
+                </a:solidFill>
+                <a:latin typeface="Arial"/>
+              </a:rPr>
+              <a:t>Pre-release golden-set scorecard; change management when models or chunking change.</a:t>
+            </a:r>
+          </a:p>
+        </p:txBody>
+      </p:sp>
+      <p:sp>
+        <p:nvSpPr>
+          <p:cNvPr id="20" name="Rounded Rectangle 19"/>
           <p:cNvSpPr/>
           <p:nvPr/>
         </p:nvSpPr>
         <p:spPr>
           <a:xfrm>
-            <a:off x="640080" y="4937760"/>
-            <a:ext cx="411480" cy="411480"/>
-          </a:xfrm>
-          <a:prstGeom prst="ellipse">
-            <a:avLst/>
+            <a:off x="3383280" y="3611880"/>
+            <a:ext cx="2788920" cy="2377440"/>
+          </a:xfrm>
+          <a:prstGeom prst="roundRect">
+            <a:avLst>
+              <a:gd name="adj" fmla="val 5000"/>
+            </a:avLst>
           </a:prstGeom>
           <a:solidFill>
-            <a:srgbClr val="067AB4"/>
+            <a:srgbClr val="F2F4F7"/>
           </a:solidFill>
           <a:ln>
             <a:noFill/>
@@ -7403,43 +7529,158 @@
         </p:nvSpPr>
         <p:spPr>
           <a:xfrm>
-            <a:off x="713232" y="4983480"/>
-            <a:ext cx="320040" cy="320040"/>
-          </a:xfrm>
-          <a:prstGeom prst="rect">
-            <a:avLst/>
-          </a:prstGeom>
-          <a:noFill/>
-        </p:spPr>
-        <p:txBody>
-          <a:bodyPr wrap="square">
-            <a:spAutoFit/>
-          </a:bodyPr>
+            <a:off x="3520440" y="3794760"/>
+            <a:ext cx="2514600" cy="502920"/>
+          </a:xfrm>
+          <a:prstGeom prst="rect">
+            <a:avLst/>
+          </a:prstGeom>
+          <a:noFill/>
+        </p:spPr>
+        <p:txBody>
+          <a:bodyPr wrap="square">
+            <a:spAutoFit/>
+          </a:bodyPr>
+          <a:lstStyle/>
+          <a:p>
+            <a:pPr algn="l"/>
+            <a:r>
+              <a:rPr sz="1400" b="1">
+                <a:solidFill>
+                  <a:srgbClr val="0C2577"/>
+                </a:solidFill>
+                <a:latin typeface="Arial"/>
+              </a:rPr>
+              <a:t>Ongoing support</a:t>
+            </a:r>
+          </a:p>
+        </p:txBody>
+      </p:sp>
+      <p:sp>
+        <p:nvSpPr>
+          <p:cNvPr id="22" name="TextBox 21"/>
+          <p:cNvSpPr txBox="1"/>
+          <p:nvPr/>
+        </p:nvSpPr>
+        <p:spPr>
+          <a:xfrm>
+            <a:off x="3520440" y="4389120"/>
+            <a:ext cx="2514600" cy="1371600"/>
+          </a:xfrm>
+          <a:prstGeom prst="rect">
+            <a:avLst/>
+          </a:prstGeom>
+          <a:noFill/>
+        </p:spPr>
+        <p:txBody>
+          <a:bodyPr wrap="square">
+            <a:spAutoFit/>
+          </a:bodyPr>
+          <a:lstStyle/>
+          <a:p>
+            <a:pPr algn="l"/>
+            <a:r>
+              <a:rPr sz="1200" b="0">
+                <a:solidFill>
+                  <a:srgbClr val="5A5A5A"/>
+                </a:solidFill>
+                <a:latin typeface="Arial"/>
+              </a:rPr>
+              <a:t>Tier-1 user help, steward office hours, feedback loop into collections and tagging.</a:t>
+            </a:r>
+          </a:p>
+        </p:txBody>
+      </p:sp>
+      <p:sp>
+        <p:nvSpPr>
+          <p:cNvPr id="23" name="Rounded Rectangle 22"/>
+          <p:cNvSpPr/>
+          <p:nvPr/>
+        </p:nvSpPr>
+        <p:spPr>
+          <a:xfrm>
+            <a:off x="6309360" y="3611880"/>
+            <a:ext cx="2788920" cy="2377440"/>
+          </a:xfrm>
+          <a:prstGeom prst="roundRect">
+            <a:avLst>
+              <a:gd name="adj" fmla="val 5000"/>
+            </a:avLst>
+          </a:prstGeom>
+          <a:solidFill>
+            <a:srgbClr val="F2F4F7"/>
+          </a:solidFill>
+          <a:ln>
+            <a:noFill/>
+          </a:ln>
+        </p:spPr>
+        <p:style>
+          <a:lnRef idx="1">
+            <a:schemeClr val="accent1"/>
+          </a:lnRef>
+          <a:fillRef idx="3">
+            <a:schemeClr val="accent1"/>
+          </a:fillRef>
+          <a:effectRef idx="2">
+            <a:schemeClr val="accent1"/>
+          </a:effectRef>
+          <a:fontRef idx="minor">
+            <a:schemeClr val="lt1"/>
+          </a:fontRef>
+        </p:style>
+        <p:txBody>
+          <a:bodyPr rtlCol="0" anchor="ctr"/>
           <a:lstStyle/>
           <a:p>
             <a:pPr algn="ctr"/>
+          </a:p>
+        </p:txBody>
+      </p:sp>
+      <p:sp>
+        <p:nvSpPr>
+          <p:cNvPr id="24" name="TextBox 23"/>
+          <p:cNvSpPr txBox="1"/>
+          <p:nvPr/>
+        </p:nvSpPr>
+        <p:spPr>
+          <a:xfrm>
+            <a:off x="6446520" y="3794760"/>
+            <a:ext cx="2514600" cy="502920"/>
+          </a:xfrm>
+          <a:prstGeom prst="rect">
+            <a:avLst/>
+          </a:prstGeom>
+          <a:noFill/>
+        </p:spPr>
+        <p:txBody>
+          <a:bodyPr wrap="square">
+            <a:spAutoFit/>
+          </a:bodyPr>
+          <a:lstStyle/>
+          <a:p>
+            <a:pPr algn="l"/>
             <a:r>
               <a:rPr sz="1400" b="1">
                 <a:solidFill>
-                  <a:srgbClr val="FFFFFF"/>
-                </a:solidFill>
-                <a:latin typeface="Arial"/>
-              </a:rPr>
-              <a:t>6</a:t>
-            </a:r>
-          </a:p>
-        </p:txBody>
-      </p:sp>
-      <p:sp>
-        <p:nvSpPr>
-          <p:cNvPr id="22" name="TextBox 21"/>
-          <p:cNvSpPr txBox="1"/>
-          <p:nvPr/>
-        </p:nvSpPr>
-        <p:spPr>
-          <a:xfrm>
-            <a:off x="1280160" y="4983480"/>
-            <a:ext cx="10058400" cy="548640"/>
+                  <a:srgbClr val="0C2577"/>
+                </a:solidFill>
+                <a:latin typeface="Arial"/>
+              </a:rPr>
+              <a:t>Success metrics</a:t>
+            </a:r>
+          </a:p>
+        </p:txBody>
+      </p:sp>
+      <p:sp>
+        <p:nvSpPr>
+          <p:cNvPr id="25" name="TextBox 24"/>
+          <p:cNvSpPr txBox="1"/>
+          <p:nvPr/>
+        </p:nvSpPr>
+        <p:spPr>
+          <a:xfrm>
+            <a:off x="6446520" y="4389120"/>
+            <a:ext cx="2514600" cy="1371600"/>
           </a:xfrm>
           <a:prstGeom prst="rect">
             <a:avLst/>
@@ -7454,20 +7695,135 @@
           <a:p>
             <a:pPr algn="l"/>
             <a:r>
-              <a:rPr sz="1600" b="0">
-                <a:solidFill>
-                  <a:srgbClr val="000000"/>
-                </a:solidFill>
-                <a:latin typeface="Arial"/>
-              </a:rPr>
-              <a:t>Report quarterly to CMO: quality, usage, risks, and capacity needs.</a:t>
-            </a:r>
-          </a:p>
-        </p:txBody>
-      </p:sp>
-      <p:sp>
-        <p:nvSpPr>
-          <p:cNvPr id="23" name="TextBox 22"/>
+              <a:rPr sz="1200" b="0">
+                <a:solidFill>
+                  <a:srgbClr val="5A5A5A"/>
+                </a:solidFill>
+                <a:latin typeface="Arial"/>
+              </a:rPr>
+              <a:t>Answer quality %, citation hit rate, time-to-insight, deflection from workarounds.</a:t>
+            </a:r>
+          </a:p>
+        </p:txBody>
+      </p:sp>
+      <p:sp>
+        <p:nvSpPr>
+          <p:cNvPr id="26" name="Rounded Rectangle 25"/>
+          <p:cNvSpPr/>
+          <p:nvPr/>
+        </p:nvSpPr>
+        <p:spPr>
+          <a:xfrm>
+            <a:off x="9235440" y="3611880"/>
+            <a:ext cx="2788920" cy="2377440"/>
+          </a:xfrm>
+          <a:prstGeom prst="roundRect">
+            <a:avLst>
+              <a:gd name="adj" fmla="val 5000"/>
+            </a:avLst>
+          </a:prstGeom>
+          <a:solidFill>
+            <a:srgbClr val="F2F4F7"/>
+          </a:solidFill>
+          <a:ln>
+            <a:noFill/>
+          </a:ln>
+        </p:spPr>
+        <p:style>
+          <a:lnRef idx="1">
+            <a:schemeClr val="accent1"/>
+          </a:lnRef>
+          <a:fillRef idx="3">
+            <a:schemeClr val="accent1"/>
+          </a:fillRef>
+          <a:effectRef idx="2">
+            <a:schemeClr val="accent1"/>
+          </a:effectRef>
+          <a:fontRef idx="minor">
+            <a:schemeClr val="lt1"/>
+          </a:fontRef>
+        </p:style>
+        <p:txBody>
+          <a:bodyPr rtlCol="0" anchor="ctr"/>
+          <a:lstStyle/>
+          <a:p>
+            <a:pPr algn="ctr"/>
+          </a:p>
+        </p:txBody>
+      </p:sp>
+      <p:sp>
+        <p:nvSpPr>
+          <p:cNvPr id="27" name="TextBox 26"/>
+          <p:cNvSpPr txBox="1"/>
+          <p:nvPr/>
+        </p:nvSpPr>
+        <p:spPr>
+          <a:xfrm>
+            <a:off x="9372600" y="3794760"/>
+            <a:ext cx="2514600" cy="502920"/>
+          </a:xfrm>
+          <a:prstGeom prst="rect">
+            <a:avLst/>
+          </a:prstGeom>
+          <a:noFill/>
+        </p:spPr>
+        <p:txBody>
+          <a:bodyPr wrap="square">
+            <a:spAutoFit/>
+          </a:bodyPr>
+          <a:lstStyle/>
+          <a:p>
+            <a:pPr algn="l"/>
+            <a:r>
+              <a:rPr sz="1400" b="1">
+                <a:solidFill>
+                  <a:srgbClr val="0C2577"/>
+                </a:solidFill>
+                <a:latin typeface="Arial"/>
+              </a:rPr>
+              <a:t>Risk controls</a:t>
+            </a:r>
+          </a:p>
+        </p:txBody>
+      </p:sp>
+      <p:sp>
+        <p:nvSpPr>
+          <p:cNvPr id="28" name="TextBox 27"/>
+          <p:cNvSpPr txBox="1"/>
+          <p:nvPr/>
+        </p:nvSpPr>
+        <p:spPr>
+          <a:xfrm>
+            <a:off x="9372600" y="4389120"/>
+            <a:ext cx="2514600" cy="1371600"/>
+          </a:xfrm>
+          <a:prstGeom prst="rect">
+            <a:avLst/>
+          </a:prstGeom>
+          <a:noFill/>
+        </p:spPr>
+        <p:txBody>
+          <a:bodyPr wrap="square">
+            <a:spAutoFit/>
+          </a:bodyPr>
+          <a:lstStyle/>
+          <a:p>
+            <a:pPr algn="l"/>
+            <a:r>
+              <a:rPr sz="1200" b="0">
+                <a:solidFill>
+                  <a:srgbClr val="5A5A5A"/>
+                </a:solidFill>
+                <a:latin typeface="Arial"/>
+              </a:rPr>
+              <a:t>Wrong-answer escalation, “I don’t know” policy, sensitive-topic handling.</a:t>
+            </a:r>
+          </a:p>
+        </p:txBody>
+      </p:sp>
+      <p:sp>
+        <p:nvSpPr>
+          <p:cNvPr id="29" name="TextBox 28"/>
           <p:cNvSpPr txBox="1"/>
           <p:nvPr/>
         </p:nvSpPr>
@@ -7502,7 +7858,7 @@
       </p:sp>
       <p:sp>
         <p:nvSpPr>
-          <p:cNvPr id="24" name="TextBox 23"/>
+          <p:cNvPr id="30" name="TextBox 29"/>
           <p:cNvSpPr txBox="1"/>
           <p:nvPr/>
         </p:nvSpPr>
@@ -7663,32 +8019,205 @@
           <a:p>
             <a:pPr algn="l"/>
             <a:r>
-              <a:rPr sz="2800" b="1">
+              <a:rPr sz="2600" b="1">
                 <a:solidFill>
                   <a:srgbClr val="0C2577"/>
                 </a:solidFill>
                 <a:latin typeface="Arial"/>
               </a:rPr>
-              <a:t>Decision requested</a:t>
-            </a:r>
-          </a:p>
-        </p:txBody>
-      </p:sp>
-      <p:sp>
-        <p:nvSpPr>
-          <p:cNvPr id="5" name="Rounded Rectangle 4"/>
+              <a:t>Human impact — roles, hours, support</a:t>
+            </a:r>
+          </a:p>
+        </p:txBody>
+      </p:sp>
+      <p:sp>
+        <p:nvSpPr>
+          <p:cNvPr id="5" name="TextBox 4"/>
+          <p:cNvSpPr txBox="1"/>
+          <p:nvPr/>
+        </p:nvSpPr>
+        <p:spPr>
+          <a:xfrm>
+            <a:off x="548640" y="822960"/>
+            <a:ext cx="10972800" cy="320040"/>
+          </a:xfrm>
+          <a:prstGeom prst="rect">
+            <a:avLst/>
+          </a:prstGeom>
+          <a:noFill/>
+        </p:spPr>
+        <p:txBody>
+          <a:bodyPr wrap="square">
+            <a:spAutoFit/>
+          </a:bodyPr>
+          <a:lstStyle/>
+          <a:p>
+            <a:pPr algn="l"/>
+            <a:r>
+              <a:rPr sz="1300" b="0">
+                <a:solidFill>
+                  <a:srgbClr val="5A5A5A"/>
+                </a:solidFill>
+                <a:latin typeface="Arial"/>
+              </a:rPr>
+              <a:t>Indicative planning ranges for CMO discussion (calibrate with HR / insights capacity).</a:t>
+            </a:r>
+          </a:p>
+        </p:txBody>
+      </p:sp>
+      <p:sp>
+        <p:nvSpPr>
+          <p:cNvPr id="6" name="TextBox 5"/>
+          <p:cNvSpPr txBox="1"/>
+          <p:nvPr/>
+        </p:nvSpPr>
+        <p:spPr>
+          <a:xfrm>
+            <a:off x="548640" y="1234440"/>
+            <a:ext cx="2468880" cy="320040"/>
+          </a:xfrm>
+          <a:prstGeom prst="rect">
+            <a:avLst/>
+          </a:prstGeom>
+          <a:noFill/>
+        </p:spPr>
+        <p:txBody>
+          <a:bodyPr wrap="square">
+            <a:spAutoFit/>
+          </a:bodyPr>
+          <a:lstStyle/>
+          <a:p>
+            <a:pPr algn="l"/>
+            <a:r>
+              <a:rPr sz="1200" b="1">
+                <a:solidFill>
+                  <a:srgbClr val="067AB4"/>
+                </a:solidFill>
+                <a:latin typeface="Arial"/>
+              </a:rPr>
+              <a:t>Role</a:t>
+            </a:r>
+          </a:p>
+        </p:txBody>
+      </p:sp>
+      <p:sp>
+        <p:nvSpPr>
+          <p:cNvPr id="7" name="TextBox 6"/>
+          <p:cNvSpPr txBox="1"/>
+          <p:nvPr/>
+        </p:nvSpPr>
+        <p:spPr>
+          <a:xfrm>
+            <a:off x="3108960" y="1234440"/>
+            <a:ext cx="1645920" cy="320040"/>
+          </a:xfrm>
+          <a:prstGeom prst="rect">
+            <a:avLst/>
+          </a:prstGeom>
+          <a:noFill/>
+        </p:spPr>
+        <p:txBody>
+          <a:bodyPr wrap="square">
+            <a:spAutoFit/>
+          </a:bodyPr>
+          <a:lstStyle/>
+          <a:p>
+            <a:pPr algn="l"/>
+            <a:r>
+              <a:rPr sz="1200" b="1">
+                <a:solidFill>
+                  <a:srgbClr val="067AB4"/>
+                </a:solidFill>
+                <a:latin typeface="Arial"/>
+              </a:rPr>
+              <a:t>Mode</a:t>
+            </a:r>
+          </a:p>
+        </p:txBody>
+      </p:sp>
+      <p:sp>
+        <p:nvSpPr>
+          <p:cNvPr id="8" name="TextBox 7"/>
+          <p:cNvSpPr txBox="1"/>
+          <p:nvPr/>
+        </p:nvSpPr>
+        <p:spPr>
+          <a:xfrm>
+            <a:off x="4846320" y="1234440"/>
+            <a:ext cx="2377440" cy="320040"/>
+          </a:xfrm>
+          <a:prstGeom prst="rect">
+            <a:avLst/>
+          </a:prstGeom>
+          <a:noFill/>
+        </p:spPr>
+        <p:txBody>
+          <a:bodyPr wrap="square">
+            <a:spAutoFit/>
+          </a:bodyPr>
+          <a:lstStyle/>
+          <a:p>
+            <a:pPr algn="l"/>
+            <a:r>
+              <a:rPr sz="1200" b="1">
+                <a:solidFill>
+                  <a:srgbClr val="067AB4"/>
+                </a:solidFill>
+                <a:latin typeface="Arial"/>
+              </a:rPr>
+              <a:t>Effort</a:t>
+            </a:r>
+          </a:p>
+        </p:txBody>
+      </p:sp>
+      <p:sp>
+        <p:nvSpPr>
+          <p:cNvPr id="9" name="TextBox 8"/>
+          <p:cNvSpPr txBox="1"/>
+          <p:nvPr/>
+        </p:nvSpPr>
+        <p:spPr>
+          <a:xfrm>
+            <a:off x="7315200" y="1234440"/>
+            <a:ext cx="4206240" cy="320040"/>
+          </a:xfrm>
+          <a:prstGeom prst="rect">
+            <a:avLst/>
+          </a:prstGeom>
+          <a:noFill/>
+        </p:spPr>
+        <p:txBody>
+          <a:bodyPr wrap="square">
+            <a:spAutoFit/>
+          </a:bodyPr>
+          <a:lstStyle/>
+          <a:p>
+            <a:pPr algn="l"/>
+            <a:r>
+              <a:rPr sz="1200" b="1">
+                <a:solidFill>
+                  <a:srgbClr val="067AB4"/>
+                </a:solidFill>
+                <a:latin typeface="Arial"/>
+              </a:rPr>
+              <a:t>Responsibility</a:t>
+            </a:r>
+          </a:p>
+        </p:txBody>
+      </p:sp>
+      <p:sp>
+        <p:nvSpPr>
+          <p:cNvPr id="10" name="Rectangle 9"/>
           <p:cNvSpPr/>
           <p:nvPr/>
         </p:nvSpPr>
         <p:spPr>
           <a:xfrm>
-            <a:off x="548640" y="1005840"/>
-            <a:ext cx="5486400" cy="2148840"/>
-          </a:xfrm>
-          <a:prstGeom prst="roundRect">
-            <a:avLst>
-              <a:gd name="adj" fmla="val 5000"/>
-            </a:avLst>
+            <a:off x="457200" y="1554480"/>
+            <a:ext cx="11247120" cy="777240"/>
+          </a:xfrm>
+          <a:prstGeom prst="rect">
+            <a:avLst/>
           </a:prstGeom>
           <a:solidFill>
             <a:srgbClr val="F2F4F7"/>
@@ -7721,14 +8250,14 @@
       </p:sp>
       <p:sp>
         <p:nvSpPr>
-          <p:cNvPr id="6" name="TextBox 5"/>
-          <p:cNvSpPr txBox="1"/>
-          <p:nvPr/>
-        </p:nvSpPr>
-        <p:spPr>
-          <a:xfrm>
-            <a:off x="822960" y="1280160"/>
-            <a:ext cx="457200" cy="365760"/>
+          <p:cNvPr id="11" name="TextBox 10"/>
+          <p:cNvSpPr txBox="1"/>
+          <p:nvPr/>
+        </p:nvSpPr>
+        <p:spPr>
+          <a:xfrm>
+            <a:off x="548640" y="1645920"/>
+            <a:ext cx="2468880" cy="640080"/>
           </a:xfrm>
           <a:prstGeom prst="rect">
             <a:avLst/>
@@ -7743,27 +8272,27 @@
           <a:p>
             <a:pPr algn="l"/>
             <a:r>
-              <a:rPr sz="2200" b="1">
-                <a:solidFill>
-                  <a:srgbClr val="FF7200"/>
-                </a:solidFill>
-                <a:latin typeface="Arial"/>
-              </a:rPr>
-              <a:t>1</a:t>
-            </a:r>
-          </a:p>
-        </p:txBody>
-      </p:sp>
-      <p:sp>
-        <p:nvSpPr>
-          <p:cNvPr id="7" name="TextBox 6"/>
-          <p:cNvSpPr txBox="1"/>
-          <p:nvPr/>
-        </p:nvSpPr>
-        <p:spPr>
-          <a:xfrm>
-            <a:off x="1371600" y="1325880"/>
-            <a:ext cx="4389120" cy="411480"/>
+              <a:rPr sz="1200" b="1">
+                <a:solidFill>
+                  <a:srgbClr val="000000"/>
+                </a:solidFill>
+                <a:latin typeface="Arial"/>
+              </a:rPr>
+              <a:t>Knowledge Steward (lead)</a:t>
+            </a:r>
+          </a:p>
+        </p:txBody>
+      </p:sp>
+      <p:sp>
+        <p:nvSpPr>
+          <p:cNvPr id="12" name="TextBox 11"/>
+          <p:cNvSpPr txBox="1"/>
+          <p:nvPr/>
+        </p:nvSpPr>
+        <p:spPr>
+          <a:xfrm>
+            <a:off x="3108960" y="1645920"/>
+            <a:ext cx="1645920" cy="640080"/>
           </a:xfrm>
           <a:prstGeom prst="rect">
             <a:avLst/>
@@ -7778,27 +8307,27 @@
           <a:p>
             <a:pPr algn="l"/>
             <a:r>
-              <a:rPr sz="1800" b="1">
-                <a:solidFill>
-                  <a:srgbClr val="0C2577"/>
-                </a:solidFill>
-                <a:latin typeface="Arial"/>
-              </a:rPr>
-              <a:t>Approve MCP + API path</a:t>
-            </a:r>
-          </a:p>
-        </p:txBody>
-      </p:sp>
-      <p:sp>
-        <p:nvSpPr>
-          <p:cNvPr id="8" name="TextBox 7"/>
-          <p:cNvSpPr txBox="1"/>
-          <p:nvPr/>
-        </p:nvSpPr>
-        <p:spPr>
-          <a:xfrm>
-            <a:off x="822960" y="1920240"/>
-            <a:ext cx="4937760" cy="1005840"/>
+              <a:rPr sz="1200" b="0">
+                <a:solidFill>
+                  <a:srgbClr val="000000"/>
+                </a:solidFill>
+                <a:latin typeface="Arial"/>
+              </a:rPr>
+              <a:t>Standing role</a:t>
+            </a:r>
+          </a:p>
+        </p:txBody>
+      </p:sp>
+      <p:sp>
+        <p:nvSpPr>
+          <p:cNvPr id="13" name="TextBox 12"/>
+          <p:cNvSpPr txBox="1"/>
+          <p:nvPr/>
+        </p:nvSpPr>
+        <p:spPr>
+          <a:xfrm>
+            <a:off x="4846320" y="1645920"/>
+            <a:ext cx="2377440" cy="640080"/>
           </a:xfrm>
           <a:prstGeom prst="rect">
             <a:avLst/>
@@ -7813,32 +8342,205 @@
           <a:p>
             <a:pPr algn="l"/>
             <a:r>
-              <a:rPr sz="1400" b="0">
-                <a:solidFill>
-                  <a:srgbClr val="5A5A5A"/>
-                </a:solidFill>
-                <a:latin typeface="Arial"/>
-              </a:rPr>
-              <a:t>Authorize commercial/security engagement to enable Insightful MCP and API for sanctioned AI projects.</a:t>
-            </a:r>
-          </a:p>
-        </p:txBody>
-      </p:sp>
-      <p:sp>
-        <p:nvSpPr>
-          <p:cNvPr id="9" name="Rounded Rectangle 8"/>
+              <a:rPr sz="1200" b="0">
+                <a:solidFill>
+                  <a:srgbClr val="000000"/>
+                </a:solidFill>
+                <a:latin typeface="Arial"/>
+              </a:rPr>
+              <a:t>0.4–0.6 FTE ongoing</a:t>
+            </a:r>
+          </a:p>
+        </p:txBody>
+      </p:sp>
+      <p:sp>
+        <p:nvSpPr>
+          <p:cNvPr id="14" name="TextBox 13"/>
+          <p:cNvSpPr txBox="1"/>
+          <p:nvPr/>
+        </p:nvSpPr>
+        <p:spPr>
+          <a:xfrm>
+            <a:off x="7315200" y="1645920"/>
+            <a:ext cx="4206240" cy="640080"/>
+          </a:xfrm>
+          <a:prstGeom prst="rect">
+            <a:avLst/>
+          </a:prstGeom>
+          <a:noFill/>
+        </p:spPr>
+        <p:txBody>
+          <a:bodyPr wrap="square">
+            <a:spAutoFit/>
+          </a:bodyPr>
+          <a:lstStyle/>
+          <a:p>
+            <a:pPr algn="l"/>
+            <a:r>
+              <a:rPr sz="1200" b="0">
+                <a:solidFill>
+                  <a:srgbClr val="000000"/>
+                </a:solidFill>
+                <a:latin typeface="Arial"/>
+              </a:rPr>
+              <a:t>Corpus quality, golden set, access requests, sync exceptions, SME coordination</a:t>
+            </a:r>
+          </a:p>
+        </p:txBody>
+      </p:sp>
+      <p:sp>
+        <p:nvSpPr>
+          <p:cNvPr id="15" name="TextBox 14"/>
+          <p:cNvSpPr txBox="1"/>
+          <p:nvPr/>
+        </p:nvSpPr>
+        <p:spPr>
+          <a:xfrm>
+            <a:off x="548640" y="2468880"/>
+            <a:ext cx="2468880" cy="640080"/>
+          </a:xfrm>
+          <a:prstGeom prst="rect">
+            <a:avLst/>
+          </a:prstGeom>
+          <a:noFill/>
+        </p:spPr>
+        <p:txBody>
+          <a:bodyPr wrap="square">
+            <a:spAutoFit/>
+          </a:bodyPr>
+          <a:lstStyle/>
+          <a:p>
+            <a:pPr algn="l"/>
+            <a:r>
+              <a:rPr sz="1200" b="1">
+                <a:solidFill>
+                  <a:srgbClr val="000000"/>
+                </a:solidFill>
+                <a:latin typeface="Arial"/>
+              </a:rPr>
+              <a:t>Insights SMEs (panel)</a:t>
+            </a:r>
+          </a:p>
+        </p:txBody>
+      </p:sp>
+      <p:sp>
+        <p:nvSpPr>
+          <p:cNvPr id="16" name="TextBox 15"/>
+          <p:cNvSpPr txBox="1"/>
+          <p:nvPr/>
+        </p:nvSpPr>
+        <p:spPr>
+          <a:xfrm>
+            <a:off x="3108960" y="2468880"/>
+            <a:ext cx="1645920" cy="640080"/>
+          </a:xfrm>
+          <a:prstGeom prst="rect">
+            <a:avLst/>
+          </a:prstGeom>
+          <a:noFill/>
+        </p:spPr>
+        <p:txBody>
+          <a:bodyPr wrap="square">
+            <a:spAutoFit/>
+          </a:bodyPr>
+          <a:lstStyle/>
+          <a:p>
+            <a:pPr algn="l"/>
+            <a:r>
+              <a:rPr sz="1200" b="0">
+                <a:solidFill>
+                  <a:srgbClr val="000000"/>
+                </a:solidFill>
+                <a:latin typeface="Arial"/>
+              </a:rPr>
+              <a:t>Rotating</a:t>
+            </a:r>
+          </a:p>
+        </p:txBody>
+      </p:sp>
+      <p:sp>
+        <p:nvSpPr>
+          <p:cNvPr id="17" name="TextBox 16"/>
+          <p:cNvSpPr txBox="1"/>
+          <p:nvPr/>
+        </p:nvSpPr>
+        <p:spPr>
+          <a:xfrm>
+            <a:off x="4846320" y="2468880"/>
+            <a:ext cx="2377440" cy="640080"/>
+          </a:xfrm>
+          <a:prstGeom prst="rect">
+            <a:avLst/>
+          </a:prstGeom>
+          <a:noFill/>
+        </p:spPr>
+        <p:txBody>
+          <a:bodyPr wrap="square">
+            <a:spAutoFit/>
+          </a:bodyPr>
+          <a:lstStyle/>
+          <a:p>
+            <a:pPr algn="l"/>
+            <a:r>
+              <a:rPr sz="1200" b="0">
+                <a:solidFill>
+                  <a:srgbClr val="000000"/>
+                </a:solidFill>
+                <a:latin typeface="Arial"/>
+              </a:rPr>
+              <a:t>~40–80 hrs stand-up; 4–8 hrs/mo</a:t>
+            </a:r>
+          </a:p>
+        </p:txBody>
+      </p:sp>
+      <p:sp>
+        <p:nvSpPr>
+          <p:cNvPr id="18" name="TextBox 17"/>
+          <p:cNvSpPr txBox="1"/>
+          <p:nvPr/>
+        </p:nvSpPr>
+        <p:spPr>
+          <a:xfrm>
+            <a:off x="7315200" y="2468880"/>
+            <a:ext cx="4206240" cy="640080"/>
+          </a:xfrm>
+          <a:prstGeom prst="rect">
+            <a:avLst/>
+          </a:prstGeom>
+          <a:noFill/>
+        </p:spPr>
+        <p:txBody>
+          <a:bodyPr wrap="square">
+            <a:spAutoFit/>
+          </a:bodyPr>
+          <a:lstStyle/>
+          <a:p>
+            <a:pPr algn="l"/>
+            <a:r>
+              <a:rPr sz="1200" b="0">
+                <a:solidFill>
+                  <a:srgbClr val="000000"/>
+                </a:solidFill>
+                <a:latin typeface="Arial"/>
+              </a:rPr>
+              <a:t>Truth answers, taxonomy edge cases, approve go-live scorecard</a:t>
+            </a:r>
+          </a:p>
+        </p:txBody>
+      </p:sp>
+      <p:sp>
+        <p:nvSpPr>
+          <p:cNvPr id="19" name="Rectangle 18"/>
           <p:cNvSpPr/>
           <p:nvPr/>
         </p:nvSpPr>
         <p:spPr>
           <a:xfrm>
-            <a:off x="6309359" y="1005840"/>
-            <a:ext cx="5486400" cy="2148840"/>
-          </a:xfrm>
-          <a:prstGeom prst="roundRect">
-            <a:avLst>
-              <a:gd name="adj" fmla="val 5000"/>
-            </a:avLst>
+            <a:off x="457200" y="3200400"/>
+            <a:ext cx="11247120" cy="777240"/>
+          </a:xfrm>
+          <a:prstGeom prst="rect">
+            <a:avLst/>
           </a:prstGeom>
           <a:solidFill>
             <a:srgbClr val="F2F4F7"/>
@@ -7871,14 +8573,14 @@
       </p:sp>
       <p:sp>
         <p:nvSpPr>
-          <p:cNvPr id="10" name="TextBox 9"/>
-          <p:cNvSpPr txBox="1"/>
-          <p:nvPr/>
-        </p:nvSpPr>
-        <p:spPr>
-          <a:xfrm>
-            <a:off x="6583679" y="1280160"/>
-            <a:ext cx="457200" cy="365760"/>
+          <p:cNvPr id="20" name="TextBox 19"/>
+          <p:cNvSpPr txBox="1"/>
+          <p:nvPr/>
+        </p:nvSpPr>
+        <p:spPr>
+          <a:xfrm>
+            <a:off x="548640" y="3291840"/>
+            <a:ext cx="2468880" cy="640080"/>
           </a:xfrm>
           <a:prstGeom prst="rect">
             <a:avLst/>
@@ -7893,27 +8595,27 @@
           <a:p>
             <a:pPr algn="l"/>
             <a:r>
-              <a:rPr sz="2200" b="1">
-                <a:solidFill>
-                  <a:srgbClr val="FF7200"/>
-                </a:solidFill>
-                <a:latin typeface="Arial"/>
-              </a:rPr>
-              <a:t>2</a:t>
-            </a:r>
-          </a:p>
-        </p:txBody>
-      </p:sp>
-      <p:sp>
-        <p:nvSpPr>
-          <p:cNvPr id="11" name="TextBox 10"/>
-          <p:cNvSpPr txBox="1"/>
-          <p:nvPr/>
-        </p:nvSpPr>
-        <p:spPr>
-          <a:xfrm>
-            <a:off x="7132319" y="1325880"/>
-            <a:ext cx="4389120" cy="411480"/>
+              <a:rPr sz="1200" b="1">
+                <a:solidFill>
+                  <a:srgbClr val="000000"/>
+                </a:solidFill>
+                <a:latin typeface="Arial"/>
+              </a:rPr>
+              <a:t>KM / platform ops</a:t>
+            </a:r>
+          </a:p>
+        </p:txBody>
+      </p:sp>
+      <p:sp>
+        <p:nvSpPr>
+          <p:cNvPr id="21" name="TextBox 20"/>
+          <p:cNvSpPr txBox="1"/>
+          <p:nvPr/>
+        </p:nvSpPr>
+        <p:spPr>
+          <a:xfrm>
+            <a:off x="3108960" y="3291840"/>
+            <a:ext cx="1645920" cy="640080"/>
           </a:xfrm>
           <a:prstGeom prst="rect">
             <a:avLst/>
@@ -7928,27 +8630,27 @@
           <a:p>
             <a:pPr algn="l"/>
             <a:r>
-              <a:rPr sz="1800" b="1">
-                <a:solidFill>
-                  <a:srgbClr val="0C2577"/>
-                </a:solidFill>
-                <a:latin typeface="Arial"/>
-              </a:rPr>
-              <a:t>Name program owners</a:t>
-            </a:r>
-          </a:p>
-        </p:txBody>
-      </p:sp>
-      <p:sp>
-        <p:nvSpPr>
-          <p:cNvPr id="12" name="TextBox 11"/>
-          <p:cNvSpPr txBox="1"/>
-          <p:nvPr/>
-        </p:nvSpPr>
-        <p:spPr>
-          <a:xfrm>
-            <a:off x="6583679" y="1920240"/>
-            <a:ext cx="4937760" cy="1005840"/>
+              <a:rPr sz="1200" b="0">
+                <a:solidFill>
+                  <a:srgbClr val="000000"/>
+                </a:solidFill>
+                <a:latin typeface="Arial"/>
+              </a:rPr>
+              <a:t>Shared</a:t>
+            </a:r>
+          </a:p>
+        </p:txBody>
+      </p:sp>
+      <p:sp>
+        <p:nvSpPr>
+          <p:cNvPr id="22" name="TextBox 21"/>
+          <p:cNvSpPr txBox="1"/>
+          <p:nvPr/>
+        </p:nvSpPr>
+        <p:spPr>
+          <a:xfrm>
+            <a:off x="4846320" y="3291840"/>
+            <a:ext cx="2377440" cy="640080"/>
           </a:xfrm>
           <a:prstGeom prst="rect">
             <a:avLst/>
@@ -7963,32 +8665,205 @@
           <a:p>
             <a:pPr algn="l"/>
             <a:r>
-              <a:rPr sz="1400" b="0">
-                <a:solidFill>
-                  <a:srgbClr val="5A5A5A"/>
-                </a:solidFill>
-                <a:latin typeface="Arial"/>
-              </a:rPr>
-              <a:t>Assign MCP/API owner and interim Knowledge Steward; confirm SME panel.</a:t>
-            </a:r>
-          </a:p>
-        </p:txBody>
-      </p:sp>
-      <p:sp>
-        <p:nvSpPr>
-          <p:cNvPr id="13" name="Rounded Rectangle 12"/>
+              <a:rPr sz="1200" b="0">
+                <a:solidFill>
+                  <a:srgbClr val="000000"/>
+                </a:solidFill>
+                <a:latin typeface="Arial"/>
+              </a:rPr>
+              <a:t>~20–40 hrs stand-up; 2–4 hrs/wk</a:t>
+            </a:r>
+          </a:p>
+        </p:txBody>
+      </p:sp>
+      <p:sp>
+        <p:nvSpPr>
+          <p:cNvPr id="23" name="TextBox 22"/>
+          <p:cNvSpPr txBox="1"/>
+          <p:nvPr/>
+        </p:nvSpPr>
+        <p:spPr>
+          <a:xfrm>
+            <a:off x="7315200" y="3291840"/>
+            <a:ext cx="4206240" cy="640080"/>
+          </a:xfrm>
+          <a:prstGeom prst="rect">
+            <a:avLst/>
+          </a:prstGeom>
+          <a:noFill/>
+        </p:spPr>
+        <p:txBody>
+          <a:bodyPr wrap="square">
+            <a:spAutoFit/>
+          </a:bodyPr>
+          <a:lstStyle/>
+          <a:p>
+            <a:pPr algn="l"/>
+            <a:r>
+              <a:rPr sz="1200" b="0">
+                <a:solidFill>
+                  <a:srgbClr val="000000"/>
+                </a:solidFill>
+                <a:latin typeface="Arial"/>
+              </a:rPr>
+              <a:t>Sync jobs, metadata, Ask AT&amp;T config, release testing</a:t>
+            </a:r>
+          </a:p>
+        </p:txBody>
+      </p:sp>
+      <p:sp>
+        <p:nvSpPr>
+          <p:cNvPr id="24" name="TextBox 23"/>
+          <p:cNvSpPr txBox="1"/>
+          <p:nvPr/>
+        </p:nvSpPr>
+        <p:spPr>
+          <a:xfrm>
+            <a:off x="548640" y="4114800"/>
+            <a:ext cx="2468880" cy="640080"/>
+          </a:xfrm>
+          <a:prstGeom prst="rect">
+            <a:avLst/>
+          </a:prstGeom>
+          <a:noFill/>
+        </p:spPr>
+        <p:txBody>
+          <a:bodyPr wrap="square">
+            <a:spAutoFit/>
+          </a:bodyPr>
+          <a:lstStyle/>
+          <a:p>
+            <a:pPr algn="l"/>
+            <a:r>
+              <a:rPr sz="1200" b="1">
+                <a:solidFill>
+                  <a:srgbClr val="000000"/>
+                </a:solidFill>
+                <a:latin typeface="Arial"/>
+              </a:rPr>
+              <a:t>Security / compliance</a:t>
+            </a:r>
+          </a:p>
+        </p:txBody>
+      </p:sp>
+      <p:sp>
+        <p:nvSpPr>
+          <p:cNvPr id="25" name="TextBox 24"/>
+          <p:cNvSpPr txBox="1"/>
+          <p:nvPr/>
+        </p:nvSpPr>
+        <p:spPr>
+          <a:xfrm>
+            <a:off x="3108960" y="4114800"/>
+            <a:ext cx="1645920" cy="640080"/>
+          </a:xfrm>
+          <a:prstGeom prst="rect">
+            <a:avLst/>
+          </a:prstGeom>
+          <a:noFill/>
+        </p:spPr>
+        <p:txBody>
+          <a:bodyPr wrap="square">
+            <a:spAutoFit/>
+          </a:bodyPr>
+          <a:lstStyle/>
+          <a:p>
+            <a:pPr algn="l"/>
+            <a:r>
+              <a:rPr sz="1200" b="0">
+                <a:solidFill>
+                  <a:srgbClr val="000000"/>
+                </a:solidFill>
+                <a:latin typeface="Arial"/>
+              </a:rPr>
+              <a:t>Checkpoint</a:t>
+            </a:r>
+          </a:p>
+        </p:txBody>
+      </p:sp>
+      <p:sp>
+        <p:nvSpPr>
+          <p:cNvPr id="26" name="TextBox 25"/>
+          <p:cNvSpPr txBox="1"/>
+          <p:nvPr/>
+        </p:nvSpPr>
+        <p:spPr>
+          <a:xfrm>
+            <a:off x="4846320" y="4114800"/>
+            <a:ext cx="2377440" cy="640080"/>
+          </a:xfrm>
+          <a:prstGeom prst="rect">
+            <a:avLst/>
+          </a:prstGeom>
+          <a:noFill/>
+        </p:spPr>
+        <p:txBody>
+          <a:bodyPr wrap="square">
+            <a:spAutoFit/>
+          </a:bodyPr>
+          <a:lstStyle/>
+          <a:p>
+            <a:pPr algn="l"/>
+            <a:r>
+              <a:rPr sz="1200" b="0">
+                <a:solidFill>
+                  <a:srgbClr val="000000"/>
+                </a:solidFill>
+                <a:latin typeface="Arial"/>
+              </a:rPr>
+              <a:t>~15–25 hrs initial</a:t>
+            </a:r>
+          </a:p>
+        </p:txBody>
+      </p:sp>
+      <p:sp>
+        <p:nvSpPr>
+          <p:cNvPr id="27" name="TextBox 26"/>
+          <p:cNvSpPr txBox="1"/>
+          <p:nvPr/>
+        </p:nvSpPr>
+        <p:spPr>
+          <a:xfrm>
+            <a:off x="7315200" y="4114800"/>
+            <a:ext cx="4206240" cy="640080"/>
+          </a:xfrm>
+          <a:prstGeom prst="rect">
+            <a:avLst/>
+          </a:prstGeom>
+          <a:noFill/>
+        </p:spPr>
+        <p:txBody>
+          <a:bodyPr wrap="square">
+            <a:spAutoFit/>
+          </a:bodyPr>
+          <a:lstStyle/>
+          <a:p>
+            <a:pPr algn="l"/>
+            <a:r>
+              <a:rPr sz="1200" b="0">
+                <a:solidFill>
+                  <a:srgbClr val="000000"/>
+                </a:solidFill>
+                <a:latin typeface="Arial"/>
+              </a:rPr>
+              <a:t>Access model, audit, data-class controls, exception review</a:t>
+            </a:r>
+          </a:p>
+        </p:txBody>
+      </p:sp>
+      <p:sp>
+        <p:nvSpPr>
+          <p:cNvPr id="28" name="Rectangle 27"/>
           <p:cNvSpPr/>
           <p:nvPr/>
         </p:nvSpPr>
         <p:spPr>
           <a:xfrm>
-            <a:off x="548640" y="3383280"/>
-            <a:ext cx="5486400" cy="2148840"/>
-          </a:xfrm>
-          <a:prstGeom prst="roundRect">
-            <a:avLst>
-              <a:gd name="adj" fmla="val 5000"/>
-            </a:avLst>
+            <a:off x="457200" y="4846320"/>
+            <a:ext cx="11247120" cy="777240"/>
+          </a:xfrm>
+          <a:prstGeom prst="rect">
+            <a:avLst/>
           </a:prstGeom>
           <a:solidFill>
             <a:srgbClr val="F2F4F7"/>
@@ -8021,14 +8896,14 @@
       </p:sp>
       <p:sp>
         <p:nvSpPr>
-          <p:cNvPr id="14" name="TextBox 13"/>
-          <p:cNvSpPr txBox="1"/>
-          <p:nvPr/>
-        </p:nvSpPr>
-        <p:spPr>
-          <a:xfrm>
-            <a:off x="822960" y="3657600"/>
-            <a:ext cx="457200" cy="365760"/>
+          <p:cNvPr id="29" name="TextBox 28"/>
+          <p:cNvSpPr txBox="1"/>
+          <p:nvPr/>
+        </p:nvSpPr>
+        <p:spPr>
+          <a:xfrm>
+            <a:off x="548640" y="4937760"/>
+            <a:ext cx="2468880" cy="640080"/>
           </a:xfrm>
           <a:prstGeom prst="rect">
             <a:avLst/>
@@ -8043,27 +8918,27 @@
           <a:p>
             <a:pPr algn="l"/>
             <a:r>
-              <a:rPr sz="2200" b="1">
-                <a:solidFill>
-                  <a:srgbClr val="FF7200"/>
-                </a:solidFill>
-                <a:latin typeface="Arial"/>
-              </a:rPr>
-              <a:t>3</a:t>
-            </a:r>
-          </a:p>
-        </p:txBody>
-      </p:sp>
-      <p:sp>
-        <p:nvSpPr>
-          <p:cNvPr id="15" name="TextBox 14"/>
-          <p:cNvSpPr txBox="1"/>
-          <p:nvPr/>
-        </p:nvSpPr>
-        <p:spPr>
-          <a:xfrm>
-            <a:off x="1371600" y="3703320"/>
-            <a:ext cx="4389120" cy="411480"/>
+              <a:rPr sz="1200" b="1">
+                <a:solidFill>
+                  <a:srgbClr val="000000"/>
+                </a:solidFill>
+                <a:latin typeface="Arial"/>
+              </a:rPr>
+              <a:t>MCP / API program owner</a:t>
+            </a:r>
+          </a:p>
+        </p:txBody>
+      </p:sp>
+      <p:sp>
+        <p:nvSpPr>
+          <p:cNvPr id="30" name="TextBox 29"/>
+          <p:cNvSpPr txBox="1"/>
+          <p:nvPr/>
+        </p:nvSpPr>
+        <p:spPr>
+          <a:xfrm>
+            <a:off x="3108960" y="4937760"/>
+            <a:ext cx="1645920" cy="640080"/>
           </a:xfrm>
           <a:prstGeom prst="rect">
             <a:avLst/>
@@ -8078,27 +8953,27 @@
           <a:p>
             <a:pPr algn="l"/>
             <a:r>
-              <a:rPr sz="1800" b="1">
-                <a:solidFill>
-                  <a:srgbClr val="0C2577"/>
-                </a:solidFill>
-                <a:latin typeface="Arial"/>
-              </a:rPr>
-              <a:t>Fund domain as side goal</a:t>
-            </a:r>
-          </a:p>
-        </p:txBody>
-      </p:sp>
-      <p:sp>
-        <p:nvSpPr>
-          <p:cNvPr id="16" name="TextBox 15"/>
-          <p:cNvSpPr txBox="1"/>
-          <p:nvPr/>
-        </p:nvSpPr>
-        <p:spPr>
-          <a:xfrm>
-            <a:off x="822960" y="4297680"/>
-            <a:ext cx="4937760" cy="1005840"/>
+              <a:rPr sz="1200" b="0">
+                <a:solidFill>
+                  <a:srgbClr val="000000"/>
+                </a:solidFill>
+                <a:latin typeface="Arial"/>
+              </a:rPr>
+              <a:t>Standing</a:t>
+            </a:r>
+          </a:p>
+        </p:txBody>
+      </p:sp>
+      <p:sp>
+        <p:nvSpPr>
+          <p:cNvPr id="31" name="TextBox 30"/>
+          <p:cNvSpPr txBox="1"/>
+          <p:nvPr/>
+        </p:nvSpPr>
+        <p:spPr>
+          <a:xfrm>
+            <a:off x="4846320" y="4937760"/>
+            <a:ext cx="2377440" cy="640080"/>
           </a:xfrm>
           <a:prstGeom prst="rect">
             <a:avLst/>
@@ -8113,72 +8988,27 @@
           <a:p>
             <a:pPr algn="l"/>
             <a:r>
-              <a:rPr sz="1400" b="0">
-                <a:solidFill>
-                  <a:srgbClr val="5A5A5A"/>
-                </a:solidFill>
-                <a:latin typeface="Arial"/>
-              </a:rPr>
-              <a:t>Endorse golden-question stand-up and steward operating model — without blocking agent demand on domain go-live.</a:t>
-            </a:r>
-          </a:p>
-        </p:txBody>
-      </p:sp>
-      <p:sp>
-        <p:nvSpPr>
-          <p:cNvPr id="17" name="Rounded Rectangle 16"/>
-          <p:cNvSpPr/>
-          <p:nvPr/>
-        </p:nvSpPr>
-        <p:spPr>
-          <a:xfrm>
-            <a:off x="6309359" y="3383280"/>
-            <a:ext cx="5486400" cy="2148840"/>
-          </a:xfrm>
-          <a:prstGeom prst="roundRect">
-            <a:avLst>
-              <a:gd name="adj" fmla="val 5000"/>
-            </a:avLst>
-          </a:prstGeom>
-          <a:solidFill>
-            <a:srgbClr val="F2F4F7"/>
-          </a:solidFill>
-          <a:ln>
-            <a:noFill/>
-          </a:ln>
-        </p:spPr>
-        <p:style>
-          <a:lnRef idx="1">
-            <a:schemeClr val="accent1"/>
-          </a:lnRef>
-          <a:fillRef idx="3">
-            <a:schemeClr val="accent1"/>
-          </a:fillRef>
-          <a:effectRef idx="2">
-            <a:schemeClr val="accent1"/>
-          </a:effectRef>
-          <a:fontRef idx="minor">
-            <a:schemeClr val="lt1"/>
-          </a:fontRef>
-        </p:style>
-        <p:txBody>
-          <a:bodyPr rtlCol="0" anchor="ctr"/>
-          <a:lstStyle/>
-          <a:p>
-            <a:pPr algn="ctr"/>
-          </a:p>
-        </p:txBody>
-      </p:sp>
-      <p:sp>
-        <p:nvSpPr>
-          <p:cNvPr id="18" name="TextBox 17"/>
-          <p:cNvSpPr txBox="1"/>
-          <p:nvPr/>
-        </p:nvSpPr>
-        <p:spPr>
-          <a:xfrm>
-            <a:off x="6583679" y="3657600"/>
-            <a:ext cx="457200" cy="365760"/>
+              <a:rPr sz="1200" b="0">
+                <a:solidFill>
+                  <a:srgbClr val="000000"/>
+                </a:solidFill>
+                <a:latin typeface="Arial"/>
+              </a:rPr>
+              <a:t>0.25–0.4 FTE</a:t>
+            </a:r>
+          </a:p>
+        </p:txBody>
+      </p:sp>
+      <p:sp>
+        <p:nvSpPr>
+          <p:cNvPr id="32" name="TextBox 31"/>
+          <p:cNvSpPr txBox="1"/>
+          <p:nvPr/>
+        </p:nvSpPr>
+        <p:spPr>
+          <a:xfrm>
+            <a:off x="7315200" y="4937760"/>
+            <a:ext cx="4206240" cy="640080"/>
           </a:xfrm>
           <a:prstGeom prst="rect">
             <a:avLst/>
@@ -8193,90 +9023,20 @@
           <a:p>
             <a:pPr algn="l"/>
             <a:r>
-              <a:rPr sz="2200" b="1">
-                <a:solidFill>
-                  <a:srgbClr val="FF7200"/>
-                </a:solidFill>
-                <a:latin typeface="Arial"/>
-              </a:rPr>
-              <a:t>4</a:t>
-            </a:r>
-          </a:p>
-        </p:txBody>
-      </p:sp>
-      <p:sp>
-        <p:nvSpPr>
-          <p:cNvPr id="19" name="TextBox 18"/>
-          <p:cNvSpPr txBox="1"/>
-          <p:nvPr/>
-        </p:nvSpPr>
-        <p:spPr>
-          <a:xfrm>
-            <a:off x="7132319" y="3703320"/>
-            <a:ext cx="4389120" cy="411480"/>
-          </a:xfrm>
-          <a:prstGeom prst="rect">
-            <a:avLst/>
-          </a:prstGeom>
-          <a:noFill/>
-        </p:spPr>
-        <p:txBody>
-          <a:bodyPr wrap="square">
-            <a:spAutoFit/>
-          </a:bodyPr>
-          <a:lstStyle/>
-          <a:p>
-            <a:pPr algn="l"/>
-            <a:r>
-              <a:rPr sz="1800" b="1">
-                <a:solidFill>
-                  <a:srgbClr val="0C2577"/>
-                </a:solidFill>
-                <a:latin typeface="Arial"/>
-              </a:rPr>
-              <a:t>Set access policy</a:t>
-            </a:r>
-          </a:p>
-        </p:txBody>
-      </p:sp>
-      <p:sp>
-        <p:nvSpPr>
-          <p:cNvPr id="20" name="TextBox 19"/>
-          <p:cNvSpPr txBox="1"/>
-          <p:nvPr/>
-        </p:nvSpPr>
-        <p:spPr>
-          <a:xfrm>
-            <a:off x="6583679" y="4297680"/>
-            <a:ext cx="4937760" cy="1005840"/>
-          </a:xfrm>
-          <a:prstGeom prst="rect">
-            <a:avLst/>
-          </a:prstGeom>
-          <a:noFill/>
-        </p:spPr>
-        <p:txBody>
-          <a:bodyPr wrap="square">
-            <a:spAutoFit/>
-          </a:bodyPr>
-          <a:lstStyle/>
-          <a:p>
-            <a:pPr algn="l"/>
-            <a:r>
-              <a:rPr sz="1400" b="0">
-                <a:solidFill>
-                  <a:srgbClr val="5A5A5A"/>
-                </a:solidFill>
-                <a:latin typeface="Arial"/>
-              </a:rPr>
-              <a:t>CMO-backed rules: who gets MCP/API credentials; who gets Ask AT&amp;T domain access; anti-workaround stance.</a:t>
-            </a:r>
-          </a:p>
-        </p:txBody>
-      </p:sp>
-      <p:sp>
-        <p:nvSpPr>
-          <p:cNvPr id="21" name="TextBox 20"/>
+              <a:rPr sz="1200" b="0">
+                <a:solidFill>
+                  <a:srgbClr val="000000"/>
+                </a:solidFill>
+                <a:latin typeface="Arial"/>
+              </a:rPr>
+              <a:t>Vendor enablement, client onboarding, guardrails, usage reporting</a:t>
+            </a:r>
+          </a:p>
+        </p:txBody>
+      </p:sp>
+      <p:sp>
+        <p:nvSpPr>
+          <p:cNvPr id="33" name="TextBox 32"/>
           <p:cNvSpPr txBox="1"/>
           <p:nvPr/>
         </p:nvSpPr>
@@ -8311,7 +9071,7 @@
       </p:sp>
       <p:sp>
         <p:nvSpPr>
-          <p:cNvPr id="22" name="TextBox 21"/>
+          <p:cNvPr id="34" name="TextBox 33"/>
           <p:cNvSpPr txBox="1"/>
           <p:nvPr/>
         </p:nvSpPr>
@@ -8414,6 +9174,1702 @@
         <p:spPr>
           <a:xfrm>
             <a:off x="0" y="0"/>
+            <a:ext cx="12191695" cy="109728"/>
+          </a:xfrm>
+          <a:prstGeom prst="rect">
+            <a:avLst/>
+          </a:prstGeom>
+          <a:solidFill>
+            <a:srgbClr val="067AB4"/>
+          </a:solidFill>
+          <a:ln>
+            <a:noFill/>
+          </a:ln>
+        </p:spPr>
+        <p:style>
+          <a:lnRef idx="1">
+            <a:schemeClr val="accent1"/>
+          </a:lnRef>
+          <a:fillRef idx="3">
+            <a:schemeClr val="accent1"/>
+          </a:fillRef>
+          <a:effectRef idx="2">
+            <a:schemeClr val="accent1"/>
+          </a:effectRef>
+          <a:fontRef idx="minor">
+            <a:schemeClr val="lt1"/>
+          </a:fontRef>
+        </p:style>
+        <p:txBody>
+          <a:bodyPr rtlCol="0" anchor="ctr"/>
+          <a:lstStyle/>
+          <a:p>
+            <a:pPr algn="ctr"/>
+          </a:p>
+        </p:txBody>
+      </p:sp>
+      <p:sp>
+        <p:nvSpPr>
+          <p:cNvPr id="4" name="TextBox 3"/>
+          <p:cNvSpPr txBox="1"/>
+          <p:nvPr/>
+        </p:nvSpPr>
+        <p:spPr>
+          <a:xfrm>
+            <a:off x="548640" y="320040"/>
+            <a:ext cx="10972800" cy="411480"/>
+          </a:xfrm>
+          <a:prstGeom prst="rect">
+            <a:avLst/>
+          </a:prstGeom>
+          <a:noFill/>
+        </p:spPr>
+        <p:txBody>
+          <a:bodyPr wrap="square">
+            <a:spAutoFit/>
+          </a:bodyPr>
+          <a:lstStyle/>
+          <a:p>
+            <a:pPr algn="l"/>
+            <a:r>
+              <a:rPr sz="2600" b="1">
+                <a:solidFill>
+                  <a:srgbClr val="0C2577"/>
+                </a:solidFill>
+                <a:latin typeface="Arial"/>
+              </a:rPr>
+              <a:t>Knowledge Steward — proposed accountability</a:t>
+            </a:r>
+          </a:p>
+        </p:txBody>
+      </p:sp>
+      <p:sp>
+        <p:nvSpPr>
+          <p:cNvPr id="5" name="Oval 4"/>
+          <p:cNvSpPr/>
+          <p:nvPr/>
+        </p:nvSpPr>
+        <p:spPr>
+          <a:xfrm>
+            <a:off x="640080" y="1051560"/>
+            <a:ext cx="411480" cy="411480"/>
+          </a:xfrm>
+          <a:prstGeom prst="ellipse">
+            <a:avLst/>
+          </a:prstGeom>
+          <a:solidFill>
+            <a:srgbClr val="067AB4"/>
+          </a:solidFill>
+          <a:ln>
+            <a:noFill/>
+          </a:ln>
+        </p:spPr>
+        <p:style>
+          <a:lnRef idx="1">
+            <a:schemeClr val="accent1"/>
+          </a:lnRef>
+          <a:fillRef idx="3">
+            <a:schemeClr val="accent1"/>
+          </a:fillRef>
+          <a:effectRef idx="2">
+            <a:schemeClr val="accent1"/>
+          </a:effectRef>
+          <a:fontRef idx="minor">
+            <a:schemeClr val="lt1"/>
+          </a:fontRef>
+        </p:style>
+        <p:txBody>
+          <a:bodyPr rtlCol="0" anchor="ctr"/>
+          <a:lstStyle/>
+          <a:p>
+            <a:pPr algn="ctr"/>
+          </a:p>
+        </p:txBody>
+      </p:sp>
+      <p:sp>
+        <p:nvSpPr>
+          <p:cNvPr id="6" name="TextBox 5"/>
+          <p:cNvSpPr txBox="1"/>
+          <p:nvPr/>
+        </p:nvSpPr>
+        <p:spPr>
+          <a:xfrm>
+            <a:off x="713232" y="1097280"/>
+            <a:ext cx="320040" cy="320040"/>
+          </a:xfrm>
+          <a:prstGeom prst="rect">
+            <a:avLst/>
+          </a:prstGeom>
+          <a:noFill/>
+        </p:spPr>
+        <p:txBody>
+          <a:bodyPr wrap="square">
+            <a:spAutoFit/>
+          </a:bodyPr>
+          <a:lstStyle/>
+          <a:p>
+            <a:pPr algn="ctr"/>
+            <a:r>
+              <a:rPr sz="1400" b="1">
+                <a:solidFill>
+                  <a:srgbClr val="FFFFFF"/>
+                </a:solidFill>
+                <a:latin typeface="Arial"/>
+              </a:rPr>
+              <a:t>1</a:t>
+            </a:r>
+          </a:p>
+        </p:txBody>
+      </p:sp>
+      <p:sp>
+        <p:nvSpPr>
+          <p:cNvPr id="7" name="TextBox 6"/>
+          <p:cNvSpPr txBox="1"/>
+          <p:nvPr/>
+        </p:nvSpPr>
+        <p:spPr>
+          <a:xfrm>
+            <a:off x="1280160" y="1097280"/>
+            <a:ext cx="10058400" cy="548640"/>
+          </a:xfrm>
+          <a:prstGeom prst="rect">
+            <a:avLst/>
+          </a:prstGeom>
+          <a:noFill/>
+        </p:spPr>
+        <p:txBody>
+          <a:bodyPr wrap="square">
+            <a:spAutoFit/>
+          </a:bodyPr>
+          <a:lstStyle/>
+          <a:p>
+            <a:pPr algn="l"/>
+            <a:r>
+              <a:rPr sz="1600" b="0">
+                <a:solidFill>
+                  <a:srgbClr val="000000"/>
+                </a:solidFill>
+                <a:latin typeface="Arial"/>
+              </a:rPr>
+              <a:t>Own the golden-question bank and truth-answer currency with SME panel.</a:t>
+            </a:r>
+          </a:p>
+        </p:txBody>
+      </p:sp>
+      <p:sp>
+        <p:nvSpPr>
+          <p:cNvPr id="8" name="Oval 7"/>
+          <p:cNvSpPr/>
+          <p:nvPr/>
+        </p:nvSpPr>
+        <p:spPr>
+          <a:xfrm>
+            <a:off x="640080" y="1828800"/>
+            <a:ext cx="411480" cy="411480"/>
+          </a:xfrm>
+          <a:prstGeom prst="ellipse">
+            <a:avLst/>
+          </a:prstGeom>
+          <a:solidFill>
+            <a:srgbClr val="067AB4"/>
+          </a:solidFill>
+          <a:ln>
+            <a:noFill/>
+          </a:ln>
+        </p:spPr>
+        <p:style>
+          <a:lnRef idx="1">
+            <a:schemeClr val="accent1"/>
+          </a:lnRef>
+          <a:fillRef idx="3">
+            <a:schemeClr val="accent1"/>
+          </a:fillRef>
+          <a:effectRef idx="2">
+            <a:schemeClr val="accent1"/>
+          </a:effectRef>
+          <a:fontRef idx="minor">
+            <a:schemeClr val="lt1"/>
+          </a:fontRef>
+        </p:style>
+        <p:txBody>
+          <a:bodyPr rtlCol="0" anchor="ctr"/>
+          <a:lstStyle/>
+          <a:p>
+            <a:pPr algn="ctr"/>
+          </a:p>
+        </p:txBody>
+      </p:sp>
+      <p:sp>
+        <p:nvSpPr>
+          <p:cNvPr id="9" name="TextBox 8"/>
+          <p:cNvSpPr txBox="1"/>
+          <p:nvPr/>
+        </p:nvSpPr>
+        <p:spPr>
+          <a:xfrm>
+            <a:off x="713232" y="1874520"/>
+            <a:ext cx="320040" cy="320040"/>
+          </a:xfrm>
+          <a:prstGeom prst="rect">
+            <a:avLst/>
+          </a:prstGeom>
+          <a:noFill/>
+        </p:spPr>
+        <p:txBody>
+          <a:bodyPr wrap="square">
+            <a:spAutoFit/>
+          </a:bodyPr>
+          <a:lstStyle/>
+          <a:p>
+            <a:pPr algn="ctr"/>
+            <a:r>
+              <a:rPr sz="1400" b="1">
+                <a:solidFill>
+                  <a:srgbClr val="FFFFFF"/>
+                </a:solidFill>
+                <a:latin typeface="Arial"/>
+              </a:rPr>
+              <a:t>2</a:t>
+            </a:r>
+          </a:p>
+        </p:txBody>
+      </p:sp>
+      <p:sp>
+        <p:nvSpPr>
+          <p:cNvPr id="10" name="TextBox 9"/>
+          <p:cNvSpPr txBox="1"/>
+          <p:nvPr/>
+        </p:nvSpPr>
+        <p:spPr>
+          <a:xfrm>
+            <a:off x="1280160" y="1874520"/>
+            <a:ext cx="10058400" cy="548640"/>
+          </a:xfrm>
+          <a:prstGeom prst="rect">
+            <a:avLst/>
+          </a:prstGeom>
+          <a:noFill/>
+        </p:spPr>
+        <p:txBody>
+          <a:bodyPr wrap="square">
+            <a:spAutoFit/>
+          </a:bodyPr>
+          <a:lstStyle/>
+          <a:p>
+            <a:pPr algn="l"/>
+            <a:r>
+              <a:rPr sz="1600" b="0">
+                <a:solidFill>
+                  <a:srgbClr val="000000"/>
+                </a:solidFill>
+                <a:latin typeface="Arial"/>
+              </a:rPr>
+              <a:t>Approve / deny domain access requests against CMO-endorsed policy.</a:t>
+            </a:r>
+          </a:p>
+        </p:txBody>
+      </p:sp>
+      <p:sp>
+        <p:nvSpPr>
+          <p:cNvPr id="11" name="Oval 10"/>
+          <p:cNvSpPr/>
+          <p:nvPr/>
+        </p:nvSpPr>
+        <p:spPr>
+          <a:xfrm>
+            <a:off x="640080" y="2606039"/>
+            <a:ext cx="411480" cy="411480"/>
+          </a:xfrm>
+          <a:prstGeom prst="ellipse">
+            <a:avLst/>
+          </a:prstGeom>
+          <a:solidFill>
+            <a:srgbClr val="067AB4"/>
+          </a:solidFill>
+          <a:ln>
+            <a:noFill/>
+          </a:ln>
+        </p:spPr>
+        <p:style>
+          <a:lnRef idx="1">
+            <a:schemeClr val="accent1"/>
+          </a:lnRef>
+          <a:fillRef idx="3">
+            <a:schemeClr val="accent1"/>
+          </a:fillRef>
+          <a:effectRef idx="2">
+            <a:schemeClr val="accent1"/>
+          </a:effectRef>
+          <a:fontRef idx="minor">
+            <a:schemeClr val="lt1"/>
+          </a:fontRef>
+        </p:style>
+        <p:txBody>
+          <a:bodyPr rtlCol="0" anchor="ctr"/>
+          <a:lstStyle/>
+          <a:p>
+            <a:pPr algn="ctr"/>
+          </a:p>
+        </p:txBody>
+      </p:sp>
+      <p:sp>
+        <p:nvSpPr>
+          <p:cNvPr id="12" name="TextBox 11"/>
+          <p:cNvSpPr txBox="1"/>
+          <p:nvPr/>
+        </p:nvSpPr>
+        <p:spPr>
+          <a:xfrm>
+            <a:off x="713232" y="2651759"/>
+            <a:ext cx="320040" cy="320040"/>
+          </a:xfrm>
+          <a:prstGeom prst="rect">
+            <a:avLst/>
+          </a:prstGeom>
+          <a:noFill/>
+        </p:spPr>
+        <p:txBody>
+          <a:bodyPr wrap="square">
+            <a:spAutoFit/>
+          </a:bodyPr>
+          <a:lstStyle/>
+          <a:p>
+            <a:pPr algn="ctr"/>
+            <a:r>
+              <a:rPr sz="1400" b="1">
+                <a:solidFill>
+                  <a:srgbClr val="FFFFFF"/>
+                </a:solidFill>
+                <a:latin typeface="Arial"/>
+              </a:rPr>
+              <a:t>3</a:t>
+            </a:r>
+          </a:p>
+        </p:txBody>
+      </p:sp>
+      <p:sp>
+        <p:nvSpPr>
+          <p:cNvPr id="13" name="TextBox 12"/>
+          <p:cNvSpPr txBox="1"/>
+          <p:nvPr/>
+        </p:nvSpPr>
+        <p:spPr>
+          <a:xfrm>
+            <a:off x="1280160" y="2651759"/>
+            <a:ext cx="10058400" cy="548640"/>
+          </a:xfrm>
+          <a:prstGeom prst="rect">
+            <a:avLst/>
+          </a:prstGeom>
+          <a:noFill/>
+        </p:spPr>
+        <p:txBody>
+          <a:bodyPr wrap="square">
+            <a:spAutoFit/>
+          </a:bodyPr>
+          <a:lstStyle/>
+          <a:p>
+            <a:pPr algn="l"/>
+            <a:r>
+              <a:rPr sz="1600" b="0">
+                <a:solidFill>
+                  <a:srgbClr val="000000"/>
+                </a:solidFill>
+                <a:latin typeface="Arial"/>
+              </a:rPr>
+              <a:t>Monitor answer quality metrics and escalate wrong-answer incidents.</a:t>
+            </a:r>
+          </a:p>
+        </p:txBody>
+      </p:sp>
+      <p:sp>
+        <p:nvSpPr>
+          <p:cNvPr id="14" name="Oval 13"/>
+          <p:cNvSpPr/>
+          <p:nvPr/>
+        </p:nvSpPr>
+        <p:spPr>
+          <a:xfrm>
+            <a:off x="640080" y="3383279"/>
+            <a:ext cx="411480" cy="411480"/>
+          </a:xfrm>
+          <a:prstGeom prst="ellipse">
+            <a:avLst/>
+          </a:prstGeom>
+          <a:solidFill>
+            <a:srgbClr val="067AB4"/>
+          </a:solidFill>
+          <a:ln>
+            <a:noFill/>
+          </a:ln>
+        </p:spPr>
+        <p:style>
+          <a:lnRef idx="1">
+            <a:schemeClr val="accent1"/>
+          </a:lnRef>
+          <a:fillRef idx="3">
+            <a:schemeClr val="accent1"/>
+          </a:fillRef>
+          <a:effectRef idx="2">
+            <a:schemeClr val="accent1"/>
+          </a:effectRef>
+          <a:fontRef idx="minor">
+            <a:schemeClr val="lt1"/>
+          </a:fontRef>
+        </p:style>
+        <p:txBody>
+          <a:bodyPr rtlCol="0" anchor="ctr"/>
+          <a:lstStyle/>
+          <a:p>
+            <a:pPr algn="ctr"/>
+          </a:p>
+        </p:txBody>
+      </p:sp>
+      <p:sp>
+        <p:nvSpPr>
+          <p:cNvPr id="15" name="TextBox 14"/>
+          <p:cNvSpPr txBox="1"/>
+          <p:nvPr/>
+        </p:nvSpPr>
+        <p:spPr>
+          <a:xfrm>
+            <a:off x="713232" y="3428999"/>
+            <a:ext cx="320040" cy="320040"/>
+          </a:xfrm>
+          <a:prstGeom prst="rect">
+            <a:avLst/>
+          </a:prstGeom>
+          <a:noFill/>
+        </p:spPr>
+        <p:txBody>
+          <a:bodyPr wrap="square">
+            <a:spAutoFit/>
+          </a:bodyPr>
+          <a:lstStyle/>
+          <a:p>
+            <a:pPr algn="ctr"/>
+            <a:r>
+              <a:rPr sz="1400" b="1">
+                <a:solidFill>
+                  <a:srgbClr val="FFFFFF"/>
+                </a:solidFill>
+                <a:latin typeface="Arial"/>
+              </a:rPr>
+              <a:t>4</a:t>
+            </a:r>
+          </a:p>
+        </p:txBody>
+      </p:sp>
+      <p:sp>
+        <p:nvSpPr>
+          <p:cNvPr id="16" name="TextBox 15"/>
+          <p:cNvSpPr txBox="1"/>
+          <p:nvPr/>
+        </p:nvSpPr>
+        <p:spPr>
+          <a:xfrm>
+            <a:off x="1280160" y="3428999"/>
+            <a:ext cx="10058400" cy="548640"/>
+          </a:xfrm>
+          <a:prstGeom prst="rect">
+            <a:avLst/>
+          </a:prstGeom>
+          <a:noFill/>
+        </p:spPr>
+        <p:txBody>
+          <a:bodyPr wrap="square">
+            <a:spAutoFit/>
+          </a:bodyPr>
+          <a:lstStyle/>
+          <a:p>
+            <a:pPr algn="l"/>
+            <a:r>
+              <a:rPr sz="1600" b="0">
+                <a:solidFill>
+                  <a:srgbClr val="000000"/>
+                </a:solidFill>
+                <a:latin typeface="Arial"/>
+              </a:rPr>
+              <a:t>Coordinate Insightful → Ask Docs sync issues and metadata gaps.</a:t>
+            </a:r>
+          </a:p>
+        </p:txBody>
+      </p:sp>
+      <p:sp>
+        <p:nvSpPr>
+          <p:cNvPr id="17" name="Oval 16"/>
+          <p:cNvSpPr/>
+          <p:nvPr/>
+        </p:nvSpPr>
+        <p:spPr>
+          <a:xfrm>
+            <a:off x="640080" y="4160520"/>
+            <a:ext cx="411480" cy="411480"/>
+          </a:xfrm>
+          <a:prstGeom prst="ellipse">
+            <a:avLst/>
+          </a:prstGeom>
+          <a:solidFill>
+            <a:srgbClr val="067AB4"/>
+          </a:solidFill>
+          <a:ln>
+            <a:noFill/>
+          </a:ln>
+        </p:spPr>
+        <p:style>
+          <a:lnRef idx="1">
+            <a:schemeClr val="accent1"/>
+          </a:lnRef>
+          <a:fillRef idx="3">
+            <a:schemeClr val="accent1"/>
+          </a:fillRef>
+          <a:effectRef idx="2">
+            <a:schemeClr val="accent1"/>
+          </a:effectRef>
+          <a:fontRef idx="minor">
+            <a:schemeClr val="lt1"/>
+          </a:fontRef>
+        </p:style>
+        <p:txBody>
+          <a:bodyPr rtlCol="0" anchor="ctr"/>
+          <a:lstStyle/>
+          <a:p>
+            <a:pPr algn="ctr"/>
+          </a:p>
+        </p:txBody>
+      </p:sp>
+      <p:sp>
+        <p:nvSpPr>
+          <p:cNvPr id="18" name="TextBox 17"/>
+          <p:cNvSpPr txBox="1"/>
+          <p:nvPr/>
+        </p:nvSpPr>
+        <p:spPr>
+          <a:xfrm>
+            <a:off x="713232" y="4206240"/>
+            <a:ext cx="320040" cy="320040"/>
+          </a:xfrm>
+          <a:prstGeom prst="rect">
+            <a:avLst/>
+          </a:prstGeom>
+          <a:noFill/>
+        </p:spPr>
+        <p:txBody>
+          <a:bodyPr wrap="square">
+            <a:spAutoFit/>
+          </a:bodyPr>
+          <a:lstStyle/>
+          <a:p>
+            <a:pPr algn="ctr"/>
+            <a:r>
+              <a:rPr sz="1400" b="1">
+                <a:solidFill>
+                  <a:srgbClr val="FFFFFF"/>
+                </a:solidFill>
+                <a:latin typeface="Arial"/>
+              </a:rPr>
+              <a:t>5</a:t>
+            </a:r>
+          </a:p>
+        </p:txBody>
+      </p:sp>
+      <p:sp>
+        <p:nvSpPr>
+          <p:cNvPr id="19" name="TextBox 18"/>
+          <p:cNvSpPr txBox="1"/>
+          <p:nvPr/>
+        </p:nvSpPr>
+        <p:spPr>
+          <a:xfrm>
+            <a:off x="1280160" y="4206240"/>
+            <a:ext cx="10058400" cy="548640"/>
+          </a:xfrm>
+          <a:prstGeom prst="rect">
+            <a:avLst/>
+          </a:prstGeom>
+          <a:noFill/>
+        </p:spPr>
+        <p:txBody>
+          <a:bodyPr wrap="square">
+            <a:spAutoFit/>
+          </a:bodyPr>
+          <a:lstStyle/>
+          <a:p>
+            <a:pPr algn="l"/>
+            <a:r>
+              <a:rPr sz="1600" b="0">
+                <a:solidFill>
+                  <a:srgbClr val="000000"/>
+                </a:solidFill>
+                <a:latin typeface="Arial"/>
+              </a:rPr>
+              <a:t>Partner with MCP/API owner so agent experiences cite the same sources of truth.</a:t>
+            </a:r>
+          </a:p>
+        </p:txBody>
+      </p:sp>
+      <p:sp>
+        <p:nvSpPr>
+          <p:cNvPr id="20" name="Oval 19"/>
+          <p:cNvSpPr/>
+          <p:nvPr/>
+        </p:nvSpPr>
+        <p:spPr>
+          <a:xfrm>
+            <a:off x="640080" y="4937760"/>
+            <a:ext cx="411480" cy="411480"/>
+          </a:xfrm>
+          <a:prstGeom prst="ellipse">
+            <a:avLst/>
+          </a:prstGeom>
+          <a:solidFill>
+            <a:srgbClr val="067AB4"/>
+          </a:solidFill>
+          <a:ln>
+            <a:noFill/>
+          </a:ln>
+        </p:spPr>
+        <p:style>
+          <a:lnRef idx="1">
+            <a:schemeClr val="accent1"/>
+          </a:lnRef>
+          <a:fillRef idx="3">
+            <a:schemeClr val="accent1"/>
+          </a:fillRef>
+          <a:effectRef idx="2">
+            <a:schemeClr val="accent1"/>
+          </a:effectRef>
+          <a:fontRef idx="minor">
+            <a:schemeClr val="lt1"/>
+          </a:fontRef>
+        </p:style>
+        <p:txBody>
+          <a:bodyPr rtlCol="0" anchor="ctr"/>
+          <a:lstStyle/>
+          <a:p>
+            <a:pPr algn="ctr"/>
+          </a:p>
+        </p:txBody>
+      </p:sp>
+      <p:sp>
+        <p:nvSpPr>
+          <p:cNvPr id="21" name="TextBox 20"/>
+          <p:cNvSpPr txBox="1"/>
+          <p:nvPr/>
+        </p:nvSpPr>
+        <p:spPr>
+          <a:xfrm>
+            <a:off x="713232" y="4983480"/>
+            <a:ext cx="320040" cy="320040"/>
+          </a:xfrm>
+          <a:prstGeom prst="rect">
+            <a:avLst/>
+          </a:prstGeom>
+          <a:noFill/>
+        </p:spPr>
+        <p:txBody>
+          <a:bodyPr wrap="square">
+            <a:spAutoFit/>
+          </a:bodyPr>
+          <a:lstStyle/>
+          <a:p>
+            <a:pPr algn="ctr"/>
+            <a:r>
+              <a:rPr sz="1400" b="1">
+                <a:solidFill>
+                  <a:srgbClr val="FFFFFF"/>
+                </a:solidFill>
+                <a:latin typeface="Arial"/>
+              </a:rPr>
+              <a:t>6</a:t>
+            </a:r>
+          </a:p>
+        </p:txBody>
+      </p:sp>
+      <p:sp>
+        <p:nvSpPr>
+          <p:cNvPr id="22" name="TextBox 21"/>
+          <p:cNvSpPr txBox="1"/>
+          <p:nvPr/>
+        </p:nvSpPr>
+        <p:spPr>
+          <a:xfrm>
+            <a:off x="1280160" y="4983480"/>
+            <a:ext cx="10058400" cy="548640"/>
+          </a:xfrm>
+          <a:prstGeom prst="rect">
+            <a:avLst/>
+          </a:prstGeom>
+          <a:noFill/>
+        </p:spPr>
+        <p:txBody>
+          <a:bodyPr wrap="square">
+            <a:spAutoFit/>
+          </a:bodyPr>
+          <a:lstStyle/>
+          <a:p>
+            <a:pPr algn="l"/>
+            <a:r>
+              <a:rPr sz="1600" b="0">
+                <a:solidFill>
+                  <a:srgbClr val="000000"/>
+                </a:solidFill>
+                <a:latin typeface="Arial"/>
+              </a:rPr>
+              <a:t>Report quarterly to CMO: quality, usage, risks, and capacity needs.</a:t>
+            </a:r>
+          </a:p>
+        </p:txBody>
+      </p:sp>
+      <p:sp>
+        <p:nvSpPr>
+          <p:cNvPr id="23" name="TextBox 22"/>
+          <p:cNvSpPr txBox="1"/>
+          <p:nvPr/>
+        </p:nvSpPr>
+        <p:spPr>
+          <a:xfrm>
+            <a:off x="548640" y="6446520"/>
+            <a:ext cx="7315200" cy="274320"/>
+          </a:xfrm>
+          <a:prstGeom prst="rect">
+            <a:avLst/>
+          </a:prstGeom>
+          <a:noFill/>
+        </p:spPr>
+        <p:txBody>
+          <a:bodyPr wrap="square">
+            <a:spAutoFit/>
+          </a:bodyPr>
+          <a:lstStyle/>
+          <a:p>
+            <a:pPr algn="l"/>
+            <a:r>
+              <a:rPr sz="1000" b="0">
+                <a:solidFill>
+                  <a:srgbClr val="5A5A5A"/>
+                </a:solidFill>
+                <a:latin typeface="Arial"/>
+              </a:rPr>
+              <a:t>AT&amp;T Marketing | Insightful AI Access</a:t>
+            </a:r>
+          </a:p>
+        </p:txBody>
+      </p:sp>
+      <p:sp>
+        <p:nvSpPr>
+          <p:cNvPr id="24" name="TextBox 23"/>
+          <p:cNvSpPr txBox="1"/>
+          <p:nvPr/>
+        </p:nvSpPr>
+        <p:spPr>
+          <a:xfrm>
+            <a:off x="10515600" y="6446520"/>
+            <a:ext cx="1188720" cy="274320"/>
+          </a:xfrm>
+          <a:prstGeom prst="rect">
+            <a:avLst/>
+          </a:prstGeom>
+          <a:noFill/>
+        </p:spPr>
+        <p:txBody>
+          <a:bodyPr wrap="square">
+            <a:spAutoFit/>
+          </a:bodyPr>
+          <a:lstStyle/>
+          <a:p>
+            <a:pPr algn="r"/>
+            <a:r>
+              <a:rPr sz="1000" b="0">
+                <a:solidFill>
+                  <a:srgbClr val="5A5A5A"/>
+                </a:solidFill>
+                <a:latin typeface="Arial"/>
+              </a:rPr>
+              <a:t>15</a:t>
+            </a:r>
+          </a:p>
+        </p:txBody>
+      </p:sp>
+    </p:spTree>
+  </p:cSld>
+  <p:clrMapOvr>
+    <a:masterClrMapping/>
+  </p:clrMapOvr>
+</p:sld>
+</file>
+
+<file path=ppt/slides/slide16.xml><?xml version="1.0" encoding="utf-8"?>
+<p:sld xmlns:a="http://schemas.openxmlformats.org/drawingml/2006/main" xmlns:p="http://schemas.openxmlformats.org/presentationml/2006/main" xmlns:r="http://schemas.openxmlformats.org/officeDocument/2006/relationships">
+  <p:cSld>
+    <p:spTree>
+      <p:nvGrpSpPr>
+        <p:cNvPr id="1" name=""/>
+        <p:cNvGrpSpPr/>
+        <p:nvPr/>
+      </p:nvGrpSpPr>
+      <p:grpSpPr/>
+      <p:sp>
+        <p:nvSpPr>
+          <p:cNvPr id="2" name="Rectangle 1"/>
+          <p:cNvSpPr/>
+          <p:nvPr/>
+        </p:nvSpPr>
+        <p:spPr>
+          <a:xfrm>
+            <a:off x="0" y="0"/>
+            <a:ext cx="12191695" cy="6858000"/>
+          </a:xfrm>
+          <a:prstGeom prst="rect">
+            <a:avLst/>
+          </a:prstGeom>
+          <a:solidFill>
+            <a:srgbClr val="FFFFFF"/>
+          </a:solidFill>
+          <a:ln>
+            <a:noFill/>
+          </a:ln>
+        </p:spPr>
+        <p:style>
+          <a:lnRef idx="1">
+            <a:schemeClr val="accent1"/>
+          </a:lnRef>
+          <a:fillRef idx="3">
+            <a:schemeClr val="accent1"/>
+          </a:fillRef>
+          <a:effectRef idx="2">
+            <a:schemeClr val="accent1"/>
+          </a:effectRef>
+          <a:fontRef idx="minor">
+            <a:schemeClr val="lt1"/>
+          </a:fontRef>
+        </p:style>
+        <p:txBody>
+          <a:bodyPr rtlCol="0" anchor="ctr"/>
+          <a:lstStyle/>
+          <a:p>
+            <a:pPr algn="ctr"/>
+          </a:p>
+        </p:txBody>
+      </p:sp>
+      <p:sp>
+        <p:nvSpPr>
+          <p:cNvPr id="3" name="Rectangle 2"/>
+          <p:cNvSpPr/>
+          <p:nvPr/>
+        </p:nvSpPr>
+        <p:spPr>
+          <a:xfrm>
+            <a:off x="0" y="0"/>
+            <a:ext cx="12191695" cy="109728"/>
+          </a:xfrm>
+          <a:prstGeom prst="rect">
+            <a:avLst/>
+          </a:prstGeom>
+          <a:solidFill>
+            <a:srgbClr val="067AB4"/>
+          </a:solidFill>
+          <a:ln>
+            <a:noFill/>
+          </a:ln>
+        </p:spPr>
+        <p:style>
+          <a:lnRef idx="1">
+            <a:schemeClr val="accent1"/>
+          </a:lnRef>
+          <a:fillRef idx="3">
+            <a:schemeClr val="accent1"/>
+          </a:fillRef>
+          <a:effectRef idx="2">
+            <a:schemeClr val="accent1"/>
+          </a:effectRef>
+          <a:fontRef idx="minor">
+            <a:schemeClr val="lt1"/>
+          </a:fontRef>
+        </p:style>
+        <p:txBody>
+          <a:bodyPr rtlCol="0" anchor="ctr"/>
+          <a:lstStyle/>
+          <a:p>
+            <a:pPr algn="ctr"/>
+          </a:p>
+        </p:txBody>
+      </p:sp>
+      <p:sp>
+        <p:nvSpPr>
+          <p:cNvPr id="4" name="TextBox 3"/>
+          <p:cNvSpPr txBox="1"/>
+          <p:nvPr/>
+        </p:nvSpPr>
+        <p:spPr>
+          <a:xfrm>
+            <a:off x="548640" y="320040"/>
+            <a:ext cx="10972800" cy="411480"/>
+          </a:xfrm>
+          <a:prstGeom prst="rect">
+            <a:avLst/>
+          </a:prstGeom>
+          <a:noFill/>
+        </p:spPr>
+        <p:txBody>
+          <a:bodyPr wrap="square">
+            <a:spAutoFit/>
+          </a:bodyPr>
+          <a:lstStyle/>
+          <a:p>
+            <a:pPr algn="l"/>
+            <a:r>
+              <a:rPr sz="2800" b="1">
+                <a:solidFill>
+                  <a:srgbClr val="0C2577"/>
+                </a:solidFill>
+                <a:latin typeface="Arial"/>
+              </a:rPr>
+              <a:t>Decision requested</a:t>
+            </a:r>
+          </a:p>
+        </p:txBody>
+      </p:sp>
+      <p:sp>
+        <p:nvSpPr>
+          <p:cNvPr id="5" name="Rounded Rectangle 4"/>
+          <p:cNvSpPr/>
+          <p:nvPr/>
+        </p:nvSpPr>
+        <p:spPr>
+          <a:xfrm>
+            <a:off x="548640" y="1005840"/>
+            <a:ext cx="5486400" cy="2148840"/>
+          </a:xfrm>
+          <a:prstGeom prst="roundRect">
+            <a:avLst>
+              <a:gd name="adj" fmla="val 5000"/>
+            </a:avLst>
+          </a:prstGeom>
+          <a:solidFill>
+            <a:srgbClr val="F2F4F7"/>
+          </a:solidFill>
+          <a:ln>
+            <a:noFill/>
+          </a:ln>
+        </p:spPr>
+        <p:style>
+          <a:lnRef idx="1">
+            <a:schemeClr val="accent1"/>
+          </a:lnRef>
+          <a:fillRef idx="3">
+            <a:schemeClr val="accent1"/>
+          </a:fillRef>
+          <a:effectRef idx="2">
+            <a:schemeClr val="accent1"/>
+          </a:effectRef>
+          <a:fontRef idx="minor">
+            <a:schemeClr val="lt1"/>
+          </a:fontRef>
+        </p:style>
+        <p:txBody>
+          <a:bodyPr rtlCol="0" anchor="ctr"/>
+          <a:lstStyle/>
+          <a:p>
+            <a:pPr algn="ctr"/>
+          </a:p>
+        </p:txBody>
+      </p:sp>
+      <p:sp>
+        <p:nvSpPr>
+          <p:cNvPr id="6" name="TextBox 5"/>
+          <p:cNvSpPr txBox="1"/>
+          <p:nvPr/>
+        </p:nvSpPr>
+        <p:spPr>
+          <a:xfrm>
+            <a:off x="822960" y="1280160"/>
+            <a:ext cx="457200" cy="365760"/>
+          </a:xfrm>
+          <a:prstGeom prst="rect">
+            <a:avLst/>
+          </a:prstGeom>
+          <a:noFill/>
+        </p:spPr>
+        <p:txBody>
+          <a:bodyPr wrap="square">
+            <a:spAutoFit/>
+          </a:bodyPr>
+          <a:lstStyle/>
+          <a:p>
+            <a:pPr algn="l"/>
+            <a:r>
+              <a:rPr sz="2200" b="1">
+                <a:solidFill>
+                  <a:srgbClr val="FF7200"/>
+                </a:solidFill>
+                <a:latin typeface="Arial"/>
+              </a:rPr>
+              <a:t>1</a:t>
+            </a:r>
+          </a:p>
+        </p:txBody>
+      </p:sp>
+      <p:sp>
+        <p:nvSpPr>
+          <p:cNvPr id="7" name="TextBox 6"/>
+          <p:cNvSpPr txBox="1"/>
+          <p:nvPr/>
+        </p:nvSpPr>
+        <p:spPr>
+          <a:xfrm>
+            <a:off x="1371600" y="1325880"/>
+            <a:ext cx="4389120" cy="411480"/>
+          </a:xfrm>
+          <a:prstGeom prst="rect">
+            <a:avLst/>
+          </a:prstGeom>
+          <a:noFill/>
+        </p:spPr>
+        <p:txBody>
+          <a:bodyPr wrap="square">
+            <a:spAutoFit/>
+          </a:bodyPr>
+          <a:lstStyle/>
+          <a:p>
+            <a:pPr algn="l"/>
+            <a:r>
+              <a:rPr sz="1800" b="1">
+                <a:solidFill>
+                  <a:srgbClr val="0C2577"/>
+                </a:solidFill>
+                <a:latin typeface="Arial"/>
+              </a:rPr>
+              <a:t>Approve MCP + API path</a:t>
+            </a:r>
+          </a:p>
+        </p:txBody>
+      </p:sp>
+      <p:sp>
+        <p:nvSpPr>
+          <p:cNvPr id="8" name="TextBox 7"/>
+          <p:cNvSpPr txBox="1"/>
+          <p:nvPr/>
+        </p:nvSpPr>
+        <p:spPr>
+          <a:xfrm>
+            <a:off x="822960" y="1920240"/>
+            <a:ext cx="4937760" cy="1005840"/>
+          </a:xfrm>
+          <a:prstGeom prst="rect">
+            <a:avLst/>
+          </a:prstGeom>
+          <a:noFill/>
+        </p:spPr>
+        <p:txBody>
+          <a:bodyPr wrap="square">
+            <a:spAutoFit/>
+          </a:bodyPr>
+          <a:lstStyle/>
+          <a:p>
+            <a:pPr algn="l"/>
+            <a:r>
+              <a:rPr sz="1400" b="0">
+                <a:solidFill>
+                  <a:srgbClr val="5A5A5A"/>
+                </a:solidFill>
+                <a:latin typeface="Arial"/>
+              </a:rPr>
+              <a:t>Authorize commercial/security engagement to enable Insightful MCP and API for sanctioned AI projects.</a:t>
+            </a:r>
+          </a:p>
+        </p:txBody>
+      </p:sp>
+      <p:sp>
+        <p:nvSpPr>
+          <p:cNvPr id="9" name="Rounded Rectangle 8"/>
+          <p:cNvSpPr/>
+          <p:nvPr/>
+        </p:nvSpPr>
+        <p:spPr>
+          <a:xfrm>
+            <a:off x="6309359" y="1005840"/>
+            <a:ext cx="5486400" cy="2148840"/>
+          </a:xfrm>
+          <a:prstGeom prst="roundRect">
+            <a:avLst>
+              <a:gd name="adj" fmla="val 5000"/>
+            </a:avLst>
+          </a:prstGeom>
+          <a:solidFill>
+            <a:srgbClr val="F2F4F7"/>
+          </a:solidFill>
+          <a:ln>
+            <a:noFill/>
+          </a:ln>
+        </p:spPr>
+        <p:style>
+          <a:lnRef idx="1">
+            <a:schemeClr val="accent1"/>
+          </a:lnRef>
+          <a:fillRef idx="3">
+            <a:schemeClr val="accent1"/>
+          </a:fillRef>
+          <a:effectRef idx="2">
+            <a:schemeClr val="accent1"/>
+          </a:effectRef>
+          <a:fontRef idx="minor">
+            <a:schemeClr val="lt1"/>
+          </a:fontRef>
+        </p:style>
+        <p:txBody>
+          <a:bodyPr rtlCol="0" anchor="ctr"/>
+          <a:lstStyle/>
+          <a:p>
+            <a:pPr algn="ctr"/>
+          </a:p>
+        </p:txBody>
+      </p:sp>
+      <p:sp>
+        <p:nvSpPr>
+          <p:cNvPr id="10" name="TextBox 9"/>
+          <p:cNvSpPr txBox="1"/>
+          <p:nvPr/>
+        </p:nvSpPr>
+        <p:spPr>
+          <a:xfrm>
+            <a:off x="6583679" y="1280160"/>
+            <a:ext cx="457200" cy="365760"/>
+          </a:xfrm>
+          <a:prstGeom prst="rect">
+            <a:avLst/>
+          </a:prstGeom>
+          <a:noFill/>
+        </p:spPr>
+        <p:txBody>
+          <a:bodyPr wrap="square">
+            <a:spAutoFit/>
+          </a:bodyPr>
+          <a:lstStyle/>
+          <a:p>
+            <a:pPr algn="l"/>
+            <a:r>
+              <a:rPr sz="2200" b="1">
+                <a:solidFill>
+                  <a:srgbClr val="FF7200"/>
+                </a:solidFill>
+                <a:latin typeface="Arial"/>
+              </a:rPr>
+              <a:t>2</a:t>
+            </a:r>
+          </a:p>
+        </p:txBody>
+      </p:sp>
+      <p:sp>
+        <p:nvSpPr>
+          <p:cNvPr id="11" name="TextBox 10"/>
+          <p:cNvSpPr txBox="1"/>
+          <p:nvPr/>
+        </p:nvSpPr>
+        <p:spPr>
+          <a:xfrm>
+            <a:off x="7132319" y="1325880"/>
+            <a:ext cx="4389120" cy="411480"/>
+          </a:xfrm>
+          <a:prstGeom prst="rect">
+            <a:avLst/>
+          </a:prstGeom>
+          <a:noFill/>
+        </p:spPr>
+        <p:txBody>
+          <a:bodyPr wrap="square">
+            <a:spAutoFit/>
+          </a:bodyPr>
+          <a:lstStyle/>
+          <a:p>
+            <a:pPr algn="l"/>
+            <a:r>
+              <a:rPr sz="1800" b="1">
+                <a:solidFill>
+                  <a:srgbClr val="0C2577"/>
+                </a:solidFill>
+                <a:latin typeface="Arial"/>
+              </a:rPr>
+              <a:t>Name program owners</a:t>
+            </a:r>
+          </a:p>
+        </p:txBody>
+      </p:sp>
+      <p:sp>
+        <p:nvSpPr>
+          <p:cNvPr id="12" name="TextBox 11"/>
+          <p:cNvSpPr txBox="1"/>
+          <p:nvPr/>
+        </p:nvSpPr>
+        <p:spPr>
+          <a:xfrm>
+            <a:off x="6583679" y="1920240"/>
+            <a:ext cx="4937760" cy="1005840"/>
+          </a:xfrm>
+          <a:prstGeom prst="rect">
+            <a:avLst/>
+          </a:prstGeom>
+          <a:noFill/>
+        </p:spPr>
+        <p:txBody>
+          <a:bodyPr wrap="square">
+            <a:spAutoFit/>
+          </a:bodyPr>
+          <a:lstStyle/>
+          <a:p>
+            <a:pPr algn="l"/>
+            <a:r>
+              <a:rPr sz="1400" b="0">
+                <a:solidFill>
+                  <a:srgbClr val="5A5A5A"/>
+                </a:solidFill>
+                <a:latin typeface="Arial"/>
+              </a:rPr>
+              <a:t>Assign MCP/API owner and interim Knowledge Steward; confirm SME panel.</a:t>
+            </a:r>
+          </a:p>
+        </p:txBody>
+      </p:sp>
+      <p:sp>
+        <p:nvSpPr>
+          <p:cNvPr id="13" name="Rounded Rectangle 12"/>
+          <p:cNvSpPr/>
+          <p:nvPr/>
+        </p:nvSpPr>
+        <p:spPr>
+          <a:xfrm>
+            <a:off x="548640" y="3383280"/>
+            <a:ext cx="5486400" cy="2148840"/>
+          </a:xfrm>
+          <a:prstGeom prst="roundRect">
+            <a:avLst>
+              <a:gd name="adj" fmla="val 5000"/>
+            </a:avLst>
+          </a:prstGeom>
+          <a:solidFill>
+            <a:srgbClr val="F2F4F7"/>
+          </a:solidFill>
+          <a:ln>
+            <a:noFill/>
+          </a:ln>
+        </p:spPr>
+        <p:style>
+          <a:lnRef idx="1">
+            <a:schemeClr val="accent1"/>
+          </a:lnRef>
+          <a:fillRef idx="3">
+            <a:schemeClr val="accent1"/>
+          </a:fillRef>
+          <a:effectRef idx="2">
+            <a:schemeClr val="accent1"/>
+          </a:effectRef>
+          <a:fontRef idx="minor">
+            <a:schemeClr val="lt1"/>
+          </a:fontRef>
+        </p:style>
+        <p:txBody>
+          <a:bodyPr rtlCol="0" anchor="ctr"/>
+          <a:lstStyle/>
+          <a:p>
+            <a:pPr algn="ctr"/>
+          </a:p>
+        </p:txBody>
+      </p:sp>
+      <p:sp>
+        <p:nvSpPr>
+          <p:cNvPr id="14" name="TextBox 13"/>
+          <p:cNvSpPr txBox="1"/>
+          <p:nvPr/>
+        </p:nvSpPr>
+        <p:spPr>
+          <a:xfrm>
+            <a:off x="822960" y="3657600"/>
+            <a:ext cx="457200" cy="365760"/>
+          </a:xfrm>
+          <a:prstGeom prst="rect">
+            <a:avLst/>
+          </a:prstGeom>
+          <a:noFill/>
+        </p:spPr>
+        <p:txBody>
+          <a:bodyPr wrap="square">
+            <a:spAutoFit/>
+          </a:bodyPr>
+          <a:lstStyle/>
+          <a:p>
+            <a:pPr algn="l"/>
+            <a:r>
+              <a:rPr sz="2200" b="1">
+                <a:solidFill>
+                  <a:srgbClr val="FF7200"/>
+                </a:solidFill>
+                <a:latin typeface="Arial"/>
+              </a:rPr>
+              <a:t>3</a:t>
+            </a:r>
+          </a:p>
+        </p:txBody>
+      </p:sp>
+      <p:sp>
+        <p:nvSpPr>
+          <p:cNvPr id="15" name="TextBox 14"/>
+          <p:cNvSpPr txBox="1"/>
+          <p:nvPr/>
+        </p:nvSpPr>
+        <p:spPr>
+          <a:xfrm>
+            <a:off x="1371600" y="3703320"/>
+            <a:ext cx="4389120" cy="411480"/>
+          </a:xfrm>
+          <a:prstGeom prst="rect">
+            <a:avLst/>
+          </a:prstGeom>
+          <a:noFill/>
+        </p:spPr>
+        <p:txBody>
+          <a:bodyPr wrap="square">
+            <a:spAutoFit/>
+          </a:bodyPr>
+          <a:lstStyle/>
+          <a:p>
+            <a:pPr algn="l"/>
+            <a:r>
+              <a:rPr sz="1800" b="1">
+                <a:solidFill>
+                  <a:srgbClr val="0C2577"/>
+                </a:solidFill>
+                <a:latin typeface="Arial"/>
+              </a:rPr>
+              <a:t>Fund domain as side goal</a:t>
+            </a:r>
+          </a:p>
+        </p:txBody>
+      </p:sp>
+      <p:sp>
+        <p:nvSpPr>
+          <p:cNvPr id="16" name="TextBox 15"/>
+          <p:cNvSpPr txBox="1"/>
+          <p:nvPr/>
+        </p:nvSpPr>
+        <p:spPr>
+          <a:xfrm>
+            <a:off x="822960" y="4297680"/>
+            <a:ext cx="4937760" cy="1005840"/>
+          </a:xfrm>
+          <a:prstGeom prst="rect">
+            <a:avLst/>
+          </a:prstGeom>
+          <a:noFill/>
+        </p:spPr>
+        <p:txBody>
+          <a:bodyPr wrap="square">
+            <a:spAutoFit/>
+          </a:bodyPr>
+          <a:lstStyle/>
+          <a:p>
+            <a:pPr algn="l"/>
+            <a:r>
+              <a:rPr sz="1400" b="0">
+                <a:solidFill>
+                  <a:srgbClr val="5A5A5A"/>
+                </a:solidFill>
+                <a:latin typeface="Arial"/>
+              </a:rPr>
+              <a:t>Endorse golden-question stand-up and steward operating model — without blocking agent demand on domain go-live.</a:t>
+            </a:r>
+          </a:p>
+        </p:txBody>
+      </p:sp>
+      <p:sp>
+        <p:nvSpPr>
+          <p:cNvPr id="17" name="Rounded Rectangle 16"/>
+          <p:cNvSpPr/>
+          <p:nvPr/>
+        </p:nvSpPr>
+        <p:spPr>
+          <a:xfrm>
+            <a:off x="6309359" y="3383280"/>
+            <a:ext cx="5486400" cy="2148840"/>
+          </a:xfrm>
+          <a:prstGeom prst="roundRect">
+            <a:avLst>
+              <a:gd name="adj" fmla="val 5000"/>
+            </a:avLst>
+          </a:prstGeom>
+          <a:solidFill>
+            <a:srgbClr val="F2F4F7"/>
+          </a:solidFill>
+          <a:ln>
+            <a:noFill/>
+          </a:ln>
+        </p:spPr>
+        <p:style>
+          <a:lnRef idx="1">
+            <a:schemeClr val="accent1"/>
+          </a:lnRef>
+          <a:fillRef idx="3">
+            <a:schemeClr val="accent1"/>
+          </a:fillRef>
+          <a:effectRef idx="2">
+            <a:schemeClr val="accent1"/>
+          </a:effectRef>
+          <a:fontRef idx="minor">
+            <a:schemeClr val="lt1"/>
+          </a:fontRef>
+        </p:style>
+        <p:txBody>
+          <a:bodyPr rtlCol="0" anchor="ctr"/>
+          <a:lstStyle/>
+          <a:p>
+            <a:pPr algn="ctr"/>
+          </a:p>
+        </p:txBody>
+      </p:sp>
+      <p:sp>
+        <p:nvSpPr>
+          <p:cNvPr id="18" name="TextBox 17"/>
+          <p:cNvSpPr txBox="1"/>
+          <p:nvPr/>
+        </p:nvSpPr>
+        <p:spPr>
+          <a:xfrm>
+            <a:off x="6583679" y="3657600"/>
+            <a:ext cx="457200" cy="365760"/>
+          </a:xfrm>
+          <a:prstGeom prst="rect">
+            <a:avLst/>
+          </a:prstGeom>
+          <a:noFill/>
+        </p:spPr>
+        <p:txBody>
+          <a:bodyPr wrap="square">
+            <a:spAutoFit/>
+          </a:bodyPr>
+          <a:lstStyle/>
+          <a:p>
+            <a:pPr algn="l"/>
+            <a:r>
+              <a:rPr sz="2200" b="1">
+                <a:solidFill>
+                  <a:srgbClr val="FF7200"/>
+                </a:solidFill>
+                <a:latin typeface="Arial"/>
+              </a:rPr>
+              <a:t>4</a:t>
+            </a:r>
+          </a:p>
+        </p:txBody>
+      </p:sp>
+      <p:sp>
+        <p:nvSpPr>
+          <p:cNvPr id="19" name="TextBox 18"/>
+          <p:cNvSpPr txBox="1"/>
+          <p:nvPr/>
+        </p:nvSpPr>
+        <p:spPr>
+          <a:xfrm>
+            <a:off x="7132319" y="3703320"/>
+            <a:ext cx="4389120" cy="411480"/>
+          </a:xfrm>
+          <a:prstGeom prst="rect">
+            <a:avLst/>
+          </a:prstGeom>
+          <a:noFill/>
+        </p:spPr>
+        <p:txBody>
+          <a:bodyPr wrap="square">
+            <a:spAutoFit/>
+          </a:bodyPr>
+          <a:lstStyle/>
+          <a:p>
+            <a:pPr algn="l"/>
+            <a:r>
+              <a:rPr sz="1800" b="1">
+                <a:solidFill>
+                  <a:srgbClr val="0C2577"/>
+                </a:solidFill>
+                <a:latin typeface="Arial"/>
+              </a:rPr>
+              <a:t>Set access policy</a:t>
+            </a:r>
+          </a:p>
+        </p:txBody>
+      </p:sp>
+      <p:sp>
+        <p:nvSpPr>
+          <p:cNvPr id="20" name="TextBox 19"/>
+          <p:cNvSpPr txBox="1"/>
+          <p:nvPr/>
+        </p:nvSpPr>
+        <p:spPr>
+          <a:xfrm>
+            <a:off x="6583679" y="4297680"/>
+            <a:ext cx="4937760" cy="1005840"/>
+          </a:xfrm>
+          <a:prstGeom prst="rect">
+            <a:avLst/>
+          </a:prstGeom>
+          <a:noFill/>
+        </p:spPr>
+        <p:txBody>
+          <a:bodyPr wrap="square">
+            <a:spAutoFit/>
+          </a:bodyPr>
+          <a:lstStyle/>
+          <a:p>
+            <a:pPr algn="l"/>
+            <a:r>
+              <a:rPr sz="1400" b="0">
+                <a:solidFill>
+                  <a:srgbClr val="5A5A5A"/>
+                </a:solidFill>
+                <a:latin typeface="Arial"/>
+              </a:rPr>
+              <a:t>CMO-backed rules: who gets MCP/API credentials; who gets Ask AT&amp;T domain access; anti-workaround stance.</a:t>
+            </a:r>
+          </a:p>
+        </p:txBody>
+      </p:sp>
+      <p:sp>
+        <p:nvSpPr>
+          <p:cNvPr id="21" name="TextBox 20"/>
+          <p:cNvSpPr txBox="1"/>
+          <p:nvPr/>
+        </p:nvSpPr>
+        <p:spPr>
+          <a:xfrm>
+            <a:off x="548640" y="6446520"/>
+            <a:ext cx="7315200" cy="274320"/>
+          </a:xfrm>
+          <a:prstGeom prst="rect">
+            <a:avLst/>
+          </a:prstGeom>
+          <a:noFill/>
+        </p:spPr>
+        <p:txBody>
+          <a:bodyPr wrap="square">
+            <a:spAutoFit/>
+          </a:bodyPr>
+          <a:lstStyle/>
+          <a:p>
+            <a:pPr algn="l"/>
+            <a:r>
+              <a:rPr sz="1000" b="0">
+                <a:solidFill>
+                  <a:srgbClr val="5A5A5A"/>
+                </a:solidFill>
+                <a:latin typeface="Arial"/>
+              </a:rPr>
+              <a:t>AT&amp;T Marketing | Insightful AI Access</a:t>
+            </a:r>
+          </a:p>
+        </p:txBody>
+      </p:sp>
+      <p:sp>
+        <p:nvSpPr>
+          <p:cNvPr id="22" name="TextBox 21"/>
+          <p:cNvSpPr txBox="1"/>
+          <p:nvPr/>
+        </p:nvSpPr>
+        <p:spPr>
+          <a:xfrm>
+            <a:off x="10515600" y="6446520"/>
+            <a:ext cx="1188720" cy="274320"/>
+          </a:xfrm>
+          <a:prstGeom prst="rect">
+            <a:avLst/>
+          </a:prstGeom>
+          <a:noFill/>
+        </p:spPr>
+        <p:txBody>
+          <a:bodyPr wrap="square">
+            <a:spAutoFit/>
+          </a:bodyPr>
+          <a:lstStyle/>
+          <a:p>
+            <a:pPr algn="r"/>
+            <a:r>
+              <a:rPr sz="1000" b="0">
+                <a:solidFill>
+                  <a:srgbClr val="5A5A5A"/>
+                </a:solidFill>
+                <a:latin typeface="Arial"/>
+              </a:rPr>
+              <a:t>16</a:t>
+            </a:r>
+          </a:p>
+        </p:txBody>
+      </p:sp>
+    </p:spTree>
+  </p:cSld>
+  <p:clrMapOvr>
+    <a:masterClrMapping/>
+  </p:clrMapOvr>
+</p:sld>
+</file>
+
+<file path=ppt/slides/slide17.xml><?xml version="1.0" encoding="utf-8"?>
+<p:sld xmlns:a="http://schemas.openxmlformats.org/drawingml/2006/main" xmlns:p="http://schemas.openxmlformats.org/presentationml/2006/main" xmlns:r="http://schemas.openxmlformats.org/officeDocument/2006/relationships">
+  <p:cSld>
+    <p:spTree>
+      <p:nvGrpSpPr>
+        <p:cNvPr id="1" name=""/>
+        <p:cNvGrpSpPr/>
+        <p:nvPr/>
+      </p:nvGrpSpPr>
+      <p:grpSpPr/>
+      <p:sp>
+        <p:nvSpPr>
+          <p:cNvPr id="2" name="Rectangle 1"/>
+          <p:cNvSpPr/>
+          <p:nvPr/>
+        </p:nvSpPr>
+        <p:spPr>
+          <a:xfrm>
+            <a:off x="0" y="0"/>
+            <a:ext cx="12191695" cy="6858000"/>
+          </a:xfrm>
+          <a:prstGeom prst="rect">
+            <a:avLst/>
+          </a:prstGeom>
+          <a:solidFill>
+            <a:srgbClr val="FFFFFF"/>
+          </a:solidFill>
+          <a:ln>
+            <a:noFill/>
+          </a:ln>
+        </p:spPr>
+        <p:style>
+          <a:lnRef idx="1">
+            <a:schemeClr val="accent1"/>
+          </a:lnRef>
+          <a:fillRef idx="3">
+            <a:schemeClr val="accent1"/>
+          </a:fillRef>
+          <a:effectRef idx="2">
+            <a:schemeClr val="accent1"/>
+          </a:effectRef>
+          <a:fontRef idx="minor">
+            <a:schemeClr val="lt1"/>
+          </a:fontRef>
+        </p:style>
+        <p:txBody>
+          <a:bodyPr rtlCol="0" anchor="ctr"/>
+          <a:lstStyle/>
+          <a:p>
+            <a:pPr algn="ctr"/>
+          </a:p>
+        </p:txBody>
+      </p:sp>
+      <p:sp>
+        <p:nvSpPr>
+          <p:cNvPr id="3" name="Rectangle 2"/>
+          <p:cNvSpPr/>
+          <p:nvPr/>
+        </p:nvSpPr>
+        <p:spPr>
+          <a:xfrm>
+            <a:off x="0" y="0"/>
             <a:ext cx="12191695" cy="6858000"/>
           </a:xfrm>
           <a:prstGeom prst="rect">
@@ -13122,8 +15578,8 @@
         </p:nvSpPr>
         <p:spPr>
           <a:xfrm>
-            <a:off x="548640" y="365760"/>
-            <a:ext cx="10972800" cy="457200"/>
+            <a:off x="457200" y="256032"/>
+            <a:ext cx="10972800" cy="365760"/>
           </a:xfrm>
           <a:prstGeom prst="rect">
             <a:avLst/>
@@ -13138,32 +15594,502 @@
           <a:p>
             <a:pPr algn="l"/>
             <a:r>
-              <a:rPr sz="2800" b="1">
+              <a:rPr sz="2400" b="1">
                 <a:solidFill>
                   <a:srgbClr val="0C2577"/>
                 </a:solidFill>
                 <a:latin typeface="Arial"/>
               </a:rPr>
-              <a:t>Recommendation</a:t>
-            </a:r>
-          </a:p>
-        </p:txBody>
-      </p:sp>
-      <p:sp>
-        <p:nvSpPr>
-          <p:cNvPr id="5" name="Rounded Rectangle 4"/>
+              <a:t>Architecture wireframe — how the options connect</a:t>
+            </a:r>
+          </a:p>
+        </p:txBody>
+      </p:sp>
+      <p:sp>
+        <p:nvSpPr>
+          <p:cNvPr id="5" name="TextBox 4"/>
+          <p:cNvSpPr txBox="1"/>
+          <p:nvPr/>
+        </p:nvSpPr>
+        <p:spPr>
+          <a:xfrm>
+            <a:off x="457200" y="658368"/>
+            <a:ext cx="11247120" cy="274320"/>
+          </a:xfrm>
+          <a:prstGeom prst="rect">
+            <a:avLst/>
+          </a:prstGeom>
+          <a:noFill/>
+        </p:spPr>
+        <p:txBody>
+          <a:bodyPr wrap="square">
+            <a:spAutoFit/>
+          </a:bodyPr>
+          <a:lstStyle/>
+          <a:p>
+            <a:pPr algn="l"/>
+            <a:r>
+              <a:rPr sz="1300" b="0">
+                <a:solidFill>
+                  <a:srgbClr val="5A5A5A"/>
+                </a:solidFill>
+                <a:latin typeface="Arial"/>
+              </a:rPr>
+              <a:t>One source of curated knowledge. Three sanctioned connection patterns. No shadow copies.</a:t>
+            </a:r>
+          </a:p>
+        </p:txBody>
+      </p:sp>
+      <p:sp>
+        <p:nvSpPr>
+          <p:cNvPr id="6" name="Rounded Rectangle 5"/>
           <p:cNvSpPr/>
           <p:nvPr/>
         </p:nvSpPr>
         <p:spPr>
           <a:xfrm>
-            <a:off x="548640" y="1051560"/>
-            <a:ext cx="11064240" cy="1463040"/>
+            <a:off x="457200" y="1051560"/>
+            <a:ext cx="3383280" cy="868680"/>
           </a:xfrm>
           <a:prstGeom prst="roundRect">
             <a:avLst>
-              <a:gd name="adj" fmla="val 5000"/>
+              <a:gd name="adj" fmla="val 8000"/>
             </a:avLst>
+          </a:prstGeom>
+          <a:solidFill>
+            <a:srgbClr val="F2F4F7"/>
+          </a:solidFill>
+          <a:ln w="19050">
+            <a:solidFill>
+              <a:srgbClr val="FF7200"/>
+            </a:solidFill>
+          </a:ln>
+        </p:spPr>
+        <p:style>
+          <a:lnRef idx="1">
+            <a:schemeClr val="accent1"/>
+          </a:lnRef>
+          <a:fillRef idx="3">
+            <a:schemeClr val="accent1"/>
+          </a:fillRef>
+          <a:effectRef idx="2">
+            <a:schemeClr val="accent1"/>
+          </a:effectRef>
+          <a:fontRef idx="minor">
+            <a:schemeClr val="lt1"/>
+          </a:fontRef>
+        </p:style>
+        <p:txBody>
+          <a:bodyPr rtlCol="0" anchor="ctr"/>
+          <a:lstStyle/>
+          <a:p>
+            <a:pPr algn="ctr"/>
+          </a:p>
+        </p:txBody>
+      </p:sp>
+      <p:sp>
+        <p:nvSpPr>
+          <p:cNvPr id="7" name="TextBox 6"/>
+          <p:cNvSpPr txBox="1"/>
+          <p:nvPr/>
+        </p:nvSpPr>
+        <p:spPr>
+          <a:xfrm>
+            <a:off x="566928" y="1161288"/>
+            <a:ext cx="3163824" cy="320040"/>
+          </a:xfrm>
+          <a:prstGeom prst="rect">
+            <a:avLst/>
+          </a:prstGeom>
+          <a:noFill/>
+        </p:spPr>
+        <p:txBody>
+          <a:bodyPr wrap="square">
+            <a:spAutoFit/>
+          </a:bodyPr>
+          <a:lstStyle/>
+          <a:p>
+            <a:pPr algn="ctr"/>
+            <a:r>
+              <a:rPr sz="1200" b="1">
+                <a:solidFill>
+                  <a:srgbClr val="0C2577"/>
+                </a:solidFill>
+                <a:latin typeface="Arial"/>
+              </a:rPr>
+              <a:t>Agent builders</a:t>
+            </a:r>
+          </a:p>
+        </p:txBody>
+      </p:sp>
+      <p:sp>
+        <p:nvSpPr>
+          <p:cNvPr id="8" name="TextBox 7"/>
+          <p:cNvSpPr txBox="1"/>
+          <p:nvPr/>
+        </p:nvSpPr>
+        <p:spPr>
+          <a:xfrm>
+            <a:off x="548640" y="1435608"/>
+            <a:ext cx="3200400" cy="411480"/>
+          </a:xfrm>
+          <a:prstGeom prst="rect">
+            <a:avLst/>
+          </a:prstGeom>
+          <a:noFill/>
+        </p:spPr>
+        <p:txBody>
+          <a:bodyPr wrap="square">
+            <a:spAutoFit/>
+          </a:bodyPr>
+          <a:lstStyle/>
+          <a:p>
+            <a:pPr algn="ctr"/>
+            <a:r>
+              <a:rPr sz="1000" b="0">
+                <a:solidFill>
+                  <a:srgbClr val="5A5A5A"/>
+                </a:solidFill>
+                <a:latin typeface="Arial"/>
+              </a:rPr>
+              <a:t>Cursor / Copilot agents / internal agent platforms</a:t>
+            </a:r>
+          </a:p>
+        </p:txBody>
+      </p:sp>
+      <p:sp>
+        <p:nvSpPr>
+          <p:cNvPr id="9" name="Rounded Rectangle 8"/>
+          <p:cNvSpPr/>
+          <p:nvPr/>
+        </p:nvSpPr>
+        <p:spPr>
+          <a:xfrm>
+            <a:off x="4389120" y="1051560"/>
+            <a:ext cx="3383280" cy="868680"/>
+          </a:xfrm>
+          <a:prstGeom prst="roundRect">
+            <a:avLst>
+              <a:gd name="adj" fmla="val 8000"/>
+            </a:avLst>
+          </a:prstGeom>
+          <a:solidFill>
+            <a:srgbClr val="F2F4F7"/>
+          </a:solidFill>
+          <a:ln w="19050">
+            <a:solidFill>
+              <a:srgbClr val="067AB4"/>
+            </a:solidFill>
+          </a:ln>
+        </p:spPr>
+        <p:style>
+          <a:lnRef idx="1">
+            <a:schemeClr val="accent1"/>
+          </a:lnRef>
+          <a:fillRef idx="3">
+            <a:schemeClr val="accent1"/>
+          </a:fillRef>
+          <a:effectRef idx="2">
+            <a:schemeClr val="accent1"/>
+          </a:effectRef>
+          <a:fontRef idx="minor">
+            <a:schemeClr val="lt1"/>
+          </a:fontRef>
+        </p:style>
+        <p:txBody>
+          <a:bodyPr rtlCol="0" anchor="ctr"/>
+          <a:lstStyle/>
+          <a:p>
+            <a:pPr algn="ctr"/>
+          </a:p>
+        </p:txBody>
+      </p:sp>
+      <p:sp>
+        <p:nvSpPr>
+          <p:cNvPr id="10" name="TextBox 9"/>
+          <p:cNvSpPr txBox="1"/>
+          <p:nvPr/>
+        </p:nvSpPr>
+        <p:spPr>
+          <a:xfrm>
+            <a:off x="4498848" y="1161288"/>
+            <a:ext cx="3163824" cy="320040"/>
+          </a:xfrm>
+          <a:prstGeom prst="rect">
+            <a:avLst/>
+          </a:prstGeom>
+          <a:noFill/>
+        </p:spPr>
+        <p:txBody>
+          <a:bodyPr wrap="square">
+            <a:spAutoFit/>
+          </a:bodyPr>
+          <a:lstStyle/>
+          <a:p>
+            <a:pPr algn="ctr"/>
+            <a:r>
+              <a:rPr sz="1200" b="1">
+                <a:solidFill>
+                  <a:srgbClr val="0C2577"/>
+                </a:solidFill>
+                <a:latin typeface="Arial"/>
+              </a:rPr>
+              <a:t>Custom AI-backed tools</a:t>
+            </a:r>
+          </a:p>
+        </p:txBody>
+      </p:sp>
+      <p:sp>
+        <p:nvSpPr>
+          <p:cNvPr id="11" name="TextBox 10"/>
+          <p:cNvSpPr txBox="1"/>
+          <p:nvPr/>
+        </p:nvSpPr>
+        <p:spPr>
+          <a:xfrm>
+            <a:off x="4480560" y="1435608"/>
+            <a:ext cx="3200400" cy="411480"/>
+          </a:xfrm>
+          <a:prstGeom prst="rect">
+            <a:avLst/>
+          </a:prstGeom>
+          <a:noFill/>
+        </p:spPr>
+        <p:txBody>
+          <a:bodyPr wrap="square">
+            <a:spAutoFit/>
+          </a:bodyPr>
+          <a:lstStyle/>
+          <a:p>
+            <a:pPr algn="ctr"/>
+            <a:r>
+              <a:rPr sz="1000" b="0">
+                <a:solidFill>
+                  <a:srgbClr val="5A5A5A"/>
+                </a:solidFill>
+                <a:latin typeface="Arial"/>
+              </a:rPr>
+              <a:t>Apps, intranet, backends needing Search / Lookup</a:t>
+            </a:r>
+          </a:p>
+        </p:txBody>
+      </p:sp>
+      <p:sp>
+        <p:nvSpPr>
+          <p:cNvPr id="12" name="Rounded Rectangle 11"/>
+          <p:cNvSpPr/>
+          <p:nvPr/>
+        </p:nvSpPr>
+        <p:spPr>
+          <a:xfrm>
+            <a:off x="8321040" y="1051560"/>
+            <a:ext cx="3383280" cy="868680"/>
+          </a:xfrm>
+          <a:prstGeom prst="roundRect">
+            <a:avLst>
+              <a:gd name="adj" fmla="val 8000"/>
+            </a:avLst>
+          </a:prstGeom>
+          <a:solidFill>
+            <a:srgbClr val="F2F4F7"/>
+          </a:solidFill>
+          <a:ln w="19050">
+            <a:solidFill>
+              <a:srgbClr val="0C2577"/>
+            </a:solidFill>
+          </a:ln>
+        </p:spPr>
+        <p:style>
+          <a:lnRef idx="1">
+            <a:schemeClr val="accent1"/>
+          </a:lnRef>
+          <a:fillRef idx="3">
+            <a:schemeClr val="accent1"/>
+          </a:fillRef>
+          <a:effectRef idx="2">
+            <a:schemeClr val="accent1"/>
+          </a:effectRef>
+          <a:fontRef idx="minor">
+            <a:schemeClr val="lt1"/>
+          </a:fontRef>
+        </p:style>
+        <p:txBody>
+          <a:bodyPr rtlCol="0" anchor="ctr"/>
+          <a:lstStyle/>
+          <a:p>
+            <a:pPr algn="ctr"/>
+          </a:p>
+        </p:txBody>
+      </p:sp>
+      <p:sp>
+        <p:nvSpPr>
+          <p:cNvPr id="13" name="TextBox 12"/>
+          <p:cNvSpPr txBox="1"/>
+          <p:nvPr/>
+        </p:nvSpPr>
+        <p:spPr>
+          <a:xfrm>
+            <a:off x="8430768" y="1161288"/>
+            <a:ext cx="3163824" cy="320040"/>
+          </a:xfrm>
+          <a:prstGeom prst="rect">
+            <a:avLst/>
+          </a:prstGeom>
+          <a:noFill/>
+        </p:spPr>
+        <p:txBody>
+          <a:bodyPr wrap="square">
+            <a:spAutoFit/>
+          </a:bodyPr>
+          <a:lstStyle/>
+          <a:p>
+            <a:pPr algn="ctr"/>
+            <a:r>
+              <a:rPr sz="1200" b="1">
+                <a:solidFill>
+                  <a:srgbClr val="0C2577"/>
+                </a:solidFill>
+                <a:latin typeface="Arial"/>
+              </a:rPr>
+              <a:t>Employees via Ask AT&amp;T</a:t>
+            </a:r>
+          </a:p>
+        </p:txBody>
+      </p:sp>
+      <p:sp>
+        <p:nvSpPr>
+          <p:cNvPr id="14" name="TextBox 13"/>
+          <p:cNvSpPr txBox="1"/>
+          <p:nvPr/>
+        </p:nvSpPr>
+        <p:spPr>
+          <a:xfrm>
+            <a:off x="8412480" y="1435608"/>
+            <a:ext cx="3200400" cy="411480"/>
+          </a:xfrm>
+          <a:prstGeom prst="rect">
+            <a:avLst/>
+          </a:prstGeom>
+          <a:noFill/>
+        </p:spPr>
+        <p:txBody>
+          <a:bodyPr wrap="square">
+            <a:spAutoFit/>
+          </a:bodyPr>
+          <a:lstStyle/>
+          <a:p>
+            <a:pPr algn="ctr"/>
+            <a:r>
+              <a:rPr sz="1000" b="0">
+                <a:solidFill>
+                  <a:srgbClr val="5A5A5A"/>
+                </a:solidFill>
+                <a:latin typeface="Arial"/>
+              </a:rPr>
+              <a:t>Ask Docs Q&amp;A experience</a:t>
+            </a:r>
+          </a:p>
+        </p:txBody>
+      </p:sp>
+      <p:sp>
+        <p:nvSpPr>
+          <p:cNvPr id="15" name="Rectangle 14"/>
+          <p:cNvSpPr/>
+          <p:nvPr/>
+        </p:nvSpPr>
+        <p:spPr>
+          <a:xfrm>
+            <a:off x="2103120" y="1920240"/>
+            <a:ext cx="31750" cy="320040"/>
+          </a:xfrm>
+          <a:prstGeom prst="rect">
+            <a:avLst/>
+          </a:prstGeom>
+          <a:solidFill>
+            <a:srgbClr val="FF7200"/>
+          </a:solidFill>
+          <a:ln>
+            <a:noFill/>
+          </a:ln>
+        </p:spPr>
+        <p:style>
+          <a:lnRef idx="1">
+            <a:schemeClr val="accent1"/>
+          </a:lnRef>
+          <a:fillRef idx="3">
+            <a:schemeClr val="accent1"/>
+          </a:fillRef>
+          <a:effectRef idx="2">
+            <a:schemeClr val="accent1"/>
+          </a:effectRef>
+          <a:fontRef idx="minor">
+            <a:schemeClr val="lt1"/>
+          </a:fontRef>
+        </p:style>
+        <p:txBody>
+          <a:bodyPr rtlCol="0" anchor="ctr"/>
+          <a:lstStyle/>
+          <a:p>
+            <a:pPr algn="ctr"/>
+          </a:p>
+        </p:txBody>
+      </p:sp>
+      <p:sp>
+        <p:nvSpPr>
+          <p:cNvPr id="16" name="Rectangle 15"/>
+          <p:cNvSpPr/>
+          <p:nvPr/>
+        </p:nvSpPr>
+        <p:spPr>
+          <a:xfrm>
+            <a:off x="6035040" y="1920240"/>
+            <a:ext cx="31750" cy="320040"/>
+          </a:xfrm>
+          <a:prstGeom prst="rect">
+            <a:avLst/>
+          </a:prstGeom>
+          <a:solidFill>
+            <a:srgbClr val="067AB4"/>
+          </a:solidFill>
+          <a:ln>
+            <a:noFill/>
+          </a:ln>
+        </p:spPr>
+        <p:style>
+          <a:lnRef idx="1">
+            <a:schemeClr val="accent1"/>
+          </a:lnRef>
+          <a:fillRef idx="3">
+            <a:schemeClr val="accent1"/>
+          </a:fillRef>
+          <a:effectRef idx="2">
+            <a:schemeClr val="accent1"/>
+          </a:effectRef>
+          <a:fontRef idx="minor">
+            <a:schemeClr val="lt1"/>
+          </a:fontRef>
+        </p:style>
+        <p:txBody>
+          <a:bodyPr rtlCol="0" anchor="ctr"/>
+          <a:lstStyle/>
+          <a:p>
+            <a:pPr algn="ctr"/>
+          </a:p>
+        </p:txBody>
+      </p:sp>
+      <p:sp>
+        <p:nvSpPr>
+          <p:cNvPr id="17" name="Rectangle 16"/>
+          <p:cNvSpPr/>
+          <p:nvPr/>
+        </p:nvSpPr>
+        <p:spPr>
+          <a:xfrm>
+            <a:off x="9966960" y="1920240"/>
+            <a:ext cx="31750" cy="320040"/>
+          </a:xfrm>
+          <a:prstGeom prst="rect">
+            <a:avLst/>
           </a:prstGeom>
           <a:solidFill>
             <a:srgbClr val="0C2577"/>
@@ -13196,14 +16122,863 @@
       </p:sp>
       <p:sp>
         <p:nvSpPr>
-          <p:cNvPr id="6" name="TextBox 5"/>
-          <p:cNvSpPr txBox="1"/>
-          <p:nvPr/>
-        </p:nvSpPr>
-        <p:spPr>
-          <a:xfrm>
-            <a:off x="868680" y="1280160"/>
-            <a:ext cx="10424160" cy="1005840"/>
+          <p:cNvPr id="18" name="Rounded Rectangle 17"/>
+          <p:cNvSpPr/>
+          <p:nvPr/>
+        </p:nvSpPr>
+        <p:spPr>
+          <a:xfrm>
+            <a:off x="457200" y="2286000"/>
+            <a:ext cx="3383280" cy="960120"/>
+          </a:xfrm>
+          <a:prstGeom prst="roundRect">
+            <a:avLst>
+              <a:gd name="adj" fmla="val 8000"/>
+            </a:avLst>
+          </a:prstGeom>
+          <a:solidFill>
+            <a:srgbClr val="FFFFFF"/>
+          </a:solidFill>
+          <a:ln w="19050">
+            <a:solidFill>
+              <a:srgbClr val="FF7200"/>
+            </a:solidFill>
+          </a:ln>
+        </p:spPr>
+        <p:style>
+          <a:lnRef idx="1">
+            <a:schemeClr val="accent1"/>
+          </a:lnRef>
+          <a:fillRef idx="3">
+            <a:schemeClr val="accent1"/>
+          </a:fillRef>
+          <a:effectRef idx="2">
+            <a:schemeClr val="accent1"/>
+          </a:effectRef>
+          <a:fontRef idx="minor">
+            <a:schemeClr val="lt1"/>
+          </a:fontRef>
+        </p:style>
+        <p:txBody>
+          <a:bodyPr rtlCol="0" anchor="ctr"/>
+          <a:lstStyle/>
+          <a:p>
+            <a:pPr algn="ctr"/>
+          </a:p>
+        </p:txBody>
+      </p:sp>
+      <p:sp>
+        <p:nvSpPr>
+          <p:cNvPr id="19" name="TextBox 18"/>
+          <p:cNvSpPr txBox="1"/>
+          <p:nvPr/>
+        </p:nvSpPr>
+        <p:spPr>
+          <a:xfrm>
+            <a:off x="566928" y="2395728"/>
+            <a:ext cx="3163824" cy="320040"/>
+          </a:xfrm>
+          <a:prstGeom prst="rect">
+            <a:avLst/>
+          </a:prstGeom>
+          <a:noFill/>
+        </p:spPr>
+        <p:txBody>
+          <a:bodyPr wrap="square">
+            <a:spAutoFit/>
+          </a:bodyPr>
+          <a:lstStyle/>
+          <a:p>
+            <a:pPr algn="ctr"/>
+            <a:r>
+              <a:rPr sz="1200" b="1">
+                <a:solidFill>
+                  <a:srgbClr val="FF7200"/>
+                </a:solidFill>
+                <a:latin typeface="Arial"/>
+              </a:rPr>
+              <a:t>MCP  ·  PRIMARY NOW</a:t>
+            </a:r>
+          </a:p>
+        </p:txBody>
+      </p:sp>
+      <p:sp>
+        <p:nvSpPr>
+          <p:cNvPr id="20" name="TextBox 19"/>
+          <p:cNvSpPr txBox="1"/>
+          <p:nvPr/>
+        </p:nvSpPr>
+        <p:spPr>
+          <a:xfrm>
+            <a:off x="548640" y="2670048"/>
+            <a:ext cx="3200400" cy="502920"/>
+          </a:xfrm>
+          <a:prstGeom prst="rect">
+            <a:avLst/>
+          </a:prstGeom>
+          <a:noFill/>
+        </p:spPr>
+        <p:txBody>
+          <a:bodyPr wrap="square">
+            <a:spAutoFit/>
+          </a:bodyPr>
+          <a:lstStyle/>
+          <a:p>
+            <a:pPr algn="ctr"/>
+            <a:r>
+              <a:rPr sz="1000" b="0">
+                <a:solidFill>
+                  <a:srgbClr val="5A5A5A"/>
+                </a:solidFill>
+                <a:latin typeface="Arial"/>
+              </a:rPr>
+              <a:t>Tool calls: search · retrieve · cite
+Live Insightful, agent-native</a:t>
+            </a:r>
+          </a:p>
+        </p:txBody>
+      </p:sp>
+      <p:sp>
+        <p:nvSpPr>
+          <p:cNvPr id="21" name="Rounded Rectangle 20"/>
+          <p:cNvSpPr/>
+          <p:nvPr/>
+        </p:nvSpPr>
+        <p:spPr>
+          <a:xfrm>
+            <a:off x="4389120" y="2286000"/>
+            <a:ext cx="3383280" cy="960120"/>
+          </a:xfrm>
+          <a:prstGeom prst="roundRect">
+            <a:avLst>
+              <a:gd name="adj" fmla="val 8000"/>
+            </a:avLst>
+          </a:prstGeom>
+          <a:solidFill>
+            <a:srgbClr val="FFFFFF"/>
+          </a:solidFill>
+          <a:ln w="19050">
+            <a:solidFill>
+              <a:srgbClr val="067AB4"/>
+            </a:solidFill>
+          </a:ln>
+        </p:spPr>
+        <p:style>
+          <a:lnRef idx="1">
+            <a:schemeClr val="accent1"/>
+          </a:lnRef>
+          <a:fillRef idx="3">
+            <a:schemeClr val="accent1"/>
+          </a:fillRef>
+          <a:effectRef idx="2">
+            <a:schemeClr val="accent1"/>
+          </a:effectRef>
+          <a:fontRef idx="minor">
+            <a:schemeClr val="lt1"/>
+          </a:fontRef>
+        </p:style>
+        <p:txBody>
+          <a:bodyPr rtlCol="0" anchor="ctr"/>
+          <a:lstStyle/>
+          <a:p>
+            <a:pPr algn="ctr"/>
+          </a:p>
+        </p:txBody>
+      </p:sp>
+      <p:sp>
+        <p:nvSpPr>
+          <p:cNvPr id="22" name="TextBox 21"/>
+          <p:cNvSpPr txBox="1"/>
+          <p:nvPr/>
+        </p:nvSpPr>
+        <p:spPr>
+          <a:xfrm>
+            <a:off x="4498848" y="2395728"/>
+            <a:ext cx="3163824" cy="320040"/>
+          </a:xfrm>
+          <a:prstGeom prst="rect">
+            <a:avLst/>
+          </a:prstGeom>
+          <a:noFill/>
+        </p:spPr>
+        <p:txBody>
+          <a:bodyPr wrap="square">
+            <a:spAutoFit/>
+          </a:bodyPr>
+          <a:lstStyle/>
+          <a:p>
+            <a:pPr algn="ctr"/>
+            <a:r>
+              <a:rPr sz="1200" b="1">
+                <a:solidFill>
+                  <a:srgbClr val="067AB4"/>
+                </a:solidFill>
+                <a:latin typeface="Arial"/>
+              </a:rPr>
+              <a:t>API  ·  COMPANION NOW</a:t>
+            </a:r>
+          </a:p>
+        </p:txBody>
+      </p:sp>
+      <p:sp>
+        <p:nvSpPr>
+          <p:cNvPr id="23" name="TextBox 22"/>
+          <p:cNvSpPr txBox="1"/>
+          <p:nvPr/>
+        </p:nvSpPr>
+        <p:spPr>
+          <a:xfrm>
+            <a:off x="4480560" y="2670048"/>
+            <a:ext cx="3200400" cy="502920"/>
+          </a:xfrm>
+          <a:prstGeom prst="rect">
+            <a:avLst/>
+          </a:prstGeom>
+          <a:noFill/>
+        </p:spPr>
+        <p:txBody>
+          <a:bodyPr wrap="square">
+            <a:spAutoFit/>
+          </a:bodyPr>
+          <a:lstStyle/>
+          <a:p>
+            <a:pPr algn="ctr"/>
+            <a:r>
+              <a:rPr sz="1000" b="0">
+                <a:solidFill>
+                  <a:srgbClr val="5A5A5A"/>
+                </a:solidFill>
+                <a:latin typeface="Arial"/>
+              </a:rPr>
+              <a:t>REST Search / Lookup / logs
+Live Insightful for custom apps</a:t>
+            </a:r>
+          </a:p>
+        </p:txBody>
+      </p:sp>
+      <p:sp>
+        <p:nvSpPr>
+          <p:cNvPr id="24" name="Rounded Rectangle 23"/>
+          <p:cNvSpPr/>
+          <p:nvPr/>
+        </p:nvSpPr>
+        <p:spPr>
+          <a:xfrm>
+            <a:off x="8321040" y="2286000"/>
+            <a:ext cx="3383280" cy="960120"/>
+          </a:xfrm>
+          <a:prstGeom prst="roundRect">
+            <a:avLst>
+              <a:gd name="adj" fmla="val 8000"/>
+            </a:avLst>
+          </a:prstGeom>
+          <a:solidFill>
+            <a:srgbClr val="FFFFFF"/>
+          </a:solidFill>
+          <a:ln w="19050">
+            <a:solidFill>
+              <a:srgbClr val="0C2577"/>
+            </a:solidFill>
+          </a:ln>
+        </p:spPr>
+        <p:style>
+          <a:lnRef idx="1">
+            <a:schemeClr val="accent1"/>
+          </a:lnRef>
+          <a:fillRef idx="3">
+            <a:schemeClr val="accent1"/>
+          </a:fillRef>
+          <a:effectRef idx="2">
+            <a:schemeClr val="accent1"/>
+          </a:effectRef>
+          <a:fontRef idx="minor">
+            <a:schemeClr val="lt1"/>
+          </a:fontRef>
+        </p:style>
+        <p:txBody>
+          <a:bodyPr rtlCol="0" anchor="ctr"/>
+          <a:lstStyle/>
+          <a:p>
+            <a:pPr algn="ctr"/>
+          </a:p>
+        </p:txBody>
+      </p:sp>
+      <p:sp>
+        <p:nvSpPr>
+          <p:cNvPr id="25" name="TextBox 24"/>
+          <p:cNvSpPr txBox="1"/>
+          <p:nvPr/>
+        </p:nvSpPr>
+        <p:spPr>
+          <a:xfrm>
+            <a:off x="8430768" y="2395728"/>
+            <a:ext cx="3163824" cy="320040"/>
+          </a:xfrm>
+          <a:prstGeom prst="rect">
+            <a:avLst/>
+          </a:prstGeom>
+          <a:noFill/>
+        </p:spPr>
+        <p:txBody>
+          <a:bodyPr wrap="square">
+            <a:spAutoFit/>
+          </a:bodyPr>
+          <a:lstStyle/>
+          <a:p>
+            <a:pPr algn="ctr"/>
+            <a:r>
+              <a:rPr sz="1200" b="1">
+                <a:solidFill>
+                  <a:srgbClr val="0C2577"/>
+                </a:solidFill>
+                <a:latin typeface="Arial"/>
+              </a:rPr>
+              <a:t>Knowledge domain  ·  SIDE GOAL</a:t>
+            </a:r>
+          </a:p>
+        </p:txBody>
+      </p:sp>
+      <p:sp>
+        <p:nvSpPr>
+          <p:cNvPr id="26" name="TextBox 25"/>
+          <p:cNvSpPr txBox="1"/>
+          <p:nvPr/>
+        </p:nvSpPr>
+        <p:spPr>
+          <a:xfrm>
+            <a:off x="8412480" y="2670048"/>
+            <a:ext cx="3200400" cy="502920"/>
+          </a:xfrm>
+          <a:prstGeom prst="rect">
+            <a:avLst/>
+          </a:prstGeom>
+          <a:noFill/>
+        </p:spPr>
+        <p:txBody>
+          <a:bodyPr wrap="square">
+            <a:spAutoFit/>
+          </a:bodyPr>
+          <a:lstStyle/>
+          <a:p>
+            <a:pPr algn="ctr"/>
+            <a:r>
+              <a:rPr sz="1000" b="0">
+                <a:solidFill>
+                  <a:srgbClr val="5A5A5A"/>
+                </a:solidFill>
+                <a:latin typeface="Arial"/>
+              </a:rPr>
+              <a:t>Q&amp;A on secured copy + metadata
+Ask Docs golden-question path</a:t>
+            </a:r>
+          </a:p>
+        </p:txBody>
+      </p:sp>
+      <p:sp>
+        <p:nvSpPr>
+          <p:cNvPr id="27" name="Rectangle 26"/>
+          <p:cNvSpPr/>
+          <p:nvPr/>
+        </p:nvSpPr>
+        <p:spPr>
+          <a:xfrm>
+            <a:off x="2103120" y="3246120"/>
+            <a:ext cx="31750" cy="365760"/>
+          </a:xfrm>
+          <a:prstGeom prst="rect">
+            <a:avLst/>
+          </a:prstGeom>
+          <a:solidFill>
+            <a:srgbClr val="FF7200"/>
+          </a:solidFill>
+          <a:ln>
+            <a:noFill/>
+          </a:ln>
+        </p:spPr>
+        <p:style>
+          <a:lnRef idx="1">
+            <a:schemeClr val="accent1"/>
+          </a:lnRef>
+          <a:fillRef idx="3">
+            <a:schemeClr val="accent1"/>
+          </a:fillRef>
+          <a:effectRef idx="2">
+            <a:schemeClr val="accent1"/>
+          </a:effectRef>
+          <a:fontRef idx="minor">
+            <a:schemeClr val="lt1"/>
+          </a:fontRef>
+        </p:style>
+        <p:txBody>
+          <a:bodyPr rtlCol="0" anchor="ctr"/>
+          <a:lstStyle/>
+          <a:p>
+            <a:pPr algn="ctr"/>
+          </a:p>
+        </p:txBody>
+      </p:sp>
+      <p:sp>
+        <p:nvSpPr>
+          <p:cNvPr id="28" name="Rectangle 27"/>
+          <p:cNvSpPr/>
+          <p:nvPr/>
+        </p:nvSpPr>
+        <p:spPr>
+          <a:xfrm>
+            <a:off x="6035040" y="3246120"/>
+            <a:ext cx="31750" cy="365760"/>
+          </a:xfrm>
+          <a:prstGeom prst="rect">
+            <a:avLst/>
+          </a:prstGeom>
+          <a:solidFill>
+            <a:srgbClr val="067AB4"/>
+          </a:solidFill>
+          <a:ln>
+            <a:noFill/>
+          </a:ln>
+        </p:spPr>
+        <p:style>
+          <a:lnRef idx="1">
+            <a:schemeClr val="accent1"/>
+          </a:lnRef>
+          <a:fillRef idx="3">
+            <a:schemeClr val="accent1"/>
+          </a:fillRef>
+          <a:effectRef idx="2">
+            <a:schemeClr val="accent1"/>
+          </a:effectRef>
+          <a:fontRef idx="minor">
+            <a:schemeClr val="lt1"/>
+          </a:fontRef>
+        </p:style>
+        <p:txBody>
+          <a:bodyPr rtlCol="0" anchor="ctr"/>
+          <a:lstStyle/>
+          <a:p>
+            <a:pPr algn="ctr"/>
+          </a:p>
+        </p:txBody>
+      </p:sp>
+      <p:sp>
+        <p:nvSpPr>
+          <p:cNvPr id="29" name="Rectangle 28"/>
+          <p:cNvSpPr/>
+          <p:nvPr/>
+        </p:nvSpPr>
+        <p:spPr>
+          <a:xfrm>
+            <a:off x="2103120" y="3611880"/>
+            <a:ext cx="3931920" cy="31750"/>
+          </a:xfrm>
+          <a:prstGeom prst="rect">
+            <a:avLst/>
+          </a:prstGeom>
+          <a:solidFill>
+            <a:srgbClr val="067AB4"/>
+          </a:solidFill>
+          <a:ln>
+            <a:noFill/>
+          </a:ln>
+        </p:spPr>
+        <p:style>
+          <a:lnRef idx="1">
+            <a:schemeClr val="accent1"/>
+          </a:lnRef>
+          <a:fillRef idx="3">
+            <a:schemeClr val="accent1"/>
+          </a:fillRef>
+          <a:effectRef idx="2">
+            <a:schemeClr val="accent1"/>
+          </a:effectRef>
+          <a:fontRef idx="minor">
+            <a:schemeClr val="lt1"/>
+          </a:fontRef>
+        </p:style>
+        <p:txBody>
+          <a:bodyPr rtlCol="0" anchor="ctr"/>
+          <a:lstStyle/>
+          <a:p>
+            <a:pPr algn="ctr"/>
+          </a:p>
+        </p:txBody>
+      </p:sp>
+      <p:sp>
+        <p:nvSpPr>
+          <p:cNvPr id="30" name="Rectangle 29"/>
+          <p:cNvSpPr/>
+          <p:nvPr/>
+        </p:nvSpPr>
+        <p:spPr>
+          <a:xfrm>
+            <a:off x="4069080" y="3611880"/>
+            <a:ext cx="31750" cy="320040"/>
+          </a:xfrm>
+          <a:prstGeom prst="rect">
+            <a:avLst/>
+          </a:prstGeom>
+          <a:solidFill>
+            <a:srgbClr val="067AB4"/>
+          </a:solidFill>
+          <a:ln>
+            <a:noFill/>
+          </a:ln>
+        </p:spPr>
+        <p:style>
+          <a:lnRef idx="1">
+            <a:schemeClr val="accent1"/>
+          </a:lnRef>
+          <a:fillRef idx="3">
+            <a:schemeClr val="accent1"/>
+          </a:fillRef>
+          <a:effectRef idx="2">
+            <a:schemeClr val="accent1"/>
+          </a:effectRef>
+          <a:fontRef idx="minor">
+            <a:schemeClr val="lt1"/>
+          </a:fontRef>
+        </p:style>
+        <p:txBody>
+          <a:bodyPr rtlCol="0" anchor="ctr"/>
+          <a:lstStyle/>
+          <a:p>
+            <a:pPr algn="ctr"/>
+          </a:p>
+        </p:txBody>
+      </p:sp>
+      <p:sp>
+        <p:nvSpPr>
+          <p:cNvPr id="31" name="Rectangle 30"/>
+          <p:cNvSpPr/>
+          <p:nvPr/>
+        </p:nvSpPr>
+        <p:spPr>
+          <a:xfrm>
+            <a:off x="9966960" y="3246120"/>
+            <a:ext cx="31750" cy="685800"/>
+          </a:xfrm>
+          <a:prstGeom prst="rect">
+            <a:avLst/>
+          </a:prstGeom>
+          <a:solidFill>
+            <a:srgbClr val="0C2577"/>
+          </a:solidFill>
+          <a:ln>
+            <a:noFill/>
+          </a:ln>
+        </p:spPr>
+        <p:style>
+          <a:lnRef idx="1">
+            <a:schemeClr val="accent1"/>
+          </a:lnRef>
+          <a:fillRef idx="3">
+            <a:schemeClr val="accent1"/>
+          </a:fillRef>
+          <a:effectRef idx="2">
+            <a:schemeClr val="accent1"/>
+          </a:effectRef>
+          <a:fontRef idx="minor">
+            <a:schemeClr val="lt1"/>
+          </a:fontRef>
+        </p:style>
+        <p:txBody>
+          <a:bodyPr rtlCol="0" anchor="ctr"/>
+          <a:lstStyle/>
+          <a:p>
+            <a:pPr algn="ctr"/>
+          </a:p>
+        </p:txBody>
+      </p:sp>
+      <p:sp>
+        <p:nvSpPr>
+          <p:cNvPr id="32" name="Rounded Rectangle 31"/>
+          <p:cNvSpPr/>
+          <p:nvPr/>
+        </p:nvSpPr>
+        <p:spPr>
+          <a:xfrm>
+            <a:off x="822960" y="4023360"/>
+            <a:ext cx="6035040" cy="1417320"/>
+          </a:xfrm>
+          <a:prstGeom prst="roundRect">
+            <a:avLst>
+              <a:gd name="adj" fmla="val 8000"/>
+            </a:avLst>
+          </a:prstGeom>
+          <a:solidFill>
+            <a:srgbClr val="E8F1F8"/>
+          </a:solidFill>
+          <a:ln w="19050">
+            <a:solidFill>
+              <a:srgbClr val="067AB4"/>
+            </a:solidFill>
+          </a:ln>
+        </p:spPr>
+        <p:style>
+          <a:lnRef idx="1">
+            <a:schemeClr val="accent1"/>
+          </a:lnRef>
+          <a:fillRef idx="3">
+            <a:schemeClr val="accent1"/>
+          </a:fillRef>
+          <a:effectRef idx="2">
+            <a:schemeClr val="accent1"/>
+          </a:effectRef>
+          <a:fontRef idx="minor">
+            <a:schemeClr val="lt1"/>
+          </a:fontRef>
+        </p:style>
+        <p:txBody>
+          <a:bodyPr rtlCol="0" anchor="ctr"/>
+          <a:lstStyle/>
+          <a:p>
+            <a:pPr algn="ctr"/>
+          </a:p>
+        </p:txBody>
+      </p:sp>
+      <p:sp>
+        <p:nvSpPr>
+          <p:cNvPr id="33" name="TextBox 32"/>
+          <p:cNvSpPr txBox="1"/>
+          <p:nvPr/>
+        </p:nvSpPr>
+        <p:spPr>
+          <a:xfrm>
+            <a:off x="932688" y="4133088"/>
+            <a:ext cx="5815584" cy="320040"/>
+          </a:xfrm>
+          <a:prstGeom prst="rect">
+            <a:avLst/>
+          </a:prstGeom>
+          <a:noFill/>
+        </p:spPr>
+        <p:txBody>
+          <a:bodyPr wrap="square">
+            <a:spAutoFit/>
+          </a:bodyPr>
+          <a:lstStyle/>
+          <a:p>
+            <a:pPr algn="ctr"/>
+            <a:r>
+              <a:rPr sz="1200" b="1">
+                <a:solidFill>
+                  <a:srgbClr val="0C2577"/>
+                </a:solidFill>
+                <a:latin typeface="Arial"/>
+              </a:rPr>
+              <a:t>Insightful on Stravito  ·  LIVE SYSTEM OF ENGAGEMENT</a:t>
+            </a:r>
+          </a:p>
+        </p:txBody>
+      </p:sp>
+      <p:sp>
+        <p:nvSpPr>
+          <p:cNvPr id="34" name="TextBox 33"/>
+          <p:cNvSpPr txBox="1"/>
+          <p:nvPr/>
+        </p:nvSpPr>
+        <p:spPr>
+          <a:xfrm>
+            <a:off x="914400" y="4407408"/>
+            <a:ext cx="5852160" cy="960120"/>
+          </a:xfrm>
+          <a:prstGeom prst="rect">
+            <a:avLst/>
+          </a:prstGeom>
+          <a:noFill/>
+        </p:spPr>
+        <p:txBody>
+          <a:bodyPr wrap="square">
+            <a:spAutoFit/>
+          </a:bodyPr>
+          <a:lstStyle/>
+          <a:p>
+            <a:pPr algn="ctr"/>
+            <a:r>
+              <a:rPr sz="1000" b="0">
+                <a:solidFill>
+                  <a:srgbClr val="5A5A5A"/>
+                </a:solidFill>
+                <a:latin typeface="Arial"/>
+              </a:rPr>
+              <a:t>Semantic layer · AT&amp;T taxonomy · marketing-research assistant
+Curated collections · permissions · source of truth for MCP &amp; API</a:t>
+            </a:r>
+          </a:p>
+        </p:txBody>
+      </p:sp>
+      <p:sp>
+        <p:nvSpPr>
+          <p:cNvPr id="35" name="Rounded Rectangle 34"/>
+          <p:cNvSpPr/>
+          <p:nvPr/>
+        </p:nvSpPr>
+        <p:spPr>
+          <a:xfrm>
+            <a:off x="7589520" y="4023360"/>
+            <a:ext cx="4114800" cy="1417320"/>
+          </a:xfrm>
+          <a:prstGeom prst="roundRect">
+            <a:avLst>
+              <a:gd name="adj" fmla="val 8000"/>
+            </a:avLst>
+          </a:prstGeom>
+          <a:solidFill>
+            <a:srgbClr val="F5F5F8"/>
+          </a:solidFill>
+          <a:ln w="19050">
+            <a:solidFill>
+              <a:srgbClr val="0C2577"/>
+            </a:solidFill>
+          </a:ln>
+        </p:spPr>
+        <p:style>
+          <a:lnRef idx="1">
+            <a:schemeClr val="accent1"/>
+          </a:lnRef>
+          <a:fillRef idx="3">
+            <a:schemeClr val="accent1"/>
+          </a:fillRef>
+          <a:effectRef idx="2">
+            <a:schemeClr val="accent1"/>
+          </a:effectRef>
+          <a:fontRef idx="minor">
+            <a:schemeClr val="lt1"/>
+          </a:fontRef>
+        </p:style>
+        <p:txBody>
+          <a:bodyPr rtlCol="0" anchor="ctr"/>
+          <a:lstStyle/>
+          <a:p>
+            <a:pPr algn="ctr"/>
+          </a:p>
+        </p:txBody>
+      </p:sp>
+      <p:sp>
+        <p:nvSpPr>
+          <p:cNvPr id="36" name="TextBox 35"/>
+          <p:cNvSpPr txBox="1"/>
+          <p:nvPr/>
+        </p:nvSpPr>
+        <p:spPr>
+          <a:xfrm>
+            <a:off x="7699248" y="4133088"/>
+            <a:ext cx="3895344" cy="320040"/>
+          </a:xfrm>
+          <a:prstGeom prst="rect">
+            <a:avLst/>
+          </a:prstGeom>
+          <a:noFill/>
+        </p:spPr>
+        <p:txBody>
+          <a:bodyPr wrap="square">
+            <a:spAutoFit/>
+          </a:bodyPr>
+          <a:lstStyle/>
+          <a:p>
+            <a:pPr algn="ctr"/>
+            <a:r>
+              <a:rPr sz="1200" b="1">
+                <a:solidFill>
+                  <a:srgbClr val="0C2577"/>
+                </a:solidFill>
+                <a:latin typeface="Arial"/>
+              </a:rPr>
+              <a:t>Ask AT&amp;T domain COPY</a:t>
+            </a:r>
+          </a:p>
+        </p:txBody>
+      </p:sp>
+      <p:sp>
+        <p:nvSpPr>
+          <p:cNvPr id="37" name="TextBox 36"/>
+          <p:cNvSpPr txBox="1"/>
+          <p:nvPr/>
+        </p:nvSpPr>
+        <p:spPr>
+          <a:xfrm>
+            <a:off x="7680960" y="4407408"/>
+            <a:ext cx="3931920" cy="960120"/>
+          </a:xfrm>
+          <a:prstGeom prst="rect">
+            <a:avLst/>
+          </a:prstGeom>
+          <a:noFill/>
+        </p:spPr>
+        <p:txBody>
+          <a:bodyPr wrap="square">
+            <a:spAutoFit/>
+          </a:bodyPr>
+          <a:lstStyle/>
+          <a:p>
+            <a:pPr algn="ctr"/>
+            <a:r>
+              <a:rPr sz="1000" b="0">
+                <a:solidFill>
+                  <a:srgbClr val="5A5A5A"/>
+                </a:solidFill>
+                <a:latin typeface="Arial"/>
+              </a:rPr>
+              <a:t>Full content + metadata uploaded
+You are here → golden questions
+Sync / freshness required ongoing</a:t>
+            </a:r>
+          </a:p>
+        </p:txBody>
+      </p:sp>
+      <p:sp>
+        <p:nvSpPr>
+          <p:cNvPr id="38" name="Rectangle 37"/>
+          <p:cNvSpPr/>
+          <p:nvPr/>
+        </p:nvSpPr>
+        <p:spPr>
+          <a:xfrm>
+            <a:off x="457200" y="5669280"/>
+            <a:ext cx="11247120" cy="594360"/>
+          </a:xfrm>
+          <a:prstGeom prst="rect">
+            <a:avLst/>
+          </a:prstGeom>
+          <a:solidFill>
+            <a:srgbClr val="F2F4F7"/>
+          </a:solidFill>
+          <a:ln>
+            <a:noFill/>
+          </a:ln>
+        </p:spPr>
+        <p:style>
+          <a:lnRef idx="1">
+            <a:schemeClr val="accent1"/>
+          </a:lnRef>
+          <a:fillRef idx="3">
+            <a:schemeClr val="accent1"/>
+          </a:fillRef>
+          <a:effectRef idx="2">
+            <a:schemeClr val="accent1"/>
+          </a:effectRef>
+          <a:fontRef idx="minor">
+            <a:schemeClr val="lt1"/>
+          </a:fontRef>
+        </p:style>
+        <p:txBody>
+          <a:bodyPr rtlCol="0" anchor="ctr"/>
+          <a:lstStyle/>
+          <a:p>
+            <a:pPr algn="ctr"/>
+          </a:p>
+        </p:txBody>
+      </p:sp>
+      <p:sp>
+        <p:nvSpPr>
+          <p:cNvPr id="39" name="TextBox 38"/>
+          <p:cNvSpPr txBox="1"/>
+          <p:nvPr/>
+        </p:nvSpPr>
+        <p:spPr>
+          <a:xfrm>
+            <a:off x="640080" y="5779008"/>
+            <a:ext cx="10881360" cy="411480"/>
           </a:xfrm>
           <a:prstGeom prst="rect">
             <a:avLst/>
@@ -13218,91 +16993,20 @@
           <a:p>
             <a:pPr algn="l"/>
             <a:r>
-              <a:rPr sz="1800" b="0">
-                <a:solidFill>
-                  <a:srgbClr val="FFFFFF"/>
-                </a:solidFill>
-                <a:latin typeface="Arial"/>
-              </a:rPr>
-              <a:t>Sign on for MCP as the primary path for agent builders; enable API alongside it for custom AI tools. Advance the Ask AT&amp;T knowledge domain as a strategic side investment — not the near-term demand solution.</a:t>
-            </a:r>
-          </a:p>
-        </p:txBody>
-      </p:sp>
-      <p:sp>
-        <p:nvSpPr>
-          <p:cNvPr id="7" name="TextBox 6"/>
-          <p:cNvSpPr txBox="1"/>
-          <p:nvPr/>
-        </p:nvSpPr>
-        <p:spPr>
-          <a:xfrm>
-            <a:off x="548640" y="2834640"/>
-            <a:ext cx="10972800" cy="3200400"/>
-          </a:xfrm>
-          <a:prstGeom prst="rect">
-            <a:avLst/>
-          </a:prstGeom>
-          <a:noFill/>
-        </p:spPr>
-        <p:txBody>
-          <a:bodyPr wrap="square">
-            <a:spAutoFit/>
-          </a:bodyPr>
-          <a:lstStyle/>
-          <a:p>
-            <a:pPr>
-              <a:spcAft>
-                <a:spcPts val="1200"/>
-              </a:spcAft>
-            </a:pPr>
-            <a:r>
-              <a:rPr sz="1500" b="0">
+              <a:rPr sz="1200" b="0">
                 <a:solidFill>
                   <a:srgbClr val="5A5A5A"/>
                 </a:solidFill>
                 <a:latin typeface="Arial"/>
               </a:rPr>
-              <a:t>Why MCP first for agents: it is the cleanest way for AI tools to call Insightful as a governed capability — search, retrieve, cite — without each team inventing a private pipeline.</a:t>
-            </a:r>
-          </a:p>
-          <a:p>
-            <a:pPr>
-              <a:spcAft>
-                <a:spcPts val="1200"/>
-              </a:spcAft>
-            </a:pPr>
-            <a:r>
-              <a:rPr sz="1500" b="0">
-                <a:solidFill>
-                  <a:srgbClr val="5A5A5A"/>
-                </a:solidFill>
-                <a:latin typeface="Arial"/>
-              </a:rPr>
-              <a:t>Why API with it: many AT&amp;T apps will not speak MCP yet; Search/Lookup covers those surfaces with the same live knowledge.</a:t>
-            </a:r>
-          </a:p>
-          <a:p>
-            <a:pPr>
-              <a:spcAft>
-                <a:spcPts val="1200"/>
-              </a:spcAft>
-            </a:pPr>
-            <a:r>
-              <a:rPr sz="1500" b="0">
-                <a:solidFill>
-                  <a:srgbClr val="5A5A5A"/>
-                </a:solidFill>
-                <a:latin typeface="Arial"/>
-              </a:rPr>
-              <a:t>Why domain stays strategic: security already drove a full copy into Ask Docs. That investment is real — and unfinished. Completing it requires golden questions, stewards, and operating cadence before it can rival Insightful’s curated experience.</a:t>
-            </a:r>
-          </a:p>
-        </p:txBody>
-      </p:sp>
-      <p:sp>
-        <p:nvSpPr>
-          <p:cNvPr id="8" name="TextBox 7"/>
+              <a:t>Read left→right for demand: MCP/API unlock agents now against live Insightful.  Right path = security-driven copy for Ask AT&amp;T — strategic, staffed, tested before broad trust.</a:t>
+            </a:r>
+          </a:p>
+        </p:txBody>
+      </p:sp>
+      <p:sp>
+        <p:nvSpPr>
+          <p:cNvPr id="40" name="TextBox 39"/>
           <p:cNvSpPr txBox="1"/>
           <p:nvPr/>
         </p:nvSpPr>
@@ -13337,7 +17041,7 @@
       </p:sp>
       <p:sp>
         <p:nvSpPr>
-          <p:cNvPr id="9" name="TextBox 8"/>
+          <p:cNvPr id="41" name="TextBox 40"/>
           <p:cNvSpPr txBox="1"/>
           <p:nvPr/>
         </p:nvSpPr>

--- a/presentations/cmo-insightful-ai-access/CMO_Insightful_AI_Access_Recommendation.pptx
+++ b/presentations/cmo-insightful-ai-access/CMO_Insightful_AI_Access_Recommendation.pptx
@@ -3588,7 +3588,7 @@
                 </a:solidFill>
                 <a:latin typeface="Arial"/>
               </a:rPr>
-              <a:t>Sign on for MCP as the primary path for agent builders; enable API alongside it for custom AI tools. Advance the Ask AT&amp;T knowledge domain as a strategic side investment — not the near-term demand solution.</a:t>
+              <a:t>Approve MCP or API access to live Insightful based on use case. Treat the Ask AT&amp;T knowledge domain as a separate goal — not the near-term demand solution.</a:t>
             </a:r>
           </a:p>
         </p:txBody>
@@ -3627,7 +3627,7 @@
                 </a:solidFill>
                 <a:latin typeface="Arial"/>
               </a:rPr>
-              <a:t>Why MCP first for agents: it is the cleanest way for AI tools to call Insightful as a governed capability — search, retrieve, cite — without each team inventing a private pipeline.</a:t>
+              <a:t>Today: content and the AI assistant exist only inside Insightful (Stravito, AT&amp;T-branded). That is the live system of engagement.</a:t>
             </a:r>
           </a:p>
           <a:p>
@@ -3643,7 +3643,7 @@
                 </a:solidFill>
                 <a:latin typeface="Arial"/>
               </a:rPr>
-              <a:t>Why API with it: many AT&amp;T apps will not speak MCP yet; Search/Lookup covers those surfaces with the same live knowledge.</a:t>
+              <a:t>By use case: agents / agent platforms → MCP. Custom apps / backends → API. Neither pipe alone covers every AI project — choose the right one per request.</a:t>
             </a:r>
           </a:p>
           <a:p>
@@ -3659,7 +3659,7 @@
                 </a:solidFill>
                 <a:latin typeface="Arial"/>
               </a:rPr>
-              <a:t>Why domain stays strategic: security already drove a full copy into Ask Docs. That investment is real — and unfinished. Completing it requires golden questions, stewards, and operating cadence before it can rival Insightful’s curated experience.</a:t>
+              <a:t>Separate goal: Ask AT&amp;T domain copy is uploaded for security. Completing it needs golden questions, stewards, and governance before it earns broad trust.</a:t>
             </a:r>
           </a:p>
         </p:txBody>
@@ -10240,7 +10240,7 @@
                 </a:solidFill>
                 <a:latin typeface="Arial"/>
               </a:rPr>
-              <a:t>Approve MCP + API path</a:t>
+              <a:t>Approve MCP or API by use case</a:t>
             </a:r>
           </a:p>
         </p:txBody>
@@ -10275,7 +10275,7 @@
                 </a:solidFill>
                 <a:latin typeface="Arial"/>
               </a:rPr>
-              <a:t>Authorize commercial/security engagement to enable Insightful MCP and API for sanctioned AI projects.</a:t>
+              <a:t>Authorize commercial/security engagement so sanctioned AI projects can get MCP or API access to live Insightful based on need.</a:t>
             </a:r>
           </a:p>
         </p:txBody>
@@ -10425,7 +10425,7 @@
                 </a:solidFill>
                 <a:latin typeface="Arial"/>
               </a:rPr>
-              <a:t>Assign MCP/API owner and interim Knowledge Steward; confirm SME panel.</a:t>
+              <a:t>Assign access owner (MCP/API intake) and interim Knowledge Steward; confirm SME panel.</a:t>
             </a:r>
           </a:p>
         </p:txBody>
@@ -10540,7 +10540,7 @@
                 </a:solidFill>
                 <a:latin typeface="Arial"/>
               </a:rPr>
-              <a:t>Fund domain as side goal</a:t>
+              <a:t>Fund domain as separate goal</a:t>
             </a:r>
           </a:p>
         </p:txBody>
@@ -10575,7 +10575,7 @@
                 </a:solidFill>
                 <a:latin typeface="Arial"/>
               </a:rPr>
-              <a:t>Endorse golden-question stand-up and steward operating model — without blocking agent demand on domain go-live.</a:t>
+              <a:t>Endorse golden-question stand-up and steward model — without blocking demand on domain go-live.</a:t>
             </a:r>
           </a:p>
         </p:txBody>
@@ -10725,7 +10725,7 @@
                 </a:solidFill>
                 <a:latin typeface="Arial"/>
               </a:rPr>
-              <a:t>CMO-backed rules: who gets MCP/API credentials; who gets Ask AT&amp;T domain access; anti-workaround stance.</a:t>
+              <a:t>CMO-backed rules: which use cases get MCP vs API; who gets Ask AT&amp;T domain access; anti-workaround stance.</a:t>
             </a:r>
           </a:p>
         </p:txBody>
@@ -10977,8 +10977,8 @@
                 </a:solidFill>
                 <a:latin typeface="Arial"/>
               </a:rPr>
-              <a:t>Serve demand with MCP + API.
-Build the domain with discipline.</a:t>
+              <a:t>Approve the right pipe by use case.
+Build the domain as its own goal.</a:t>
             </a:r>
           </a:p>
         </p:txBody>
@@ -11013,8 +11013,8 @@
                 </a:solidFill>
                 <a:latin typeface="Arial"/>
               </a:rPr>
-              <a:t>That keeps Insightful’s proprietary advantage working for AT&amp;T’s AI ecosystem —
-and keeps Ask AT&amp;T on a path that is governed, tested, and staffed to last.</a:t>
+              <a:t>Keep content and assistant on live Insightful today — open MCP or API where teams need it —
+and staff Ask AT&amp;T so the copy path is governed, tested, and ready when it earns trust.</a:t>
             </a:r>
           </a:p>
         </p:txBody>
@@ -11166,8 +11166,8 @@
         </p:nvSpPr>
         <p:spPr>
           <a:xfrm>
-            <a:off x="548640" y="365760"/>
-            <a:ext cx="10972800" cy="457200"/>
+            <a:off x="548640" y="320040"/>
+            <a:ext cx="10972800" cy="411480"/>
           </a:xfrm>
           <a:prstGeom prst="rect">
             <a:avLst/>
@@ -11201,8 +11201,8 @@
         </p:nvSpPr>
         <p:spPr>
           <a:xfrm>
-            <a:off x="548640" y="1005840"/>
-            <a:ext cx="10972800" cy="548640"/>
+            <a:off x="548640" y="822960"/>
+            <a:ext cx="10972800" cy="411480"/>
           </a:xfrm>
           <a:prstGeom prst="rect">
             <a:avLst/>
@@ -11217,27 +11217,62 @@
           <a:p>
             <a:pPr algn="l"/>
             <a:r>
-              <a:rPr sz="2000" b="0">
+              <a:rPr sz="1600" b="0">
+                <a:solidFill>
+                  <a:srgbClr val="5A5A5A"/>
+                </a:solidFill>
+                <a:latin typeface="Arial"/>
+              </a:rPr>
+              <a:t>Today, content and the AI assistant live only in Insightful (Stravito, AT&amp;T-branded).</a:t>
+            </a:r>
+          </a:p>
+        </p:txBody>
+      </p:sp>
+      <p:sp>
+        <p:nvSpPr>
+          <p:cNvPr id="6" name="TextBox 5"/>
+          <p:cNvSpPr txBox="1"/>
+          <p:nvPr/>
+        </p:nvSpPr>
+        <p:spPr>
+          <a:xfrm>
+            <a:off x="548640" y="1234440"/>
+            <a:ext cx="10972800" cy="365760"/>
+          </a:xfrm>
+          <a:prstGeom prst="rect">
+            <a:avLst/>
+          </a:prstGeom>
+          <a:noFill/>
+        </p:spPr>
+        <p:txBody>
+          <a:bodyPr wrap="square">
+            <a:spAutoFit/>
+          </a:bodyPr>
+          <a:lstStyle/>
+          <a:p>
+            <a:pPr algn="l"/>
+            <a:r>
+              <a:rPr sz="1800" b="1">
                 <a:solidFill>
                   <a:srgbClr val="000000"/>
                 </a:solidFill>
                 <a:latin typeface="Arial"/>
               </a:rPr>
-              <a:t>Approve a dual-track approach to Insightful AI access.</a:t>
-            </a:r>
-          </a:p>
-        </p:txBody>
-      </p:sp>
-      <p:sp>
-        <p:nvSpPr>
-          <p:cNvPr id="6" name="Rounded Rectangle 5"/>
+              <a:t>Approve MCP or API access by use case. Keep the knowledge domain as a separate goal.</a:t>
+            </a:r>
+          </a:p>
+        </p:txBody>
+      </p:sp>
+      <p:sp>
+        <p:nvSpPr>
+          <p:cNvPr id="7" name="Rounded Rectangle 6"/>
           <p:cNvSpPr/>
           <p:nvPr/>
         </p:nvSpPr>
         <p:spPr>
           <a:xfrm>
-            <a:off x="548640" y="1828800"/>
-            <a:ext cx="5303520" cy="3474720"/>
+            <a:off x="548640" y="1783080"/>
+            <a:ext cx="5303520" cy="3657600"/>
           </a:xfrm>
           <a:prstGeom prst="roundRect">
             <a:avLst>
@@ -11275,14 +11310,14 @@
       </p:sp>
       <p:sp>
         <p:nvSpPr>
-          <p:cNvPr id="7" name="TextBox 6"/>
-          <p:cNvSpPr txBox="1"/>
-          <p:nvPr/>
-        </p:nvSpPr>
-        <p:spPr>
-          <a:xfrm>
-            <a:off x="822960" y="2057400"/>
-            <a:ext cx="4754880" cy="365760"/>
+          <p:cNvPr id="8" name="TextBox 7"/>
+          <p:cNvSpPr txBox="1"/>
+          <p:nvPr/>
+        </p:nvSpPr>
+        <p:spPr>
+          <a:xfrm>
+            <a:off x="822960" y="2011680"/>
+            <a:ext cx="4754880" cy="320040"/>
           </a:xfrm>
           <a:prstGeom prst="rect">
             <a:avLst/>
@@ -11303,21 +11338,21 @@
                 </a:solidFill>
                 <a:latin typeface="Arial"/>
               </a:rPr>
-              <a:t>PRIMARY — NOW</a:t>
-            </a:r>
-          </a:p>
-        </p:txBody>
-      </p:sp>
-      <p:sp>
-        <p:nvSpPr>
-          <p:cNvPr id="8" name="TextBox 7"/>
-          <p:cNvSpPr txBox="1"/>
-          <p:nvPr/>
-        </p:nvSpPr>
-        <p:spPr>
-          <a:xfrm>
-            <a:off x="822960" y="2468880"/>
-            <a:ext cx="4754880" cy="731520"/>
+              <a:t>NEAR-TERM — BY USE CASE</a:t>
+            </a:r>
+          </a:p>
+        </p:txBody>
+      </p:sp>
+      <p:sp>
+        <p:nvSpPr>
+          <p:cNvPr id="9" name="TextBox 8"/>
+          <p:cNvSpPr txBox="1"/>
+          <p:nvPr/>
+        </p:nvSpPr>
+        <p:spPr>
+          <a:xfrm>
+            <a:off x="822960" y="2423160"/>
+            <a:ext cx="4754880" cy="822960"/>
           </a:xfrm>
           <a:prstGeom prst="rect">
             <a:avLst/>
@@ -11332,26 +11367,26 @@
           <a:p>
             <a:pPr algn="l"/>
             <a:r>
-              <a:rPr sz="2200" b="1">
+              <a:rPr sz="2000" b="1">
                 <a:solidFill>
                   <a:srgbClr val="0C2577"/>
                 </a:solidFill>
                 <a:latin typeface="Arial"/>
               </a:rPr>
-              <a:t>Sign on for MCP (preferred) and API</a:t>
-            </a:r>
-          </a:p>
-        </p:txBody>
-      </p:sp>
-      <p:sp>
-        <p:nvSpPr>
-          <p:cNvPr id="9" name="TextBox 8"/>
-          <p:cNvSpPr txBox="1"/>
-          <p:nvPr/>
-        </p:nvSpPr>
-        <p:spPr>
-          <a:xfrm>
-            <a:off x="822960" y="3291840"/>
+              <a:t>Approve MCP or API access to live Insightful</a:t>
+            </a:r>
+          </a:p>
+        </p:txBody>
+      </p:sp>
+      <p:sp>
+        <p:nvSpPr>
+          <p:cNvPr id="10" name="TextBox 9"/>
+          <p:cNvSpPr txBox="1"/>
+          <p:nvPr/>
+        </p:nvSpPr>
+        <p:spPr>
+          <a:xfrm>
+            <a:off x="822960" y="3383280"/>
             <a:ext cx="4754880" cy="1828800"/>
           </a:xfrm>
           <a:prstGeom prst="rect">
@@ -11371,13 +11406,13 @@
               </a:spcAft>
             </a:pPr>
             <a:r>
-              <a:rPr sz="1500" b="0">
+              <a:rPr sz="1400" b="0">
                 <a:solidFill>
                   <a:srgbClr val="5A5A5A"/>
                 </a:solidFill>
                 <a:latin typeface="Arial"/>
               </a:rPr>
-              <a:t>Gives teams building agents and AI-backed tools a governed way to pull Insightful knowledge into their work.</a:t>
+              <a:t>Agents / agent platforms → MCP</a:t>
             </a:r>
           </a:p>
           <a:p>
@@ -11387,27 +11422,43 @@
               </a:spcAft>
             </a:pPr>
             <a:r>
-              <a:rPr sz="1500" b="0">
+              <a:rPr sz="1400" b="0">
                 <a:solidFill>
                   <a:srgbClr val="5A5A5A"/>
                 </a:solidFill>
                 <a:latin typeface="Arial"/>
               </a:rPr>
-              <a:t>Solves immediate demand and reduces shadow integrations.</a:t>
-            </a:r>
-          </a:p>
-        </p:txBody>
-      </p:sp>
-      <p:sp>
-        <p:nvSpPr>
-          <p:cNvPr id="10" name="Rounded Rectangle 9"/>
+              <a:t>Custom apps / backends → API</a:t>
+            </a:r>
+          </a:p>
+          <a:p>
+            <a:pPr>
+              <a:spcAft>
+                <a:spcPts val="800"/>
+              </a:spcAft>
+            </a:pPr>
+            <a:r>
+              <a:rPr sz="1400" b="0">
+                <a:solidFill>
+                  <a:srgbClr val="5A5A5A"/>
+                </a:solidFill>
+                <a:latin typeface="Arial"/>
+              </a:rPr>
+              <a:t>Same live Insightful knowledge. Right pipe for each project. Stops workarounds.</a:t>
+            </a:r>
+          </a:p>
+        </p:txBody>
+      </p:sp>
+      <p:sp>
+        <p:nvSpPr>
+          <p:cNvPr id="11" name="Rounded Rectangle 10"/>
           <p:cNvSpPr/>
           <p:nvPr/>
         </p:nvSpPr>
         <p:spPr>
           <a:xfrm>
-            <a:off x="6217920" y="1828800"/>
-            <a:ext cx="5303520" cy="3474720"/>
+            <a:off x="6217920" y="1783080"/>
+            <a:ext cx="5303520" cy="3657600"/>
           </a:xfrm>
           <a:prstGeom prst="roundRect">
             <a:avLst>
@@ -11445,14 +11496,14 @@
       </p:sp>
       <p:sp>
         <p:nvSpPr>
-          <p:cNvPr id="11" name="TextBox 10"/>
-          <p:cNvSpPr txBox="1"/>
-          <p:nvPr/>
-        </p:nvSpPr>
-        <p:spPr>
-          <a:xfrm>
-            <a:off x="6492240" y="2057400"/>
-            <a:ext cx="4754880" cy="365760"/>
+          <p:cNvPr id="12" name="TextBox 11"/>
+          <p:cNvSpPr txBox="1"/>
+          <p:nvPr/>
+        </p:nvSpPr>
+        <p:spPr>
+          <a:xfrm>
+            <a:off x="6492240" y="2011680"/>
+            <a:ext cx="4754880" cy="320040"/>
           </a:xfrm>
           <a:prstGeom prst="rect">
             <a:avLst/>
@@ -11473,21 +11524,21 @@
                 </a:solidFill>
                 <a:latin typeface="Arial"/>
               </a:rPr>
-              <a:t>STRATEGIC — PARALLEL</a:t>
-            </a:r>
-          </a:p>
-        </p:txBody>
-      </p:sp>
-      <p:sp>
-        <p:nvSpPr>
-          <p:cNvPr id="12" name="TextBox 11"/>
-          <p:cNvSpPr txBox="1"/>
-          <p:nvPr/>
-        </p:nvSpPr>
-        <p:spPr>
-          <a:xfrm>
-            <a:off x="6492240" y="2468880"/>
-            <a:ext cx="4754880" cy="731520"/>
+              <a:t>SEPARATE GOAL</a:t>
+            </a:r>
+          </a:p>
+        </p:txBody>
+      </p:sp>
+      <p:sp>
+        <p:nvSpPr>
+          <p:cNvPr id="13" name="TextBox 12"/>
+          <p:cNvSpPr txBox="1"/>
+          <p:nvPr/>
+        </p:nvSpPr>
+        <p:spPr>
+          <a:xfrm>
+            <a:off x="6492240" y="2423160"/>
+            <a:ext cx="4754880" cy="822960"/>
           </a:xfrm>
           <a:prstGeom prst="rect">
             <a:avLst/>
@@ -11502,7 +11553,7 @@
           <a:p>
             <a:pPr algn="l"/>
             <a:r>
-              <a:rPr sz="2200" b="1">
+              <a:rPr sz="2000" b="1">
                 <a:solidFill>
                   <a:srgbClr val="0C2577"/>
                 </a:solidFill>
@@ -11515,13 +11566,13 @@
       </p:sp>
       <p:sp>
         <p:nvSpPr>
-          <p:cNvPr id="13" name="TextBox 12"/>
-          <p:cNvSpPr txBox="1"/>
-          <p:nvPr/>
-        </p:nvSpPr>
-        <p:spPr>
-          <a:xfrm>
-            <a:off x="6492240" y="3291840"/>
+          <p:cNvPr id="14" name="TextBox 13"/>
+          <p:cNvSpPr txBox="1"/>
+          <p:nvPr/>
+        </p:nvSpPr>
+        <p:spPr>
+          <a:xfrm>
+            <a:off x="6492240" y="3383280"/>
             <a:ext cx="4754880" cy="1828800"/>
           </a:xfrm>
           <a:prstGeom prst="rect">
@@ -11541,13 +11592,13 @@
               </a:spcAft>
             </a:pPr>
             <a:r>
-              <a:rPr sz="1500" b="0">
+              <a:rPr sz="1400" b="0">
                 <a:solidFill>
                   <a:srgbClr val="5A5A5A"/>
                 </a:solidFill>
                 <a:latin typeface="Arial"/>
               </a:rPr>
-              <a:t>Corpus copy + metadata already uploaded for security. Next: golden questions, truth answers, governance, stewards.</a:t>
+              <a:t>Security copy (content + metadata) already uploaded.</a:t>
             </a:r>
           </a:p>
           <a:p>
@@ -11557,20 +11608,36 @@
               </a:spcAft>
             </a:pPr>
             <a:r>
-              <a:rPr sz="1500" b="0">
+              <a:rPr sz="1400" b="0">
                 <a:solidFill>
                   <a:srgbClr val="5A5A5A"/>
                 </a:solidFill>
                 <a:latin typeface="Arial"/>
               </a:rPr>
-              <a:t>Treat as a side goal we invest in — not the near-term demand fix.</a:t>
-            </a:r>
-          </a:p>
-        </p:txBody>
-      </p:sp>
-      <p:sp>
-        <p:nvSpPr>
-          <p:cNvPr id="14" name="TextBox 13"/>
+              <a:t>Next: golden questions, truth answers, governance, stewards.</a:t>
+            </a:r>
+          </a:p>
+          <a:p>
+            <a:pPr>
+              <a:spcAft>
+                <a:spcPts val="800"/>
+              </a:spcAft>
+            </a:pPr>
+            <a:r>
+              <a:rPr sz="1400" b="0">
+                <a:solidFill>
+                  <a:srgbClr val="5A5A5A"/>
+                </a:solidFill>
+                <a:latin typeface="Arial"/>
+              </a:rPr>
+              <a:t>Not the near-term demand fix — its own investment track.</a:t>
+            </a:r>
+          </a:p>
+        </p:txBody>
+      </p:sp>
+      <p:sp>
+        <p:nvSpPr>
+          <p:cNvPr id="15" name="TextBox 14"/>
           <p:cNvSpPr txBox="1"/>
           <p:nvPr/>
         </p:nvSpPr>
@@ -11605,7 +11672,7 @@
       </p:sp>
       <p:sp>
         <p:nvSpPr>
-          <p:cNvPr id="15" name="TextBox 14"/>
+          <p:cNvPr id="16" name="TextBox 15"/>
           <p:cNvSpPr txBox="1"/>
           <p:nvPr/>
         </p:nvSpPr>
@@ -16197,7 +16264,7 @@
                 </a:solidFill>
                 <a:latin typeface="Arial"/>
               </a:rPr>
-              <a:t>MCP  ·  PRIMARY NOW</a:t>
+              <a:t>MCP  ·  BY USE CASE</a:t>
             </a:r>
           </a:p>
         </p:txBody>
@@ -16232,8 +16299,8 @@
                 </a:solidFill>
                 <a:latin typeface="Arial"/>
               </a:rPr>
-              <a:t>Tool calls: search · retrieve · cite
-Live Insightful, agent-native</a:t>
+              <a:t>Agents / agent platforms
+Live Insightful tool calls</a:t>
             </a:r>
           </a:p>
         </p:txBody>
@@ -16315,7 +16382,7 @@
                 </a:solidFill>
                 <a:latin typeface="Arial"/>
               </a:rPr>
-              <a:t>API  ·  COMPANION NOW</a:t>
+              <a:t>API  ·  BY USE CASE</a:t>
             </a:r>
           </a:p>
         </p:txBody>
@@ -16350,8 +16417,8 @@
                 </a:solidFill>
                 <a:latin typeface="Arial"/>
               </a:rPr>
-              <a:t>REST Search / Lookup / logs
-Live Insightful for custom apps</a:t>
+              <a:t>Custom apps / backends
+Live Search / Lookup</a:t>
             </a:r>
           </a:p>
         </p:txBody>
@@ -16433,7 +16500,7 @@
                 </a:solidFill>
                 <a:latin typeface="Arial"/>
               </a:rPr>
-              <a:t>Knowledge domain  ·  SIDE GOAL</a:t>
+              <a:t>Knowledge domain  ·  SEPARATE</a:t>
             </a:r>
           </a:p>
         </p:txBody>
@@ -16468,8 +16535,8 @@
                 </a:solidFill>
                 <a:latin typeface="Arial"/>
               </a:rPr>
-              <a:t>Q&amp;A on secured copy + metadata
-Ask Docs golden-question path</a:t>
+              <a:t>Ask AT&amp;T Q&amp;A on secured copy
+Golden-question quality path</a:t>
             </a:r>
           </a:p>
         </p:txBody>
